--- a/slides/Module-05-Risk-Modelling.pptx
+++ b/slides/Module-05-Risk-Modelling.pptx
@@ -13,6 +13,8 @@
     <p:sldId id="261" r:id="rId12"/>
     <p:sldId id="262" r:id="rId13"/>
     <p:sldId id="263" r:id="rId14"/>
+    <p:sldId id="264" r:id="rId15"/>
+    <p:sldId id="265" r:id="rId16"/>
   </p:sldIdLst>
   <p:sldSz cx="12191695" cy="6858000" type="screen4x3"/>
   <p:notesSz cx="6858000" cy="9144000"/>
@@ -3748,6 +3750,1423 @@
 </p:sld>
 </file>
 
+<file path=ppt/slides/slide10.xml><?xml version="1.0" encoding="utf-8"?>
+<p:sld xmlns:a="http://schemas.openxmlformats.org/drawingml/2006/main" xmlns:p="http://schemas.openxmlformats.org/presentationml/2006/main" xmlns:r="http://schemas.openxmlformats.org/officeDocument/2006/relationships">
+  <p:cSld>
+    <p:bg>
+      <p:bgPr>
+        <a:solidFill>
+          <a:srgbClr val="F7F8FA"/>
+        </a:solidFill>
+        <a:effectLst/>
+      </p:bgPr>
+    </p:bg>
+    <p:spTree>
+      <p:nvGrpSpPr>
+        <p:cNvPr id="1" name=""/>
+        <p:cNvGrpSpPr/>
+        <p:nvPr/>
+      </p:nvGrpSpPr>
+      <p:grpSpPr/>
+      <p:sp>
+        <p:nvSpPr>
+          <p:cNvPr id="2" name="Rectangle 1"/>
+          <p:cNvSpPr/>
+          <p:nvPr/>
+        </p:nvSpPr>
+        <p:spPr>
+          <a:xfrm>
+            <a:off x="548640" y="402336"/>
+            <a:ext cx="118872" cy="118872"/>
+          </a:xfrm>
+          <a:prstGeom prst="rect">
+            <a:avLst/>
+          </a:prstGeom>
+          <a:solidFill>
+            <a:srgbClr val="C9A227"/>
+          </a:solidFill>
+          <a:ln>
+            <a:noFill/>
+          </a:ln>
+          <a:effectLst/>
+        </p:spPr>
+        <p:style>
+          <a:lnRef idx="1">
+            <a:schemeClr val="accent1"/>
+          </a:lnRef>
+          <a:fillRef idx="3">
+            <a:schemeClr val="accent1"/>
+          </a:fillRef>
+          <a:effectRef idx="2">
+            <a:schemeClr val="accent1"/>
+          </a:effectRef>
+          <a:fontRef idx="minor">
+            <a:schemeClr val="lt1"/>
+          </a:fontRef>
+        </p:style>
+        <p:txBody>
+          <a:bodyPr rtlCol="0" anchor="ctr"/>
+          <a:lstStyle/>
+          <a:p>
+            <a:pPr algn="ctr"/>
+          </a:p>
+        </p:txBody>
+      </p:sp>
+      <p:sp>
+        <p:nvSpPr>
+          <p:cNvPr id="3" name="TextBox 2"/>
+          <p:cNvSpPr txBox="1"/>
+          <p:nvPr/>
+        </p:nvSpPr>
+        <p:spPr>
+          <a:xfrm>
+            <a:off x="786384" y="310896"/>
+            <a:ext cx="10817352" cy="274320"/>
+          </a:xfrm>
+          <a:prstGeom prst="rect">
+            <a:avLst/>
+          </a:prstGeom>
+          <a:noFill/>
+        </p:spPr>
+        <p:txBody>
+          <a:bodyPr wrap="square" anchor="t" lIns="0" rIns="0" tIns="0" bIns="0">
+            <a:spAutoFit/>
+          </a:bodyPr>
+          <a:lstStyle/>
+          <a:p>
+            <a:pPr algn="l"/>
+            <a:r>
+              <a:rPr sz="1100" b="1">
+                <a:solidFill>
+                  <a:srgbClr val="C9A227"/>
+                </a:solidFill>
+              </a:rPr>
+              <a:t>PRACTICE QUESTIONS</a:t>
+            </a:r>
+          </a:p>
+        </p:txBody>
+      </p:sp>
+      <p:sp>
+        <p:nvSpPr>
+          <p:cNvPr id="4" name="TextBox 3"/>
+          <p:cNvSpPr txBox="1"/>
+          <p:nvPr/>
+        </p:nvSpPr>
+        <p:spPr>
+          <a:xfrm>
+            <a:off x="548640" y="621792"/>
+            <a:ext cx="11091672" cy="731520"/>
+          </a:xfrm>
+          <a:prstGeom prst="rect">
+            <a:avLst/>
+          </a:prstGeom>
+          <a:noFill/>
+        </p:spPr>
+        <p:txBody>
+          <a:bodyPr wrap="square" anchor="t" lIns="0" rIns="0" tIns="0" bIns="0">
+            <a:spAutoFit/>
+          </a:bodyPr>
+          <a:lstStyle/>
+          <a:p>
+            <a:pPr algn="l"/>
+            <a:r>
+              <a:rPr sz="2900" b="1">
+                <a:solidFill>
+                  <a:srgbClr val="0F2145"/>
+                </a:solidFill>
+                <a:latin typeface="Georgia"/>
+              </a:rPr>
+              <a:t>Six questions before the exam</a:t>
+            </a:r>
+          </a:p>
+        </p:txBody>
+      </p:sp>
+      <p:sp>
+        <p:nvSpPr>
+          <p:cNvPr id="5" name="Rectangle 4"/>
+          <p:cNvSpPr/>
+          <p:nvPr/>
+        </p:nvSpPr>
+        <p:spPr>
+          <a:xfrm>
+            <a:off x="548640" y="1444752"/>
+            <a:ext cx="11091672" cy="676656"/>
+          </a:xfrm>
+          <a:prstGeom prst="rect">
+            <a:avLst/>
+          </a:prstGeom>
+          <a:solidFill>
+            <a:srgbClr val="FFFFFF"/>
+          </a:solidFill>
+          <a:ln>
+            <a:noFill/>
+          </a:ln>
+          <a:effectLst/>
+        </p:spPr>
+        <p:style>
+          <a:lnRef idx="1">
+            <a:schemeClr val="accent1"/>
+          </a:lnRef>
+          <a:fillRef idx="3">
+            <a:schemeClr val="accent1"/>
+          </a:fillRef>
+          <a:effectRef idx="2">
+            <a:schemeClr val="accent1"/>
+          </a:effectRef>
+          <a:fontRef idx="minor">
+            <a:schemeClr val="lt1"/>
+          </a:fontRef>
+        </p:style>
+        <p:txBody>
+          <a:bodyPr rtlCol="0" anchor="ctr"/>
+          <a:lstStyle/>
+          <a:p>
+            <a:pPr algn="ctr"/>
+          </a:p>
+        </p:txBody>
+      </p:sp>
+      <p:sp>
+        <p:nvSpPr>
+          <p:cNvPr id="6" name="Rectangle 5"/>
+          <p:cNvSpPr/>
+          <p:nvPr/>
+        </p:nvSpPr>
+        <p:spPr>
+          <a:xfrm>
+            <a:off x="548640" y="1444752"/>
+            <a:ext cx="64008" cy="676656"/>
+          </a:xfrm>
+          <a:prstGeom prst="rect">
+            <a:avLst/>
+          </a:prstGeom>
+          <a:solidFill>
+            <a:srgbClr val="3A5C9E"/>
+          </a:solidFill>
+          <a:ln>
+            <a:noFill/>
+          </a:ln>
+          <a:effectLst/>
+        </p:spPr>
+        <p:style>
+          <a:lnRef idx="1">
+            <a:schemeClr val="accent1"/>
+          </a:lnRef>
+          <a:fillRef idx="3">
+            <a:schemeClr val="accent1"/>
+          </a:fillRef>
+          <a:effectRef idx="2">
+            <a:schemeClr val="accent1"/>
+          </a:effectRef>
+          <a:fontRef idx="minor">
+            <a:schemeClr val="lt1"/>
+          </a:fontRef>
+        </p:style>
+        <p:txBody>
+          <a:bodyPr rtlCol="0" anchor="ctr"/>
+          <a:lstStyle/>
+          <a:p>
+            <a:pPr algn="ctr"/>
+          </a:p>
+        </p:txBody>
+      </p:sp>
+      <p:sp>
+        <p:nvSpPr>
+          <p:cNvPr id="7" name="TextBox 6"/>
+          <p:cNvSpPr txBox="1"/>
+          <p:nvPr/>
+        </p:nvSpPr>
+        <p:spPr>
+          <a:xfrm>
+            <a:off x="822960" y="1508760"/>
+            <a:ext cx="640080" cy="365760"/>
+          </a:xfrm>
+          <a:prstGeom prst="rect">
+            <a:avLst/>
+          </a:prstGeom>
+          <a:noFill/>
+        </p:spPr>
+        <p:txBody>
+          <a:bodyPr wrap="square" anchor="t" lIns="0" rIns="0" tIns="0" bIns="0">
+            <a:spAutoFit/>
+          </a:bodyPr>
+          <a:lstStyle/>
+          <a:p>
+            <a:pPr algn="l"/>
+            <a:r>
+              <a:rPr sz="1400" b="1">
+                <a:solidFill>
+                  <a:srgbClr val="3A5C9E"/>
+                </a:solidFill>
+                <a:latin typeface="Georgia"/>
+              </a:rPr>
+              <a:t>Q1</a:t>
+            </a:r>
+          </a:p>
+        </p:txBody>
+      </p:sp>
+      <p:sp>
+        <p:nvSpPr>
+          <p:cNvPr id="8" name="TextBox 7"/>
+          <p:cNvSpPr txBox="1"/>
+          <p:nvPr/>
+        </p:nvSpPr>
+        <p:spPr>
+          <a:xfrm>
+            <a:off x="1554480" y="1499616"/>
+            <a:ext cx="9875520" cy="585216"/>
+          </a:xfrm>
+          <a:prstGeom prst="rect">
+            <a:avLst/>
+          </a:prstGeom>
+          <a:noFill/>
+        </p:spPr>
+        <p:txBody>
+          <a:bodyPr wrap="square" anchor="t" lIns="0" rIns="0" tIns="0" bIns="0">
+            <a:spAutoFit/>
+          </a:bodyPr>
+          <a:lstStyle/>
+          <a:p>
+            <a:pPr algn="l"/>
+            <a:r>
+              <a:rPr sz="1050" b="1">
+                <a:solidFill>
+                  <a:srgbClr val="1B2A41"/>
+                </a:solidFill>
+              </a:rPr>
+              <a:t>A loan has PD 3%, LGD 40% and EAD ₹5,00,000. What is the expected loss, and who pays it?</a:t>
+            </a:r>
+          </a:p>
+          <a:p>
+            <a:pPr algn="l">
+              <a:spcBef>
+                <a:spcPts val="200"/>
+              </a:spcBef>
+            </a:pPr>
+            <a:r>
+              <a:rPr sz="900" b="1">
+                <a:solidFill>
+                  <a:srgbClr val="C9A227"/>
+                </a:solidFill>
+              </a:rPr>
+              <a:t>TIP  </a:t>
+            </a:r>
+            <a:r>
+              <a:rPr sz="900" b="0">
+                <a:solidFill>
+                  <a:srgbClr val="5D6B7E"/>
+                </a:solidFill>
+              </a:rPr>
+              <a:t>₹6,000. The borrower pays it, priced into the interest rate, whether or not this loan goes bad.</a:t>
+            </a:r>
+          </a:p>
+        </p:txBody>
+      </p:sp>
+      <p:sp>
+        <p:nvSpPr>
+          <p:cNvPr id="9" name="Rectangle 8"/>
+          <p:cNvSpPr/>
+          <p:nvPr/>
+        </p:nvSpPr>
+        <p:spPr>
+          <a:xfrm>
+            <a:off x="548640" y="2176272"/>
+            <a:ext cx="11091672" cy="676656"/>
+          </a:xfrm>
+          <a:prstGeom prst="rect">
+            <a:avLst/>
+          </a:prstGeom>
+          <a:solidFill>
+            <a:srgbClr val="FFFFFF"/>
+          </a:solidFill>
+          <a:ln>
+            <a:noFill/>
+          </a:ln>
+          <a:effectLst/>
+        </p:spPr>
+        <p:style>
+          <a:lnRef idx="1">
+            <a:schemeClr val="accent1"/>
+          </a:lnRef>
+          <a:fillRef idx="3">
+            <a:schemeClr val="accent1"/>
+          </a:fillRef>
+          <a:effectRef idx="2">
+            <a:schemeClr val="accent1"/>
+          </a:effectRef>
+          <a:fontRef idx="minor">
+            <a:schemeClr val="lt1"/>
+          </a:fontRef>
+        </p:style>
+        <p:txBody>
+          <a:bodyPr rtlCol="0" anchor="ctr"/>
+          <a:lstStyle/>
+          <a:p>
+            <a:pPr algn="ctr"/>
+          </a:p>
+        </p:txBody>
+      </p:sp>
+      <p:sp>
+        <p:nvSpPr>
+          <p:cNvPr id="10" name="Rectangle 9"/>
+          <p:cNvSpPr/>
+          <p:nvPr/>
+        </p:nvSpPr>
+        <p:spPr>
+          <a:xfrm>
+            <a:off x="548640" y="2176272"/>
+            <a:ext cx="64008" cy="676656"/>
+          </a:xfrm>
+          <a:prstGeom prst="rect">
+            <a:avLst/>
+          </a:prstGeom>
+          <a:solidFill>
+            <a:srgbClr val="3A5C9E"/>
+          </a:solidFill>
+          <a:ln>
+            <a:noFill/>
+          </a:ln>
+          <a:effectLst/>
+        </p:spPr>
+        <p:style>
+          <a:lnRef idx="1">
+            <a:schemeClr val="accent1"/>
+          </a:lnRef>
+          <a:fillRef idx="3">
+            <a:schemeClr val="accent1"/>
+          </a:fillRef>
+          <a:effectRef idx="2">
+            <a:schemeClr val="accent1"/>
+          </a:effectRef>
+          <a:fontRef idx="minor">
+            <a:schemeClr val="lt1"/>
+          </a:fontRef>
+        </p:style>
+        <p:txBody>
+          <a:bodyPr rtlCol="0" anchor="ctr"/>
+          <a:lstStyle/>
+          <a:p>
+            <a:pPr algn="ctr"/>
+          </a:p>
+        </p:txBody>
+      </p:sp>
+      <p:sp>
+        <p:nvSpPr>
+          <p:cNvPr id="11" name="TextBox 10"/>
+          <p:cNvSpPr txBox="1"/>
+          <p:nvPr/>
+        </p:nvSpPr>
+        <p:spPr>
+          <a:xfrm>
+            <a:off x="822960" y="2240279"/>
+            <a:ext cx="640080" cy="365760"/>
+          </a:xfrm>
+          <a:prstGeom prst="rect">
+            <a:avLst/>
+          </a:prstGeom>
+          <a:noFill/>
+        </p:spPr>
+        <p:txBody>
+          <a:bodyPr wrap="square" anchor="t" lIns="0" rIns="0" tIns="0" bIns="0">
+            <a:spAutoFit/>
+          </a:bodyPr>
+          <a:lstStyle/>
+          <a:p>
+            <a:pPr algn="l"/>
+            <a:r>
+              <a:rPr sz="1400" b="1">
+                <a:solidFill>
+                  <a:srgbClr val="3A5C9E"/>
+                </a:solidFill>
+                <a:latin typeface="Georgia"/>
+              </a:rPr>
+              <a:t>Q2</a:t>
+            </a:r>
+          </a:p>
+        </p:txBody>
+      </p:sp>
+      <p:sp>
+        <p:nvSpPr>
+          <p:cNvPr id="12" name="TextBox 11"/>
+          <p:cNvSpPr txBox="1"/>
+          <p:nvPr/>
+        </p:nvSpPr>
+        <p:spPr>
+          <a:xfrm>
+            <a:off x="1554480" y="2231136"/>
+            <a:ext cx="9875520" cy="585216"/>
+          </a:xfrm>
+          <a:prstGeom prst="rect">
+            <a:avLst/>
+          </a:prstGeom>
+          <a:noFill/>
+        </p:spPr>
+        <p:txBody>
+          <a:bodyPr wrap="square" anchor="t" lIns="0" rIns="0" tIns="0" bIns="0">
+            <a:spAutoFit/>
+          </a:bodyPr>
+          <a:lstStyle/>
+          <a:p>
+            <a:pPr algn="l"/>
+            <a:r>
+              <a:rPr sz="1050" b="1">
+                <a:solidFill>
+                  <a:srgbClr val="1B2A41"/>
+                </a:solidFill>
+              </a:rPr>
+              <a:t>Explain the difference between expected loss and unexpected loss, and what each is funded by.</a:t>
+            </a:r>
+          </a:p>
+          <a:p>
+            <a:pPr algn="l">
+              <a:spcBef>
+                <a:spcPts val="200"/>
+              </a:spcBef>
+            </a:pPr>
+            <a:r>
+              <a:rPr sz="900" b="1">
+                <a:solidFill>
+                  <a:srgbClr val="C9A227"/>
+                </a:solidFill>
+              </a:rPr>
+              <a:t>TIP  </a:t>
+            </a:r>
+            <a:r>
+              <a:rPr sz="900" b="0">
+                <a:solidFill>
+                  <a:srgbClr val="5D6B7E"/>
+                </a:solidFill>
+              </a:rPr>
+              <a:t>Expected loss is budgeted and priced in. Unexpected loss is the bad year, and capital is held against it.</a:t>
+            </a:r>
+          </a:p>
+        </p:txBody>
+      </p:sp>
+      <p:sp>
+        <p:nvSpPr>
+          <p:cNvPr id="13" name="Rectangle 12"/>
+          <p:cNvSpPr/>
+          <p:nvPr/>
+        </p:nvSpPr>
+        <p:spPr>
+          <a:xfrm>
+            <a:off x="548640" y="2907791"/>
+            <a:ext cx="11091672" cy="676656"/>
+          </a:xfrm>
+          <a:prstGeom prst="rect">
+            <a:avLst/>
+          </a:prstGeom>
+          <a:solidFill>
+            <a:srgbClr val="FFFFFF"/>
+          </a:solidFill>
+          <a:ln>
+            <a:noFill/>
+          </a:ln>
+          <a:effectLst/>
+        </p:spPr>
+        <p:style>
+          <a:lnRef idx="1">
+            <a:schemeClr val="accent1"/>
+          </a:lnRef>
+          <a:fillRef idx="3">
+            <a:schemeClr val="accent1"/>
+          </a:fillRef>
+          <a:effectRef idx="2">
+            <a:schemeClr val="accent1"/>
+          </a:effectRef>
+          <a:fontRef idx="minor">
+            <a:schemeClr val="lt1"/>
+          </a:fontRef>
+        </p:style>
+        <p:txBody>
+          <a:bodyPr rtlCol="0" anchor="ctr"/>
+          <a:lstStyle/>
+          <a:p>
+            <a:pPr algn="ctr"/>
+          </a:p>
+        </p:txBody>
+      </p:sp>
+      <p:sp>
+        <p:nvSpPr>
+          <p:cNvPr id="14" name="Rectangle 13"/>
+          <p:cNvSpPr/>
+          <p:nvPr/>
+        </p:nvSpPr>
+        <p:spPr>
+          <a:xfrm>
+            <a:off x="548640" y="2907791"/>
+            <a:ext cx="64008" cy="676656"/>
+          </a:xfrm>
+          <a:prstGeom prst="rect">
+            <a:avLst/>
+          </a:prstGeom>
+          <a:solidFill>
+            <a:srgbClr val="3A5C9E"/>
+          </a:solidFill>
+          <a:ln>
+            <a:noFill/>
+          </a:ln>
+          <a:effectLst/>
+        </p:spPr>
+        <p:style>
+          <a:lnRef idx="1">
+            <a:schemeClr val="accent1"/>
+          </a:lnRef>
+          <a:fillRef idx="3">
+            <a:schemeClr val="accent1"/>
+          </a:fillRef>
+          <a:effectRef idx="2">
+            <a:schemeClr val="accent1"/>
+          </a:effectRef>
+          <a:fontRef idx="minor">
+            <a:schemeClr val="lt1"/>
+          </a:fontRef>
+        </p:style>
+        <p:txBody>
+          <a:bodyPr rtlCol="0" anchor="ctr"/>
+          <a:lstStyle/>
+          <a:p>
+            <a:pPr algn="ctr"/>
+          </a:p>
+        </p:txBody>
+      </p:sp>
+      <p:sp>
+        <p:nvSpPr>
+          <p:cNvPr id="15" name="TextBox 14"/>
+          <p:cNvSpPr txBox="1"/>
+          <p:nvPr/>
+        </p:nvSpPr>
+        <p:spPr>
+          <a:xfrm>
+            <a:off x="822960" y="2971799"/>
+            <a:ext cx="640080" cy="365760"/>
+          </a:xfrm>
+          <a:prstGeom prst="rect">
+            <a:avLst/>
+          </a:prstGeom>
+          <a:noFill/>
+        </p:spPr>
+        <p:txBody>
+          <a:bodyPr wrap="square" anchor="t" lIns="0" rIns="0" tIns="0" bIns="0">
+            <a:spAutoFit/>
+          </a:bodyPr>
+          <a:lstStyle/>
+          <a:p>
+            <a:pPr algn="l"/>
+            <a:r>
+              <a:rPr sz="1400" b="1">
+                <a:solidFill>
+                  <a:srgbClr val="3A5C9E"/>
+                </a:solidFill>
+                <a:latin typeface="Georgia"/>
+              </a:rPr>
+              <a:t>Q3</a:t>
+            </a:r>
+          </a:p>
+        </p:txBody>
+      </p:sp>
+      <p:sp>
+        <p:nvSpPr>
+          <p:cNvPr id="16" name="TextBox 15"/>
+          <p:cNvSpPr txBox="1"/>
+          <p:nvPr/>
+        </p:nvSpPr>
+        <p:spPr>
+          <a:xfrm>
+            <a:off x="1554480" y="2962656"/>
+            <a:ext cx="9875520" cy="585216"/>
+          </a:xfrm>
+          <a:prstGeom prst="rect">
+            <a:avLst/>
+          </a:prstGeom>
+          <a:noFill/>
+        </p:spPr>
+        <p:txBody>
+          <a:bodyPr wrap="square" anchor="t" lIns="0" rIns="0" tIns="0" bIns="0">
+            <a:spAutoFit/>
+          </a:bodyPr>
+          <a:lstStyle/>
+          <a:p>
+            <a:pPr algn="l"/>
+            <a:r>
+              <a:rPr sz="1050" b="1">
+                <a:solidFill>
+                  <a:srgbClr val="1B2A41"/>
+                </a:solidFill>
+              </a:rPr>
+              <a:t>A PD model scores AUC 0.78. Say what that means without using the word AUC.</a:t>
+            </a:r>
+          </a:p>
+          <a:p>
+            <a:pPr algn="l">
+              <a:spcBef>
+                <a:spcPts val="200"/>
+              </a:spcBef>
+            </a:pPr>
+            <a:r>
+              <a:rPr sz="900" b="1">
+                <a:solidFill>
+                  <a:srgbClr val="C9A227"/>
+                </a:solidFill>
+              </a:rPr>
+              <a:t>TIP  </a:t>
+            </a:r>
+            <a:r>
+              <a:rPr sz="900" b="0">
+                <a:solidFill>
+                  <a:srgbClr val="5D6B7E"/>
+                </a:solidFill>
+              </a:rPr>
+              <a:t>Take a defaulter and a non-defaulter at random; 78 times in 100 the model scores the defaulter as riskier.</a:t>
+            </a:r>
+          </a:p>
+        </p:txBody>
+      </p:sp>
+      <p:sp>
+        <p:nvSpPr>
+          <p:cNvPr id="17" name="Rectangle 16"/>
+          <p:cNvSpPr/>
+          <p:nvPr/>
+        </p:nvSpPr>
+        <p:spPr>
+          <a:xfrm>
+            <a:off x="548640" y="3639311"/>
+            <a:ext cx="11091672" cy="676656"/>
+          </a:xfrm>
+          <a:prstGeom prst="rect">
+            <a:avLst/>
+          </a:prstGeom>
+          <a:solidFill>
+            <a:srgbClr val="FFFFFF"/>
+          </a:solidFill>
+          <a:ln>
+            <a:noFill/>
+          </a:ln>
+          <a:effectLst/>
+        </p:spPr>
+        <p:style>
+          <a:lnRef idx="1">
+            <a:schemeClr val="accent1"/>
+          </a:lnRef>
+          <a:fillRef idx="3">
+            <a:schemeClr val="accent1"/>
+          </a:fillRef>
+          <a:effectRef idx="2">
+            <a:schemeClr val="accent1"/>
+          </a:effectRef>
+          <a:fontRef idx="minor">
+            <a:schemeClr val="lt1"/>
+          </a:fontRef>
+        </p:style>
+        <p:txBody>
+          <a:bodyPr rtlCol="0" anchor="ctr"/>
+          <a:lstStyle/>
+          <a:p>
+            <a:pPr algn="ctr"/>
+          </a:p>
+        </p:txBody>
+      </p:sp>
+      <p:sp>
+        <p:nvSpPr>
+          <p:cNvPr id="18" name="Rectangle 17"/>
+          <p:cNvSpPr/>
+          <p:nvPr/>
+        </p:nvSpPr>
+        <p:spPr>
+          <a:xfrm>
+            <a:off x="548640" y="3639311"/>
+            <a:ext cx="64008" cy="676656"/>
+          </a:xfrm>
+          <a:prstGeom prst="rect">
+            <a:avLst/>
+          </a:prstGeom>
+          <a:solidFill>
+            <a:srgbClr val="3A5C9E"/>
+          </a:solidFill>
+          <a:ln>
+            <a:noFill/>
+          </a:ln>
+          <a:effectLst/>
+        </p:spPr>
+        <p:style>
+          <a:lnRef idx="1">
+            <a:schemeClr val="accent1"/>
+          </a:lnRef>
+          <a:fillRef idx="3">
+            <a:schemeClr val="accent1"/>
+          </a:fillRef>
+          <a:effectRef idx="2">
+            <a:schemeClr val="accent1"/>
+          </a:effectRef>
+          <a:fontRef idx="minor">
+            <a:schemeClr val="lt1"/>
+          </a:fontRef>
+        </p:style>
+        <p:txBody>
+          <a:bodyPr rtlCol="0" anchor="ctr"/>
+          <a:lstStyle/>
+          <a:p>
+            <a:pPr algn="ctr"/>
+          </a:p>
+        </p:txBody>
+      </p:sp>
+      <p:sp>
+        <p:nvSpPr>
+          <p:cNvPr id="19" name="TextBox 18"/>
+          <p:cNvSpPr txBox="1"/>
+          <p:nvPr/>
+        </p:nvSpPr>
+        <p:spPr>
+          <a:xfrm>
+            <a:off x="822960" y="3703320"/>
+            <a:ext cx="640080" cy="365760"/>
+          </a:xfrm>
+          <a:prstGeom prst="rect">
+            <a:avLst/>
+          </a:prstGeom>
+          <a:noFill/>
+        </p:spPr>
+        <p:txBody>
+          <a:bodyPr wrap="square" anchor="t" lIns="0" rIns="0" tIns="0" bIns="0">
+            <a:spAutoFit/>
+          </a:bodyPr>
+          <a:lstStyle/>
+          <a:p>
+            <a:pPr algn="l"/>
+            <a:r>
+              <a:rPr sz="1400" b="1">
+                <a:solidFill>
+                  <a:srgbClr val="3A5C9E"/>
+                </a:solidFill>
+                <a:latin typeface="Georgia"/>
+              </a:rPr>
+              <a:t>Q4</a:t>
+            </a:r>
+          </a:p>
+        </p:txBody>
+      </p:sp>
+      <p:sp>
+        <p:nvSpPr>
+          <p:cNvPr id="20" name="TextBox 19"/>
+          <p:cNvSpPr txBox="1"/>
+          <p:nvPr/>
+        </p:nvSpPr>
+        <p:spPr>
+          <a:xfrm>
+            <a:off x="1554480" y="3694175"/>
+            <a:ext cx="9875520" cy="585216"/>
+          </a:xfrm>
+          <a:prstGeom prst="rect">
+            <a:avLst/>
+          </a:prstGeom>
+          <a:noFill/>
+        </p:spPr>
+        <p:txBody>
+          <a:bodyPr wrap="square" anchor="t" lIns="0" rIns="0" tIns="0" bIns="0">
+            <a:spAutoFit/>
+          </a:bodyPr>
+          <a:lstStyle/>
+          <a:p>
+            <a:pPr algn="l"/>
+            <a:r>
+              <a:rPr sz="1050" b="1">
+                <a:solidFill>
+                  <a:srgbClr val="1B2A41"/>
+                </a:solidFill>
+              </a:rPr>
+              <a:t>Your XGBoost model beats the logistic regression. Give one reason you might still ship the regression.</a:t>
+            </a:r>
+          </a:p>
+          <a:p>
+            <a:pPr algn="l">
+              <a:spcBef>
+                <a:spcPts val="200"/>
+              </a:spcBef>
+            </a:pPr>
+            <a:r>
+              <a:rPr sz="900" b="1">
+                <a:solidFill>
+                  <a:srgbClr val="C9A227"/>
+                </a:solidFill>
+              </a:rPr>
+              <a:t>TIP  </a:t>
+            </a:r>
+            <a:r>
+              <a:rPr sz="900" b="0">
+                <a:solidFill>
+                  <a:srgbClr val="5D6B7E"/>
+                </a:solidFill>
+              </a:rPr>
+              <a:t>You can print it, explain a single decline, and defend it to a regulator. Accuracy is not the only test.</a:t>
+            </a:r>
+          </a:p>
+        </p:txBody>
+      </p:sp>
+      <p:sp>
+        <p:nvSpPr>
+          <p:cNvPr id="21" name="Rectangle 20"/>
+          <p:cNvSpPr/>
+          <p:nvPr/>
+        </p:nvSpPr>
+        <p:spPr>
+          <a:xfrm>
+            <a:off x="548640" y="4370831"/>
+            <a:ext cx="11091672" cy="676656"/>
+          </a:xfrm>
+          <a:prstGeom prst="rect">
+            <a:avLst/>
+          </a:prstGeom>
+          <a:solidFill>
+            <a:srgbClr val="FFFFFF"/>
+          </a:solidFill>
+          <a:ln>
+            <a:noFill/>
+          </a:ln>
+          <a:effectLst/>
+        </p:spPr>
+        <p:style>
+          <a:lnRef idx="1">
+            <a:schemeClr val="accent1"/>
+          </a:lnRef>
+          <a:fillRef idx="3">
+            <a:schemeClr val="accent1"/>
+          </a:fillRef>
+          <a:effectRef idx="2">
+            <a:schemeClr val="accent1"/>
+          </a:effectRef>
+          <a:fontRef idx="minor">
+            <a:schemeClr val="lt1"/>
+          </a:fontRef>
+        </p:style>
+        <p:txBody>
+          <a:bodyPr rtlCol="0" anchor="ctr"/>
+          <a:lstStyle/>
+          <a:p>
+            <a:pPr algn="ctr"/>
+          </a:p>
+        </p:txBody>
+      </p:sp>
+      <p:sp>
+        <p:nvSpPr>
+          <p:cNvPr id="22" name="Rectangle 21"/>
+          <p:cNvSpPr/>
+          <p:nvPr/>
+        </p:nvSpPr>
+        <p:spPr>
+          <a:xfrm>
+            <a:off x="548640" y="4370831"/>
+            <a:ext cx="64008" cy="676656"/>
+          </a:xfrm>
+          <a:prstGeom prst="rect">
+            <a:avLst/>
+          </a:prstGeom>
+          <a:solidFill>
+            <a:srgbClr val="3A5C9E"/>
+          </a:solidFill>
+          <a:ln>
+            <a:noFill/>
+          </a:ln>
+          <a:effectLst/>
+        </p:spPr>
+        <p:style>
+          <a:lnRef idx="1">
+            <a:schemeClr val="accent1"/>
+          </a:lnRef>
+          <a:fillRef idx="3">
+            <a:schemeClr val="accent1"/>
+          </a:fillRef>
+          <a:effectRef idx="2">
+            <a:schemeClr val="accent1"/>
+          </a:effectRef>
+          <a:fontRef idx="minor">
+            <a:schemeClr val="lt1"/>
+          </a:fontRef>
+        </p:style>
+        <p:txBody>
+          <a:bodyPr rtlCol="0" anchor="ctr"/>
+          <a:lstStyle/>
+          <a:p>
+            <a:pPr algn="ctr"/>
+          </a:p>
+        </p:txBody>
+      </p:sp>
+      <p:sp>
+        <p:nvSpPr>
+          <p:cNvPr id="23" name="TextBox 22"/>
+          <p:cNvSpPr txBox="1"/>
+          <p:nvPr/>
+        </p:nvSpPr>
+        <p:spPr>
+          <a:xfrm>
+            <a:off x="822960" y="4434840"/>
+            <a:ext cx="640080" cy="365760"/>
+          </a:xfrm>
+          <a:prstGeom prst="rect">
+            <a:avLst/>
+          </a:prstGeom>
+          <a:noFill/>
+        </p:spPr>
+        <p:txBody>
+          <a:bodyPr wrap="square" anchor="t" lIns="0" rIns="0" tIns="0" bIns="0">
+            <a:spAutoFit/>
+          </a:bodyPr>
+          <a:lstStyle/>
+          <a:p>
+            <a:pPr algn="l"/>
+            <a:r>
+              <a:rPr sz="1400" b="1">
+                <a:solidFill>
+                  <a:srgbClr val="3A5C9E"/>
+                </a:solidFill>
+                <a:latin typeface="Georgia"/>
+              </a:rPr>
+              <a:t>Q5</a:t>
+            </a:r>
+          </a:p>
+        </p:txBody>
+      </p:sp>
+      <p:sp>
+        <p:nvSpPr>
+          <p:cNvPr id="24" name="TextBox 23"/>
+          <p:cNvSpPr txBox="1"/>
+          <p:nvPr/>
+        </p:nvSpPr>
+        <p:spPr>
+          <a:xfrm>
+            <a:off x="1554480" y="4425695"/>
+            <a:ext cx="9875520" cy="585216"/>
+          </a:xfrm>
+          <a:prstGeom prst="rect">
+            <a:avLst/>
+          </a:prstGeom>
+          <a:noFill/>
+        </p:spPr>
+        <p:txBody>
+          <a:bodyPr wrap="square" anchor="t" lIns="0" rIns="0" tIns="0" bIns="0">
+            <a:spAutoFit/>
+          </a:bodyPr>
+          <a:lstStyle/>
+          <a:p>
+            <a:pPr algn="l"/>
+            <a:r>
+              <a:rPr sz="1050" b="1">
+                <a:solidFill>
+                  <a:srgbClr val="1B2A41"/>
+                </a:solidFill>
+              </a:rPr>
+              <a:t>Historical, parametric and Monte Carlo give three different VaRs on one portfolio. Why, and which do you report?</a:t>
+            </a:r>
+          </a:p>
+          <a:p>
+            <a:pPr algn="l">
+              <a:spcBef>
+                <a:spcPts val="200"/>
+              </a:spcBef>
+            </a:pPr>
+            <a:r>
+              <a:rPr sz="900" b="1">
+                <a:solidFill>
+                  <a:srgbClr val="C9A227"/>
+                </a:solidFill>
+              </a:rPr>
+              <a:t>TIP  </a:t>
+            </a:r>
+            <a:r>
+              <a:rPr sz="900" b="0">
+                <a:solidFill>
+                  <a:srgbClr val="5D6B7E"/>
+                </a:solidFill>
+              </a:rPr>
+              <a:t>Each assumes something different about returns. Report the method your policy names, and disclose the other two.</a:t>
+            </a:r>
+          </a:p>
+        </p:txBody>
+      </p:sp>
+      <p:sp>
+        <p:nvSpPr>
+          <p:cNvPr id="25" name="Rectangle 24"/>
+          <p:cNvSpPr/>
+          <p:nvPr/>
+        </p:nvSpPr>
+        <p:spPr>
+          <a:xfrm>
+            <a:off x="548640" y="5102351"/>
+            <a:ext cx="11091672" cy="676656"/>
+          </a:xfrm>
+          <a:prstGeom prst="rect">
+            <a:avLst/>
+          </a:prstGeom>
+          <a:solidFill>
+            <a:srgbClr val="FFFFFF"/>
+          </a:solidFill>
+          <a:ln>
+            <a:noFill/>
+          </a:ln>
+          <a:effectLst/>
+        </p:spPr>
+        <p:style>
+          <a:lnRef idx="1">
+            <a:schemeClr val="accent1"/>
+          </a:lnRef>
+          <a:fillRef idx="3">
+            <a:schemeClr val="accent1"/>
+          </a:fillRef>
+          <a:effectRef idx="2">
+            <a:schemeClr val="accent1"/>
+          </a:effectRef>
+          <a:fontRef idx="minor">
+            <a:schemeClr val="lt1"/>
+          </a:fontRef>
+        </p:style>
+        <p:txBody>
+          <a:bodyPr rtlCol="0" anchor="ctr"/>
+          <a:lstStyle/>
+          <a:p>
+            <a:pPr algn="ctr"/>
+          </a:p>
+        </p:txBody>
+      </p:sp>
+      <p:sp>
+        <p:nvSpPr>
+          <p:cNvPr id="26" name="Rectangle 25"/>
+          <p:cNvSpPr/>
+          <p:nvPr/>
+        </p:nvSpPr>
+        <p:spPr>
+          <a:xfrm>
+            <a:off x="548640" y="5102351"/>
+            <a:ext cx="64008" cy="676656"/>
+          </a:xfrm>
+          <a:prstGeom prst="rect">
+            <a:avLst/>
+          </a:prstGeom>
+          <a:solidFill>
+            <a:srgbClr val="3A5C9E"/>
+          </a:solidFill>
+          <a:ln>
+            <a:noFill/>
+          </a:ln>
+          <a:effectLst/>
+        </p:spPr>
+        <p:style>
+          <a:lnRef idx="1">
+            <a:schemeClr val="accent1"/>
+          </a:lnRef>
+          <a:fillRef idx="3">
+            <a:schemeClr val="accent1"/>
+          </a:fillRef>
+          <a:effectRef idx="2">
+            <a:schemeClr val="accent1"/>
+          </a:effectRef>
+          <a:fontRef idx="minor">
+            <a:schemeClr val="lt1"/>
+          </a:fontRef>
+        </p:style>
+        <p:txBody>
+          <a:bodyPr rtlCol="0" anchor="ctr"/>
+          <a:lstStyle/>
+          <a:p>
+            <a:pPr algn="ctr"/>
+          </a:p>
+        </p:txBody>
+      </p:sp>
+      <p:sp>
+        <p:nvSpPr>
+          <p:cNvPr id="27" name="TextBox 26"/>
+          <p:cNvSpPr txBox="1"/>
+          <p:nvPr/>
+        </p:nvSpPr>
+        <p:spPr>
+          <a:xfrm>
+            <a:off x="822960" y="5166359"/>
+            <a:ext cx="640080" cy="365760"/>
+          </a:xfrm>
+          <a:prstGeom prst="rect">
+            <a:avLst/>
+          </a:prstGeom>
+          <a:noFill/>
+        </p:spPr>
+        <p:txBody>
+          <a:bodyPr wrap="square" anchor="t" lIns="0" rIns="0" tIns="0" bIns="0">
+            <a:spAutoFit/>
+          </a:bodyPr>
+          <a:lstStyle/>
+          <a:p>
+            <a:pPr algn="l"/>
+            <a:r>
+              <a:rPr sz="1400" b="1">
+                <a:solidFill>
+                  <a:srgbClr val="3A5C9E"/>
+                </a:solidFill>
+                <a:latin typeface="Georgia"/>
+              </a:rPr>
+              <a:t>Q6</a:t>
+            </a:r>
+          </a:p>
+        </p:txBody>
+      </p:sp>
+      <p:sp>
+        <p:nvSpPr>
+          <p:cNvPr id="28" name="TextBox 27"/>
+          <p:cNvSpPr txBox="1"/>
+          <p:nvPr/>
+        </p:nvSpPr>
+        <p:spPr>
+          <a:xfrm>
+            <a:off x="1554480" y="5157215"/>
+            <a:ext cx="9875520" cy="585216"/>
+          </a:xfrm>
+          <a:prstGeom prst="rect">
+            <a:avLst/>
+          </a:prstGeom>
+          <a:noFill/>
+        </p:spPr>
+        <p:txBody>
+          <a:bodyPr wrap="square" anchor="t" lIns="0" rIns="0" tIns="0" bIns="0">
+            <a:spAutoFit/>
+          </a:bodyPr>
+          <a:lstStyle/>
+          <a:p>
+            <a:pPr algn="l"/>
+            <a:r>
+              <a:rPr sz="1050" b="1">
+                <a:solidFill>
+                  <a:srgbClr val="1B2A41"/>
+                </a:solidFill>
+              </a:rPr>
+              <a:t>Your 99% one-day VaR is ₹6.6 lakh. In 250 trading days you breach it nine times. What does that tell you?</a:t>
+            </a:r>
+          </a:p>
+          <a:p>
+            <a:pPr algn="l">
+              <a:spcBef>
+                <a:spcPts val="200"/>
+              </a:spcBef>
+            </a:pPr>
+            <a:r>
+              <a:rPr sz="900" b="1">
+                <a:solidFill>
+                  <a:srgbClr val="C9A227"/>
+                </a:solidFill>
+              </a:rPr>
+              <a:t>TIP  </a:t>
+            </a:r>
+            <a:r>
+              <a:rPr sz="900" b="0">
+                <a:solidFill>
+                  <a:srgbClr val="5D6B7E"/>
+                </a:solidFill>
+              </a:rPr>
+              <a:t>You expected about 2 or 3. Nine says the model understates risk, and it must be rebuilt, not explained away.</a:t>
+            </a:r>
+          </a:p>
+        </p:txBody>
+      </p:sp>
+      <p:sp>
+        <p:nvSpPr>
+          <p:cNvPr id="29" name="Rectangle 28"/>
+          <p:cNvSpPr/>
+          <p:nvPr/>
+        </p:nvSpPr>
+        <p:spPr>
+          <a:xfrm>
+            <a:off x="548640" y="5870448"/>
+            <a:ext cx="11091672" cy="512064"/>
+          </a:xfrm>
+          <a:prstGeom prst="rect">
+            <a:avLst/>
+          </a:prstGeom>
+          <a:solidFill>
+            <a:srgbClr val="0F2145"/>
+          </a:solidFill>
+          <a:ln>
+            <a:noFill/>
+          </a:ln>
+          <a:effectLst/>
+        </p:spPr>
+        <p:style>
+          <a:lnRef idx="1">
+            <a:schemeClr val="accent1"/>
+          </a:lnRef>
+          <a:fillRef idx="3">
+            <a:schemeClr val="accent1"/>
+          </a:fillRef>
+          <a:effectRef idx="2">
+            <a:schemeClr val="accent1"/>
+          </a:effectRef>
+          <a:fontRef idx="minor">
+            <a:schemeClr val="lt1"/>
+          </a:fontRef>
+        </p:style>
+        <p:txBody>
+          <a:bodyPr rtlCol="0" anchor="ctr"/>
+          <a:lstStyle/>
+          <a:p>
+            <a:pPr algn="ctr"/>
+          </a:p>
+        </p:txBody>
+      </p:sp>
+      <p:sp>
+        <p:nvSpPr>
+          <p:cNvPr id="30" name="Rectangle 29"/>
+          <p:cNvSpPr/>
+          <p:nvPr/>
+        </p:nvSpPr>
+        <p:spPr>
+          <a:xfrm>
+            <a:off x="548640" y="5870448"/>
+            <a:ext cx="64008" cy="512064"/>
+          </a:xfrm>
+          <a:prstGeom prst="rect">
+            <a:avLst/>
+          </a:prstGeom>
+          <a:solidFill>
+            <a:srgbClr val="C9A227"/>
+          </a:solidFill>
+          <a:ln>
+            <a:noFill/>
+          </a:ln>
+          <a:effectLst/>
+        </p:spPr>
+        <p:style>
+          <a:lnRef idx="1">
+            <a:schemeClr val="accent1"/>
+          </a:lnRef>
+          <a:fillRef idx="3">
+            <a:schemeClr val="accent1"/>
+          </a:fillRef>
+          <a:effectRef idx="2">
+            <a:schemeClr val="accent1"/>
+          </a:effectRef>
+          <a:fontRef idx="minor">
+            <a:schemeClr val="lt1"/>
+          </a:fontRef>
+        </p:style>
+        <p:txBody>
+          <a:bodyPr rtlCol="0" anchor="ctr"/>
+          <a:lstStyle/>
+          <a:p>
+            <a:pPr algn="ctr"/>
+          </a:p>
+        </p:txBody>
+      </p:sp>
+      <p:sp>
+        <p:nvSpPr>
+          <p:cNvPr id="31" name="TextBox 30"/>
+          <p:cNvSpPr txBox="1"/>
+          <p:nvPr/>
+        </p:nvSpPr>
+        <p:spPr>
+          <a:xfrm>
+            <a:off x="822960" y="5870448"/>
+            <a:ext cx="10515600" cy="512064"/>
+          </a:xfrm>
+          <a:prstGeom prst="rect">
+            <a:avLst/>
+          </a:prstGeom>
+          <a:noFill/>
+        </p:spPr>
+        <p:txBody>
+          <a:bodyPr wrap="square" anchor="ctr" lIns="0" rIns="0" tIns="0" bIns="0">
+            <a:spAutoFit/>
+          </a:bodyPr>
+          <a:lstStyle/>
+          <a:p>
+            <a:pPr algn="l"/>
+            <a:r>
+              <a:rPr sz="1100" b="1">
+                <a:solidFill>
+                  <a:srgbClr val="C9A227"/>
+                </a:solidFill>
+              </a:rPr>
+              <a:t>Before Session 6:  </a:t>
+            </a:r>
+            <a:r>
+              <a:rPr sz="1100" b="0">
+                <a:solidFill>
+                  <a:srgbClr val="FFFFFF"/>
+                </a:solidFill>
+              </a:rPr>
+              <a:t>pick five listed stocks, and write down the one thing that would make all five fall together.</a:t>
+            </a:r>
+          </a:p>
+        </p:txBody>
+      </p:sp>
+      <p:sp>
+        <p:nvSpPr>
+          <p:cNvPr id="32" name="TextBox 31"/>
+          <p:cNvSpPr txBox="1"/>
+          <p:nvPr/>
+        </p:nvSpPr>
+        <p:spPr>
+          <a:xfrm>
+            <a:off x="548640" y="6473952"/>
+            <a:ext cx="8229600" cy="228600"/>
+          </a:xfrm>
+          <a:prstGeom prst="rect">
+            <a:avLst/>
+          </a:prstGeom>
+          <a:noFill/>
+        </p:spPr>
+        <p:txBody>
+          <a:bodyPr wrap="square" anchor="t" lIns="0" rIns="0" tIns="0" bIns="0">
+            <a:spAutoFit/>
+          </a:bodyPr>
+          <a:lstStyle/>
+          <a:p>
+            <a:pPr algn="l"/>
+            <a:r>
+              <a:rPr sz="800" b="0">
+                <a:solidFill>
+                  <a:srgbClr val="5D6B7E"/>
+                </a:solidFill>
+              </a:rPr>
+              <a:t>The tip is the shape of the answer, not the whole answer. Two or three sentences each in the exam.</a:t>
+            </a:r>
+          </a:p>
+        </p:txBody>
+      </p:sp>
+      <p:sp>
+        <p:nvSpPr>
+          <p:cNvPr id="33" name="TextBox 32"/>
+          <p:cNvSpPr txBox="1"/>
+          <p:nvPr/>
+        </p:nvSpPr>
+        <p:spPr>
+          <a:xfrm>
+            <a:off x="9262872" y="6473952"/>
+            <a:ext cx="2377440" cy="228600"/>
+          </a:xfrm>
+          <a:prstGeom prst="rect">
+            <a:avLst/>
+          </a:prstGeom>
+          <a:noFill/>
+        </p:spPr>
+        <p:txBody>
+          <a:bodyPr wrap="square" anchor="t" lIns="0" rIns="0" tIns="0" bIns="0">
+            <a:spAutoFit/>
+          </a:bodyPr>
+          <a:lstStyle/>
+          <a:p>
+            <a:pPr algn="r"/>
+            <a:r>
+              <a:rPr sz="800" b="0">
+                <a:solidFill>
+                  <a:srgbClr val="5D6B7E"/>
+                </a:solidFill>
+              </a:rPr>
+              <a:t>MODULE 5  ·  10</a:t>
+            </a:r>
+          </a:p>
+        </p:txBody>
+      </p:sp>
+    </p:spTree>
+  </p:cSld>
+  <p:clrMapOvr>
+    <a:masterClrMapping/>
+  </p:clrMapOvr>
+</p:sld>
+</file>
+
 <file path=ppt/slides/slide2.xml><?xml version="1.0" encoding="utf-8"?>
 <p:sld xmlns:a="http://schemas.openxmlformats.org/drawingml/2006/main" xmlns:p="http://schemas.openxmlformats.org/presentationml/2006/main" xmlns:r="http://schemas.openxmlformats.org/officeDocument/2006/relationships">
   <p:cSld>
@@ -6525,7 +7944,7 @@
                   <a:srgbClr val="C9A227"/>
                 </a:solidFill>
               </a:rPr>
-              <a:t>HOUR 1 · BUILDING THE MODEL</a:t>
+              <a:t>HOUR 1 · BASEL II</a:t>
             </a:r>
           </a:p>
         </p:txBody>
@@ -6560,7 +7979,7 @@
                 </a:solidFill>
                 <a:latin typeface="Georgia"/>
               </a:rPr>
-              <a:t>From a balance sheet to a probability</a:t>
+              <a:t>Who is allowed to use their own model?</a:t>
             </a:r>
           </a:p>
         </p:txBody>
@@ -6573,8 +7992,8 @@
         </p:nvSpPr>
         <p:spPr>
           <a:xfrm>
-            <a:off x="548640" y="1481328"/>
-            <a:ext cx="11091672" cy="310896"/>
+            <a:off x="548640" y="1444752"/>
+            <a:ext cx="11091672" cy="292608"/>
           </a:xfrm>
           <a:prstGeom prst="rect">
             <a:avLst/>
@@ -6594,7 +8013,7 @@
                   <a:srgbClr val="5D6B7E"/>
                 </a:solidFill>
               </a:rPr>
-              <a:t>You start with things you already know about the borrower, and you end with one number between 0 and 1.</a:t>
+              <a:t>Every bank must hold capital against its loans. Basel II gave banks two ways to work out how much.</a:t>
             </a:r>
           </a:p>
         </p:txBody>
@@ -6607,8 +8026,8 @@
         </p:nvSpPr>
         <p:spPr>
           <a:xfrm>
-            <a:off x="548640" y="1920240"/>
-            <a:ext cx="3611880" cy="3108960"/>
+            <a:off x="548640" y="1828800"/>
+            <a:ext cx="5486400" cy="2377440"/>
           </a:xfrm>
           <a:prstGeom prst="rect">
             <a:avLst/>
@@ -6651,8 +8070,8 @@
         </p:nvSpPr>
         <p:spPr>
           <a:xfrm>
-            <a:off x="804672" y="2139696"/>
-            <a:ext cx="3108960" cy="274320"/>
+            <a:off x="804672" y="2011680"/>
+            <a:ext cx="4937760" cy="274320"/>
           </a:xfrm>
           <a:prstGeom prst="rect">
             <a:avLst/>
@@ -6672,7 +8091,7 @@
                   <a:srgbClr val="3A5C9E"/>
                 </a:solidFill>
               </a:rPr>
-              <a:t>WHAT GOES IN</a:t>
+              <a:t>THE STANDARDISED APPROACH</a:t>
             </a:r>
           </a:p>
         </p:txBody>
@@ -6685,29 +8104,29 @@
         </p:nvSpPr>
         <p:spPr>
           <a:xfrm>
-            <a:off x="804672" y="2450592"/>
-            <a:ext cx="3108960" cy="365760"/>
-          </a:xfrm>
-          <a:prstGeom prst="rect">
-            <a:avLst/>
-          </a:prstGeom>
-          <a:noFill/>
-        </p:spPr>
-        <p:txBody>
-          <a:bodyPr wrap="square" anchor="t" lIns="0" rIns="0" tIns="0" bIns="0">
-            <a:spAutoFit/>
-          </a:bodyPr>
-          <a:lstStyle/>
-          <a:p>
-            <a:pPr algn="l"/>
-            <a:r>
-              <a:rPr sz="1400" b="1">
+            <a:off x="804672" y="2322576"/>
+            <a:ext cx="4937760" cy="329184"/>
+          </a:xfrm>
+          <a:prstGeom prst="rect">
+            <a:avLst/>
+          </a:prstGeom>
+          <a:noFill/>
+        </p:spPr>
+        <p:txBody>
+          <a:bodyPr wrap="square" anchor="t" lIns="0" rIns="0" tIns="0" bIns="0">
+            <a:spAutoFit/>
+          </a:bodyPr>
+          <a:lstStyle/>
+          <a:p>
+            <a:pPr algn="l"/>
+            <a:r>
+              <a:rPr sz="1500" b="1">
                 <a:solidFill>
                   <a:srgbClr val="0F2145"/>
                 </a:solidFill>
                 <a:latin typeface="Georgia"/>
               </a:rPr>
-              <a:t>The ratios you already compute</a:t>
+              <a:t>The regulator gives you the numbers.</a:t>
             </a:r>
           </a:p>
         </p:txBody>
@@ -6720,23 +8139,23 @@
         </p:nvSpPr>
         <p:spPr>
           <a:xfrm>
-            <a:off x="804672" y="2962656"/>
-            <a:ext cx="3108960" cy="457200"/>
-          </a:xfrm>
-          <a:prstGeom prst="rect">
-            <a:avLst/>
-          </a:prstGeom>
-          <a:noFill/>
-        </p:spPr>
-        <p:txBody>
-          <a:bodyPr wrap="square" anchor="t" lIns="0" rIns="0" tIns="0" bIns="0">
-            <a:spAutoFit/>
-          </a:bodyPr>
-          <a:lstStyle/>
-          <a:p>
-            <a:pPr algn="l"/>
-            <a:r>
-              <a:rPr sz="1000" b="1">
+            <a:off x="804672" y="2743200"/>
+            <a:ext cx="4937760" cy="347472"/>
+          </a:xfrm>
+          <a:prstGeom prst="rect">
+            <a:avLst/>
+          </a:prstGeom>
+          <a:noFill/>
+        </p:spPr>
+        <p:txBody>
+          <a:bodyPr wrap="square" anchor="t" lIns="0" rIns="0" tIns="0" bIns="0">
+            <a:spAutoFit/>
+          </a:bodyPr>
+          <a:lstStyle/>
+          <a:p>
+            <a:pPr algn="l"/>
+            <a:r>
+              <a:rPr sz="950" b="1">
                 <a:solidFill>
                   <a:srgbClr val="C9A227"/>
                 </a:solidFill>
@@ -6744,12 +8163,12 @@
               <a:t>▪  </a:t>
             </a:r>
             <a:r>
-              <a:rPr sz="1000" b="0">
+              <a:rPr sz="950" b="0">
                 <a:solidFill>
                   <a:srgbClr val="1B2A41"/>
                 </a:solidFill>
               </a:rPr>
-              <a:t>Current ratio and quick ratio</a:t>
+              <a:t>A loan gets a risk weight from a published table.</a:t>
             </a:r>
           </a:p>
         </p:txBody>
@@ -6762,23 +8181,23 @@
         </p:nvSpPr>
         <p:spPr>
           <a:xfrm>
-            <a:off x="804672" y="3438144"/>
-            <a:ext cx="3108960" cy="457200"/>
-          </a:xfrm>
-          <a:prstGeom prst="rect">
-            <a:avLst/>
-          </a:prstGeom>
-          <a:noFill/>
-        </p:spPr>
-        <p:txBody>
-          <a:bodyPr wrap="square" anchor="t" lIns="0" rIns="0" tIns="0" bIns="0">
-            <a:spAutoFit/>
-          </a:bodyPr>
-          <a:lstStyle/>
-          <a:p>
-            <a:pPr algn="l"/>
-            <a:r>
-              <a:rPr sz="1000" b="1">
+            <a:off x="804672" y="3108960"/>
+            <a:ext cx="4937760" cy="347472"/>
+          </a:xfrm>
+          <a:prstGeom prst="rect">
+            <a:avLst/>
+          </a:prstGeom>
+          <a:noFill/>
+        </p:spPr>
+        <p:txBody>
+          <a:bodyPr wrap="square" anchor="t" lIns="0" rIns="0" tIns="0" bIns="0">
+            <a:spAutoFit/>
+          </a:bodyPr>
+          <a:lstStyle/>
+          <a:p>
+            <a:pPr algn="l"/>
+            <a:r>
+              <a:rPr sz="950" b="1">
                 <a:solidFill>
                   <a:srgbClr val="C9A227"/>
                 </a:solidFill>
@@ -6786,12 +8205,12 @@
               <a:t>▪  </a:t>
             </a:r>
             <a:r>
-              <a:rPr sz="1000" b="0">
+              <a:rPr sz="950" b="0">
                 <a:solidFill>
                   <a:srgbClr val="1B2A41"/>
                 </a:solidFill>
               </a:rPr>
-              <a:t>Debt to equity, and interest cover</a:t>
+              <a:t>The weight comes off the borrower's external rating.</a:t>
             </a:r>
           </a:p>
         </p:txBody>
@@ -6804,23 +8223,23 @@
         </p:nvSpPr>
         <p:spPr>
           <a:xfrm>
-            <a:off x="804672" y="3913632"/>
-            <a:ext cx="3108960" cy="457200"/>
-          </a:xfrm>
-          <a:prstGeom prst="rect">
-            <a:avLst/>
-          </a:prstGeom>
-          <a:noFill/>
-        </p:spPr>
-        <p:txBody>
-          <a:bodyPr wrap="square" anchor="t" lIns="0" rIns="0" tIns="0" bIns="0">
-            <a:spAutoFit/>
-          </a:bodyPr>
-          <a:lstStyle/>
-          <a:p>
-            <a:pPr algn="l"/>
-            <a:r>
-              <a:rPr sz="1000" b="1">
+            <a:off x="804672" y="3474720"/>
+            <a:ext cx="4937760" cy="347472"/>
+          </a:xfrm>
+          <a:prstGeom prst="rect">
+            <a:avLst/>
+          </a:prstGeom>
+          <a:noFill/>
+        </p:spPr>
+        <p:txBody>
+          <a:bodyPr wrap="square" anchor="t" lIns="0" rIns="0" tIns="0" bIns="0">
+            <a:spAutoFit/>
+          </a:bodyPr>
+          <a:lstStyle/>
+          <a:p>
+            <a:pPr algn="l"/>
+            <a:r>
+              <a:rPr sz="950" b="1">
                 <a:solidFill>
                   <a:srgbClr val="C9A227"/>
                 </a:solidFill>
@@ -6828,12 +8247,12 @@
               <a:t>▪  </a:t>
             </a:r>
             <a:r>
-              <a:rPr sz="1000" b="0">
+              <a:rPr sz="950" b="0">
                 <a:solidFill>
                   <a:srgbClr val="1B2A41"/>
                 </a:solidFill>
               </a:rPr>
-              <a:t>Sales growth and margin trend</a:t>
+              <a:t>The bank models nothing and estimates nothing.</a:t>
             </a:r>
           </a:p>
         </p:txBody>
@@ -6846,23 +8265,23 @@
         </p:nvSpPr>
         <p:spPr>
           <a:xfrm>
-            <a:off x="804672" y="4389120"/>
-            <a:ext cx="3108960" cy="457200"/>
-          </a:xfrm>
-          <a:prstGeom prst="rect">
-            <a:avLst/>
-          </a:prstGeom>
-          <a:noFill/>
-        </p:spPr>
-        <p:txBody>
-          <a:bodyPr wrap="square" anchor="t" lIns="0" rIns="0" tIns="0" bIns="0">
-            <a:spAutoFit/>
-          </a:bodyPr>
-          <a:lstStyle/>
-          <a:p>
-            <a:pPr algn="l"/>
-            <a:r>
-              <a:rPr sz="1000" b="1">
+            <a:off x="804672" y="3840480"/>
+            <a:ext cx="4937760" cy="347472"/>
+          </a:xfrm>
+          <a:prstGeom prst="rect">
+            <a:avLst/>
+          </a:prstGeom>
+          <a:noFill/>
+        </p:spPr>
+        <p:txBody>
+          <a:bodyPr wrap="square" anchor="t" lIns="0" rIns="0" tIns="0" bIns="0">
+            <a:spAutoFit/>
+          </a:bodyPr>
+          <a:lstStyle/>
+          <a:p>
+            <a:pPr algn="l"/>
+            <a:r>
+              <a:rPr sz="950" b="1">
                 <a:solidFill>
                   <a:srgbClr val="C9A227"/>
                 </a:solidFill>
@@ -6870,12 +8289,12 @@
               <a:t>▪  </a:t>
             </a:r>
             <a:r>
-              <a:rPr sz="1000" b="0">
+              <a:rPr sz="950" b="0">
                 <a:solidFill>
                   <a:srgbClr val="1B2A41"/>
                 </a:solidFill>
               </a:rPr>
-              <a:t>Behaviour: how often they paid late</a:t>
+              <a:t>Simple to run, and it usually demands more capital.</a:t>
             </a:r>
           </a:p>
         </p:txBody>
@@ -6888,8 +8307,8 @@
         </p:nvSpPr>
         <p:spPr>
           <a:xfrm>
-            <a:off x="4315968" y="1920240"/>
-            <a:ext cx="3611880" cy="3108960"/>
+            <a:off x="6153912" y="1828800"/>
+            <a:ext cx="5486400" cy="2377440"/>
           </a:xfrm>
           <a:prstGeom prst="rect">
             <a:avLst/>
@@ -6932,8 +8351,8 @@
         </p:nvSpPr>
         <p:spPr>
           <a:xfrm>
-            <a:off x="4572000" y="2139696"/>
-            <a:ext cx="3108960" cy="274320"/>
+            <a:off x="6409944" y="2011680"/>
+            <a:ext cx="4937760" cy="274320"/>
           </a:xfrm>
           <a:prstGeom prst="rect">
             <a:avLst/>
@@ -6953,7 +8372,7 @@
                   <a:srgbClr val="C9A227"/>
                 </a:solidFill>
               </a:rPr>
-              <a:t>THE MODEL</a:t>
+              <a:t>THE IRB APPROACH</a:t>
             </a:r>
           </a:p>
         </p:txBody>
@@ -6966,29 +8385,29 @@
         </p:nvSpPr>
         <p:spPr>
           <a:xfrm>
-            <a:off x="4572000" y="2450592"/>
-            <a:ext cx="3108960" cy="365760"/>
-          </a:xfrm>
-          <a:prstGeom prst="rect">
-            <a:avLst/>
-          </a:prstGeom>
-          <a:noFill/>
-        </p:spPr>
-        <p:txBody>
-          <a:bodyPr wrap="square" anchor="t" lIns="0" rIns="0" tIns="0" bIns="0">
-            <a:spAutoFit/>
-          </a:bodyPr>
-          <a:lstStyle/>
-          <a:p>
-            <a:pPr algn="l"/>
-            <a:r>
-              <a:rPr sz="1400" b="1">
+            <a:off x="6409944" y="2322576"/>
+            <a:ext cx="4937760" cy="329184"/>
+          </a:xfrm>
+          <a:prstGeom prst="rect">
+            <a:avLst/>
+          </a:prstGeom>
+          <a:noFill/>
+        </p:spPr>
+        <p:txBody>
+          <a:bodyPr wrap="square" anchor="t" lIns="0" rIns="0" tIns="0" bIns="0">
+            <a:spAutoFit/>
+          </a:bodyPr>
+          <a:lstStyle/>
+          <a:p>
+            <a:pPr algn="l"/>
+            <a:r>
+              <a:rPr sz="1500" b="1">
                 <a:solidFill>
                   <a:srgbClr val="FFFFFF"/>
                 </a:solidFill>
                 <a:latin typeface="Georgia"/>
               </a:rPr>
-              <a:t>Three choices, in order of age</a:t>
+              <a:t>The bank estimates its own numbers.</a:t>
             </a:r>
           </a:p>
         </p:txBody>
@@ -7001,23 +8420,23 @@
         </p:nvSpPr>
         <p:spPr>
           <a:xfrm>
-            <a:off x="4572000" y="2962656"/>
-            <a:ext cx="3108960" cy="457200"/>
-          </a:xfrm>
-          <a:prstGeom prst="rect">
-            <a:avLst/>
-          </a:prstGeom>
-          <a:noFill/>
-        </p:spPr>
-        <p:txBody>
-          <a:bodyPr wrap="square" anchor="t" lIns="0" rIns="0" tIns="0" bIns="0">
-            <a:spAutoFit/>
-          </a:bodyPr>
-          <a:lstStyle/>
-          <a:p>
-            <a:pPr algn="l"/>
-            <a:r>
-              <a:rPr sz="1000" b="1">
+            <a:off x="6409944" y="2743200"/>
+            <a:ext cx="4937760" cy="347472"/>
+          </a:xfrm>
+          <a:prstGeom prst="rect">
+            <a:avLst/>
+          </a:prstGeom>
+          <a:noFill/>
+        </p:spPr>
+        <p:txBody>
+          <a:bodyPr wrap="square" anchor="t" lIns="0" rIns="0" tIns="0" bIns="0">
+            <a:spAutoFit/>
+          </a:bodyPr>
+          <a:lstStyle/>
+          <a:p>
+            <a:pPr algn="l"/>
+            <a:r>
+              <a:rPr sz="950" b="1">
                 <a:solidFill>
                   <a:srgbClr val="C9A227"/>
                 </a:solidFill>
@@ -7025,12 +8444,12 @@
               <a:t>▪  </a:t>
             </a:r>
             <a:r>
-              <a:rPr sz="1000" b="0">
+              <a:rPr sz="950" b="0">
                 <a:solidFill>
                   <a:srgbClr val="C9D6EE"/>
                 </a:solidFill>
               </a:rPr>
-              <a:t>Logistic regression: a formula you can print</a:t>
+              <a:t>Foundation IRB: the bank estimates PD. The regulator still sets LGD and EAD.</a:t>
             </a:r>
           </a:p>
         </p:txBody>
@@ -7043,23 +8462,23 @@
         </p:nvSpPr>
         <p:spPr>
           <a:xfrm>
-            <a:off x="4572000" y="3438144"/>
-            <a:ext cx="3108960" cy="457200"/>
-          </a:xfrm>
-          <a:prstGeom prst="rect">
-            <a:avLst/>
-          </a:prstGeom>
-          <a:noFill/>
-        </p:spPr>
-        <p:txBody>
-          <a:bodyPr wrap="square" anchor="t" lIns="0" rIns="0" tIns="0" bIns="0">
-            <a:spAutoFit/>
-          </a:bodyPr>
-          <a:lstStyle/>
-          <a:p>
-            <a:pPr algn="l"/>
-            <a:r>
-              <a:rPr sz="1000" b="1">
+            <a:off x="6409944" y="3108960"/>
+            <a:ext cx="4937760" cy="347472"/>
+          </a:xfrm>
+          <a:prstGeom prst="rect">
+            <a:avLst/>
+          </a:prstGeom>
+          <a:noFill/>
+        </p:spPr>
+        <p:txBody>
+          <a:bodyPr wrap="square" anchor="t" lIns="0" rIns="0" tIns="0" bIns="0">
+            <a:spAutoFit/>
+          </a:bodyPr>
+          <a:lstStyle/>
+          <a:p>
+            <a:pPr algn="l"/>
+            <a:r>
+              <a:rPr sz="950" b="1">
                 <a:solidFill>
                   <a:srgbClr val="C9A227"/>
                 </a:solidFill>
@@ -7067,12 +8486,12 @@
               <a:t>▪  </a:t>
             </a:r>
             <a:r>
-              <a:rPr sz="1000" b="0">
+              <a:rPr sz="950" b="0">
                 <a:solidFill>
                   <a:srgbClr val="C9D6EE"/>
                 </a:solidFill>
               </a:rPr>
-              <a:t>Decision tree: a flowchart of if-then splits</a:t>
+              <a:t>Advanced IRB: the bank estimates PD, LGD and EAD itself.</a:t>
             </a:r>
           </a:p>
         </p:txBody>
@@ -7085,23 +8504,23 @@
         </p:nvSpPr>
         <p:spPr>
           <a:xfrm>
-            <a:off x="4572000" y="3913632"/>
-            <a:ext cx="3108960" cy="457200"/>
-          </a:xfrm>
-          <a:prstGeom prst="rect">
-            <a:avLst/>
-          </a:prstGeom>
-          <a:noFill/>
-        </p:spPr>
-        <p:txBody>
-          <a:bodyPr wrap="square" anchor="t" lIns="0" rIns="0" tIns="0" bIns="0">
-            <a:spAutoFit/>
-          </a:bodyPr>
-          <a:lstStyle/>
-          <a:p>
-            <a:pPr algn="l"/>
-            <a:r>
-              <a:rPr sz="1000" b="1">
+            <a:off x="6409944" y="3474720"/>
+            <a:ext cx="4937760" cy="347472"/>
+          </a:xfrm>
+          <a:prstGeom prst="rect">
+            <a:avLst/>
+          </a:prstGeom>
+          <a:noFill/>
+        </p:spPr>
+        <p:txBody>
+          <a:bodyPr wrap="square" anchor="t" lIns="0" rIns="0" tIns="0" bIns="0">
+            <a:spAutoFit/>
+          </a:bodyPr>
+          <a:lstStyle/>
+          <a:p>
+            <a:pPr algn="l"/>
+            <a:r>
+              <a:rPr sz="950" b="1">
                 <a:solidFill>
                   <a:srgbClr val="C9A227"/>
                 </a:solidFill>
@@ -7109,12 +8528,12 @@
               <a:t>▪  </a:t>
             </a:r>
             <a:r>
-              <a:rPr sz="1000" b="0">
+              <a:rPr sz="950" b="0">
                 <a:solidFill>
                   <a:srgbClr val="C9D6EE"/>
                 </a:solidFill>
               </a:rPr>
-              <a:t>XGBoost: hundreds of small trees, voting</a:t>
+              <a:t>This is where every model in this module actually gets used.</a:t>
             </a:r>
           </a:p>
         </p:txBody>
@@ -7127,23 +8546,23 @@
         </p:nvSpPr>
         <p:spPr>
           <a:xfrm>
-            <a:off x="4572000" y="4389120"/>
-            <a:ext cx="3108960" cy="457200"/>
-          </a:xfrm>
-          <a:prstGeom prst="rect">
-            <a:avLst/>
-          </a:prstGeom>
-          <a:noFill/>
-        </p:spPr>
-        <p:txBody>
-          <a:bodyPr wrap="square" anchor="t" lIns="0" rIns="0" tIns="0" bIns="0">
-            <a:spAutoFit/>
-          </a:bodyPr>
-          <a:lstStyle/>
-          <a:p>
-            <a:pPr algn="l"/>
-            <a:r>
-              <a:rPr sz="1000" b="1">
+            <a:off x="6409944" y="3840480"/>
+            <a:ext cx="4937760" cy="347472"/>
+          </a:xfrm>
+          <a:prstGeom prst="rect">
+            <a:avLst/>
+          </a:prstGeom>
+          <a:noFill/>
+        </p:spPr>
+        <p:txBody>
+          <a:bodyPr wrap="square" anchor="t" lIns="0" rIns="0" tIns="0" bIns="0">
+            <a:spAutoFit/>
+          </a:bodyPr>
+          <a:lstStyle/>
+          <a:p>
+            <a:pPr algn="l"/>
+            <a:r>
+              <a:rPr sz="950" b="1">
                 <a:solidFill>
                   <a:srgbClr val="C9A227"/>
                 </a:solidFill>
@@ -7151,12 +8570,12 @@
               <a:t>▪  </a:t>
             </a:r>
             <a:r>
-              <a:rPr sz="1000" b="0">
+              <a:rPr sz="950" b="0">
                 <a:solidFill>
                   <a:srgbClr val="C9D6EE"/>
                 </a:solidFill>
               </a:rPr>
-              <a:t>Regulated lending still leans on the first</a:t>
+              <a:t>Permission is granted by the supervisor, and it can be taken away.</a:t>
             </a:r>
           </a:p>
         </p:txBody>
@@ -7169,14 +8588,14 @@
         </p:nvSpPr>
         <p:spPr>
           <a:xfrm>
-            <a:off x="8083296" y="1920240"/>
-            <a:ext cx="3611880" cy="3108960"/>
+            <a:off x="548640" y="4370832"/>
+            <a:ext cx="11091672" cy="1060704"/>
           </a:xfrm>
           <a:prstGeom prst="rect">
             <a:avLst/>
           </a:prstGeom>
           <a:solidFill>
-            <a:srgbClr val="FFFFFF"/>
+            <a:srgbClr val="E9EFF8"/>
           </a:solidFill>
           <a:ln>
             <a:noFill/>
@@ -7207,14 +8626,58 @@
       </p:sp>
       <p:sp>
         <p:nvSpPr>
-          <p:cNvPr id="21" name="TextBox 20"/>
-          <p:cNvSpPr txBox="1"/>
-          <p:nvPr/>
-        </p:nvSpPr>
-        <p:spPr>
-          <a:xfrm>
-            <a:off x="8339327" y="2139696"/>
-            <a:ext cx="3108960" cy="274320"/>
+          <p:cNvPr id="21" name="Rectangle 20"/>
+          <p:cNvSpPr/>
+          <p:nvPr/>
+        </p:nvSpPr>
+        <p:spPr>
+          <a:xfrm>
+            <a:off x="548640" y="4370832"/>
+            <a:ext cx="64008" cy="1060704"/>
+          </a:xfrm>
+          <a:prstGeom prst="rect">
+            <a:avLst/>
+          </a:prstGeom>
+          <a:solidFill>
+            <a:srgbClr val="3A5C9E"/>
+          </a:solidFill>
+          <a:ln>
+            <a:noFill/>
+          </a:ln>
+          <a:effectLst/>
+        </p:spPr>
+        <p:style>
+          <a:lnRef idx="1">
+            <a:schemeClr val="accent1"/>
+          </a:lnRef>
+          <a:fillRef idx="3">
+            <a:schemeClr val="accent1"/>
+          </a:fillRef>
+          <a:effectRef idx="2">
+            <a:schemeClr val="accent1"/>
+          </a:effectRef>
+          <a:fontRef idx="minor">
+            <a:schemeClr val="lt1"/>
+          </a:fontRef>
+        </p:style>
+        <p:txBody>
+          <a:bodyPr rtlCol="0" anchor="ctr"/>
+          <a:lstStyle/>
+          <a:p>
+            <a:pPr algn="ctr"/>
+          </a:p>
+        </p:txBody>
+      </p:sp>
+      <p:sp>
+        <p:nvSpPr>
+          <p:cNvPr id="22" name="TextBox 21"/>
+          <p:cNvSpPr txBox="1"/>
+          <p:nvPr/>
+        </p:nvSpPr>
+        <p:spPr>
+          <a:xfrm>
+            <a:off x="868680" y="4517136"/>
+            <a:ext cx="10515600" cy="822960"/>
           </a:xfrm>
           <a:prstGeom prst="rect">
             <a:avLst/>
@@ -7234,217 +8697,29 @@
                   <a:srgbClr val="3A5C9E"/>
                 </a:solidFill>
               </a:rPr>
-              <a:t>WHAT COMES OUT</a:t>
-            </a:r>
-          </a:p>
-        </p:txBody>
-      </p:sp>
-      <p:sp>
-        <p:nvSpPr>
-          <p:cNvPr id="22" name="TextBox 21"/>
-          <p:cNvSpPr txBox="1"/>
-          <p:nvPr/>
-        </p:nvSpPr>
-        <p:spPr>
-          <a:xfrm>
-            <a:off x="8339327" y="2450592"/>
-            <a:ext cx="3108960" cy="365760"/>
-          </a:xfrm>
-          <a:prstGeom prst="rect">
-            <a:avLst/>
-          </a:prstGeom>
-          <a:noFill/>
-        </p:spPr>
-        <p:txBody>
-          <a:bodyPr wrap="square" anchor="t" lIns="0" rIns="0" tIns="0" bIns="0">
-            <a:spAutoFit/>
-          </a:bodyPr>
-          <a:lstStyle/>
-          <a:p>
-            <a:pPr algn="l"/>
-            <a:r>
-              <a:rPr sz="1400" b="1">
-                <a:solidFill>
-                  <a:srgbClr val="0F2145"/>
-                </a:solidFill>
-                <a:latin typeface="Georgia"/>
-              </a:rPr>
-              <a:t>One probability, per borrower</a:t>
-            </a:r>
-          </a:p>
-        </p:txBody>
-      </p:sp>
-      <p:sp>
-        <p:nvSpPr>
-          <p:cNvPr id="23" name="TextBox 22"/>
-          <p:cNvSpPr txBox="1"/>
-          <p:nvPr/>
-        </p:nvSpPr>
-        <p:spPr>
-          <a:xfrm>
-            <a:off x="8339327" y="2962656"/>
-            <a:ext cx="3108960" cy="457200"/>
-          </a:xfrm>
-          <a:prstGeom prst="rect">
-            <a:avLst/>
-          </a:prstGeom>
-          <a:noFill/>
-        </p:spPr>
-        <p:txBody>
-          <a:bodyPr wrap="square" anchor="t" lIns="0" rIns="0" tIns="0" bIns="0">
-            <a:spAutoFit/>
-          </a:bodyPr>
-          <a:lstStyle/>
-          <a:p>
-            <a:pPr algn="l"/>
-            <a:r>
-              <a:rPr sz="1000" b="1">
-                <a:solidFill>
-                  <a:srgbClr val="C9A227"/>
-                </a:solidFill>
-              </a:rPr>
-              <a:t>▪  </a:t>
-            </a:r>
-            <a:r>
-              <a:rPr sz="1000" b="0">
+              <a:t>WHY A BANK WANTS ITS OWN MODEL, IN ONE SUM</a:t>
+            </a:r>
+          </a:p>
+          <a:p>
+            <a:pPr algn="l">
+              <a:spcBef>
+                <a:spcPts val="400"/>
+              </a:spcBef>
+            </a:pPr>
+            <a:r>
+              <a:rPr sz="1100" b="0">
                 <a:solidFill>
                   <a:srgbClr val="1B2A41"/>
                 </a:solidFill>
               </a:rPr>
-              <a:t>0.04 means four in a hundred, not 'risky'</a:t>
-            </a:r>
-          </a:p>
-        </p:txBody>
-      </p:sp>
-      <p:sp>
-        <p:nvSpPr>
-          <p:cNvPr id="24" name="TextBox 23"/>
-          <p:cNvSpPr txBox="1"/>
-          <p:nvPr/>
-        </p:nvSpPr>
-        <p:spPr>
-          <a:xfrm>
-            <a:off x="8339327" y="3438144"/>
-            <a:ext cx="3108960" cy="457200"/>
-          </a:xfrm>
-          <a:prstGeom prst="rect">
-            <a:avLst/>
-          </a:prstGeom>
-          <a:noFill/>
-        </p:spPr>
-        <p:txBody>
-          <a:bodyPr wrap="square" anchor="t" lIns="0" rIns="0" tIns="0" bIns="0">
-            <a:spAutoFit/>
-          </a:bodyPr>
-          <a:lstStyle/>
-          <a:p>
-            <a:pPr algn="l"/>
-            <a:r>
-              <a:rPr sz="1000" b="1">
-                <a:solidFill>
-                  <a:srgbClr val="C9A227"/>
-                </a:solidFill>
-              </a:rPr>
-              <a:t>▪  </a:t>
-            </a:r>
-            <a:r>
-              <a:rPr sz="1000" b="0">
-                <a:solidFill>
-                  <a:srgbClr val="1B2A41"/>
-                </a:solidFill>
-              </a:rPr>
-              <a:t>A cut-off turns it into approve or decline</a:t>
-            </a:r>
-          </a:p>
-        </p:txBody>
-      </p:sp>
-      <p:sp>
-        <p:nvSpPr>
-          <p:cNvPr id="25" name="TextBox 24"/>
-          <p:cNvSpPr txBox="1"/>
-          <p:nvPr/>
-        </p:nvSpPr>
-        <p:spPr>
-          <a:xfrm>
-            <a:off x="8339327" y="3913632"/>
-            <a:ext cx="3108960" cy="457200"/>
-          </a:xfrm>
-          <a:prstGeom prst="rect">
-            <a:avLst/>
-          </a:prstGeom>
-          <a:noFill/>
-        </p:spPr>
-        <p:txBody>
-          <a:bodyPr wrap="square" anchor="t" lIns="0" rIns="0" tIns="0" bIns="0">
-            <a:spAutoFit/>
-          </a:bodyPr>
-          <a:lstStyle/>
-          <a:p>
-            <a:pPr algn="l"/>
-            <a:r>
-              <a:rPr sz="1000" b="1">
-                <a:solidFill>
-                  <a:srgbClr val="C9A227"/>
-                </a:solidFill>
-              </a:rPr>
-              <a:t>▪  </a:t>
-            </a:r>
-            <a:r>
-              <a:rPr sz="1000" b="0">
-                <a:solidFill>
-                  <a:srgbClr val="1B2A41"/>
-                </a:solidFill>
-              </a:rPr>
-              <a:t>The cut-off is a business decision</a:t>
-            </a:r>
-          </a:p>
-        </p:txBody>
-      </p:sp>
-      <p:sp>
-        <p:nvSpPr>
-          <p:cNvPr id="26" name="TextBox 25"/>
-          <p:cNvSpPr txBox="1"/>
-          <p:nvPr/>
-        </p:nvSpPr>
-        <p:spPr>
-          <a:xfrm>
-            <a:off x="8339327" y="4389120"/>
-            <a:ext cx="3108960" cy="457200"/>
-          </a:xfrm>
-          <a:prstGeom prst="rect">
-            <a:avLst/>
-          </a:prstGeom>
-          <a:noFill/>
-        </p:spPr>
-        <p:txBody>
-          <a:bodyPr wrap="square" anchor="t" lIns="0" rIns="0" tIns="0" bIns="0">
-            <a:spAutoFit/>
-          </a:bodyPr>
-          <a:lstStyle/>
-          <a:p>
-            <a:pPr algn="l"/>
-            <a:r>
-              <a:rPr sz="1000" b="1">
-                <a:solidFill>
-                  <a:srgbClr val="C9A227"/>
-                </a:solidFill>
-              </a:rPr>
-              <a:t>▪  </a:t>
-            </a:r>
-            <a:r>
-              <a:rPr sz="1000" b="0">
-                <a:solidFill>
-                  <a:srgbClr val="1B2A41"/>
-                </a:solidFill>
-              </a:rPr>
-              <a:t>Move the cut-off and the losses move</a:t>
-            </a:r>
-          </a:p>
-        </p:txBody>
-      </p:sp>
-      <p:sp>
-        <p:nvSpPr>
-          <p:cNvPr id="27" name="Rectangle 26"/>
+              <a:t>Take a ₹100 crore corporate book. On the standardised weight of 100% the bank holds 8% of ₹100 crore, which is ₹8 crore. Suppose its own model justifies an effective weight of 60%. Now it holds 8% of ₹60 crore, which is ₹4.8 crore. The same book has freed ₹3.2 crore of capital to lend again.</a:t>
+            </a:r>
+          </a:p>
+        </p:txBody>
+      </p:sp>
+      <p:sp>
+        <p:nvSpPr>
+          <p:cNvPr id="23" name="Rectangle 22"/>
           <p:cNvSpPr/>
           <p:nvPr/>
         </p:nvSpPr>
@@ -7488,7 +8763,7 @@
       </p:sp>
       <p:sp>
         <p:nvSpPr>
-          <p:cNvPr id="28" name="Rectangle 27"/>
+          <p:cNvPr id="24" name="Rectangle 23"/>
           <p:cNvSpPr/>
           <p:nvPr/>
         </p:nvSpPr>
@@ -7532,7 +8807,7 @@
       </p:sp>
       <p:sp>
         <p:nvSpPr>
-          <p:cNvPr id="29" name="TextBox 28"/>
+          <p:cNvPr id="25" name="TextBox 24"/>
           <p:cNvSpPr txBox="1"/>
           <p:nvPr/>
         </p:nvSpPr>
@@ -7559,7 +8834,7 @@
                   <a:srgbClr val="C9A227"/>
                 </a:solidFill>
               </a:rPr>
-              <a:t>The trade you are making:  </a:t>
+              <a:t>Basel II is a bargain, not a gift:  </a:t>
             </a:r>
             <a:r>
               <a:rPr sz="1200" b="0">
@@ -7567,14 +8842,14 @@
                   <a:srgbClr val="FFFFFF"/>
                 </a:solidFill>
               </a:rPr>
-              <a:t>the newer the model, the better it predicts and the harder it is to explain to the person you just declined.</a:t>
-            </a:r>
-          </a:p>
-        </p:txBody>
-      </p:sp>
-      <p:sp>
-        <p:nvSpPr>
-          <p:cNvPr id="30" name="TextBox 29"/>
+              <a:t>prove your model works and you may set your own capital. Fail to prove it and you go back to the regulator's table.</a:t>
+            </a:r>
+          </a:p>
+        </p:txBody>
+      </p:sp>
+      <p:sp>
+        <p:nvSpPr>
+          <p:cNvPr id="26" name="TextBox 25"/>
           <p:cNvSpPr txBox="1"/>
           <p:nvPr/>
         </p:nvSpPr>
@@ -7608,7 +8883,7 @@
       </p:sp>
       <p:sp>
         <p:nvSpPr>
-          <p:cNvPr id="31" name="TextBox 30"/>
+          <p:cNvPr id="27" name="TextBox 26"/>
           <p:cNvSpPr txBox="1"/>
           <p:nvPr/>
         </p:nvSpPr>
@@ -7739,7 +9014,7 @@
                   <a:srgbClr val="C9A227"/>
                 </a:solidFill>
               </a:rPr>
-              <a:t>HOUR 1 · DOES THE MODEL ACTUALLY WORK?</a:t>
+              <a:t>HOUR 1 · BUILDING THE MODEL</a:t>
             </a:r>
           </a:p>
         </p:txBody>
@@ -7774,21 +9049,55 @@
                 </a:solidFill>
                 <a:latin typeface="Georgia"/>
               </a:rPr>
-              <a:t>Four checks, in plain English</a:t>
-            </a:r>
-          </a:p>
-        </p:txBody>
-      </p:sp>
-      <p:sp>
-        <p:nvSpPr>
-          <p:cNvPr id="5" name="Rectangle 4"/>
+              <a:t>From five ratios to one probability</a:t>
+            </a:r>
+          </a:p>
+        </p:txBody>
+      </p:sp>
+      <p:sp>
+        <p:nvSpPr>
+          <p:cNvPr id="5" name="TextBox 4"/>
+          <p:cNvSpPr txBox="1"/>
+          <p:nvPr/>
+        </p:nvSpPr>
+        <p:spPr>
+          <a:xfrm>
+            <a:off x="548640" y="1444752"/>
+            <a:ext cx="11091672" cy="292608"/>
+          </a:xfrm>
+          <a:prstGeom prst="rect">
+            <a:avLst/>
+          </a:prstGeom>
+          <a:noFill/>
+        </p:spPr>
+        <p:txBody>
+          <a:bodyPr wrap="square" anchor="t" lIns="0" rIns="0" tIns="0" bIns="0">
+            <a:spAutoFit/>
+          </a:bodyPr>
+          <a:lstStyle/>
+          <a:p>
+            <a:pPr algn="l"/>
+            <a:r>
+              <a:rPr sz="1200" b="0">
+                <a:solidFill>
+                  <a:srgbClr val="5D6B7E"/>
+                </a:solidFill>
+              </a:rPr>
+              <a:t>Here is one borrower. These are numbers you already know how to compute from a balance sheet.</a:t>
+            </a:r>
+          </a:p>
+        </p:txBody>
+      </p:sp>
+      <p:sp>
+        <p:nvSpPr>
+          <p:cNvPr id="6" name="Rectangle 5"/>
           <p:cNvSpPr/>
           <p:nvPr/>
         </p:nvSpPr>
         <p:spPr>
           <a:xfrm>
-            <a:off x="548640" y="1572768"/>
-            <a:ext cx="5486400" cy="1225296"/>
+            <a:off x="548640" y="1810512"/>
+            <a:ext cx="2103120" cy="786384"/>
           </a:xfrm>
           <a:prstGeom prst="rect">
             <a:avLst/>
@@ -7825,14 +9134,579 @@
       </p:sp>
       <p:sp>
         <p:nvSpPr>
-          <p:cNvPr id="6" name="Rectangle 5"/>
+          <p:cNvPr id="7" name="TextBox 6"/>
+          <p:cNvSpPr txBox="1"/>
+          <p:nvPr/>
+        </p:nvSpPr>
+        <p:spPr>
+          <a:xfrm>
+            <a:off x="713232" y="1920240"/>
+            <a:ext cx="1783080" cy="274320"/>
+          </a:xfrm>
+          <a:prstGeom prst="rect">
+            <a:avLst/>
+          </a:prstGeom>
+          <a:noFill/>
+        </p:spPr>
+        <p:txBody>
+          <a:bodyPr wrap="square" anchor="t" lIns="0" rIns="0" tIns="0" bIns="0">
+            <a:spAutoFit/>
+          </a:bodyPr>
+          <a:lstStyle/>
+          <a:p>
+            <a:pPr algn="l"/>
+            <a:r>
+              <a:rPr sz="900" b="1">
+                <a:solidFill>
+                  <a:srgbClr val="3A5C9E"/>
+                </a:solidFill>
+              </a:rPr>
+              <a:t>Current ratio</a:t>
+            </a:r>
+          </a:p>
+        </p:txBody>
+      </p:sp>
+      <p:sp>
+        <p:nvSpPr>
+          <p:cNvPr id="8" name="TextBox 7"/>
+          <p:cNvSpPr txBox="1"/>
+          <p:nvPr/>
+        </p:nvSpPr>
+        <p:spPr>
+          <a:xfrm>
+            <a:off x="713232" y="2194560"/>
+            <a:ext cx="1783080" cy="347472"/>
+          </a:xfrm>
+          <a:prstGeom prst="rect">
+            <a:avLst/>
+          </a:prstGeom>
+          <a:noFill/>
+        </p:spPr>
+        <p:txBody>
+          <a:bodyPr wrap="square" anchor="t" lIns="0" rIns="0" tIns="0" bIns="0">
+            <a:spAutoFit/>
+          </a:bodyPr>
+          <a:lstStyle/>
+          <a:p>
+            <a:pPr algn="l"/>
+            <a:r>
+              <a:rPr sz="1700" b="1">
+                <a:solidFill>
+                  <a:srgbClr val="0F2145"/>
+                </a:solidFill>
+                <a:latin typeface="Georgia"/>
+              </a:rPr>
+              <a:t>1.4</a:t>
+            </a:r>
+          </a:p>
+        </p:txBody>
+      </p:sp>
+      <p:sp>
+        <p:nvSpPr>
+          <p:cNvPr id="9" name="Rectangle 8"/>
           <p:cNvSpPr/>
           <p:nvPr/>
         </p:nvSpPr>
         <p:spPr>
           <a:xfrm>
-            <a:off x="548640" y="1572768"/>
-            <a:ext cx="54864" cy="1225296"/>
+            <a:off x="2788920" y="1810512"/>
+            <a:ext cx="2103120" cy="786384"/>
+          </a:xfrm>
+          <a:prstGeom prst="rect">
+            <a:avLst/>
+          </a:prstGeom>
+          <a:solidFill>
+            <a:srgbClr val="FFFFFF"/>
+          </a:solidFill>
+          <a:ln>
+            <a:noFill/>
+          </a:ln>
+          <a:effectLst/>
+        </p:spPr>
+        <p:style>
+          <a:lnRef idx="1">
+            <a:schemeClr val="accent1"/>
+          </a:lnRef>
+          <a:fillRef idx="3">
+            <a:schemeClr val="accent1"/>
+          </a:fillRef>
+          <a:effectRef idx="2">
+            <a:schemeClr val="accent1"/>
+          </a:effectRef>
+          <a:fontRef idx="minor">
+            <a:schemeClr val="lt1"/>
+          </a:fontRef>
+        </p:style>
+        <p:txBody>
+          <a:bodyPr rtlCol="0" anchor="ctr"/>
+          <a:lstStyle/>
+          <a:p>
+            <a:pPr algn="ctr"/>
+          </a:p>
+        </p:txBody>
+      </p:sp>
+      <p:sp>
+        <p:nvSpPr>
+          <p:cNvPr id="10" name="TextBox 9"/>
+          <p:cNvSpPr txBox="1"/>
+          <p:nvPr/>
+        </p:nvSpPr>
+        <p:spPr>
+          <a:xfrm>
+            <a:off x="2953512" y="1920240"/>
+            <a:ext cx="1783080" cy="274320"/>
+          </a:xfrm>
+          <a:prstGeom prst="rect">
+            <a:avLst/>
+          </a:prstGeom>
+          <a:noFill/>
+        </p:spPr>
+        <p:txBody>
+          <a:bodyPr wrap="square" anchor="t" lIns="0" rIns="0" tIns="0" bIns="0">
+            <a:spAutoFit/>
+          </a:bodyPr>
+          <a:lstStyle/>
+          <a:p>
+            <a:pPr algn="l"/>
+            <a:r>
+              <a:rPr sz="900" b="1">
+                <a:solidFill>
+                  <a:srgbClr val="3A5C9E"/>
+                </a:solidFill>
+              </a:rPr>
+              <a:t>Debt to equity</a:t>
+            </a:r>
+          </a:p>
+        </p:txBody>
+      </p:sp>
+      <p:sp>
+        <p:nvSpPr>
+          <p:cNvPr id="11" name="TextBox 10"/>
+          <p:cNvSpPr txBox="1"/>
+          <p:nvPr/>
+        </p:nvSpPr>
+        <p:spPr>
+          <a:xfrm>
+            <a:off x="2953512" y="2194560"/>
+            <a:ext cx="1783080" cy="347472"/>
+          </a:xfrm>
+          <a:prstGeom prst="rect">
+            <a:avLst/>
+          </a:prstGeom>
+          <a:noFill/>
+        </p:spPr>
+        <p:txBody>
+          <a:bodyPr wrap="square" anchor="t" lIns="0" rIns="0" tIns="0" bIns="0">
+            <a:spAutoFit/>
+          </a:bodyPr>
+          <a:lstStyle/>
+          <a:p>
+            <a:pPr algn="l"/>
+            <a:r>
+              <a:rPr sz="1700" b="1">
+                <a:solidFill>
+                  <a:srgbClr val="0F2145"/>
+                </a:solidFill>
+                <a:latin typeface="Georgia"/>
+              </a:rPr>
+              <a:t>2.1</a:t>
+            </a:r>
+          </a:p>
+        </p:txBody>
+      </p:sp>
+      <p:sp>
+        <p:nvSpPr>
+          <p:cNvPr id="12" name="Rectangle 11"/>
+          <p:cNvSpPr/>
+          <p:nvPr/>
+        </p:nvSpPr>
+        <p:spPr>
+          <a:xfrm>
+            <a:off x="5029200" y="1810512"/>
+            <a:ext cx="2103120" cy="786384"/>
+          </a:xfrm>
+          <a:prstGeom prst="rect">
+            <a:avLst/>
+          </a:prstGeom>
+          <a:solidFill>
+            <a:srgbClr val="FFFFFF"/>
+          </a:solidFill>
+          <a:ln>
+            <a:noFill/>
+          </a:ln>
+          <a:effectLst/>
+        </p:spPr>
+        <p:style>
+          <a:lnRef idx="1">
+            <a:schemeClr val="accent1"/>
+          </a:lnRef>
+          <a:fillRef idx="3">
+            <a:schemeClr val="accent1"/>
+          </a:fillRef>
+          <a:effectRef idx="2">
+            <a:schemeClr val="accent1"/>
+          </a:effectRef>
+          <a:fontRef idx="minor">
+            <a:schemeClr val="lt1"/>
+          </a:fontRef>
+        </p:style>
+        <p:txBody>
+          <a:bodyPr rtlCol="0" anchor="ctr"/>
+          <a:lstStyle/>
+          <a:p>
+            <a:pPr algn="ctr"/>
+          </a:p>
+        </p:txBody>
+      </p:sp>
+      <p:sp>
+        <p:nvSpPr>
+          <p:cNvPr id="13" name="TextBox 12"/>
+          <p:cNvSpPr txBox="1"/>
+          <p:nvPr/>
+        </p:nvSpPr>
+        <p:spPr>
+          <a:xfrm>
+            <a:off x="5193792" y="1920240"/>
+            <a:ext cx="1783080" cy="274320"/>
+          </a:xfrm>
+          <a:prstGeom prst="rect">
+            <a:avLst/>
+          </a:prstGeom>
+          <a:noFill/>
+        </p:spPr>
+        <p:txBody>
+          <a:bodyPr wrap="square" anchor="t" lIns="0" rIns="0" tIns="0" bIns="0">
+            <a:spAutoFit/>
+          </a:bodyPr>
+          <a:lstStyle/>
+          <a:p>
+            <a:pPr algn="l"/>
+            <a:r>
+              <a:rPr sz="900" b="1">
+                <a:solidFill>
+                  <a:srgbClr val="3A5C9E"/>
+                </a:solidFill>
+              </a:rPr>
+              <a:t>Interest cover</a:t>
+            </a:r>
+          </a:p>
+        </p:txBody>
+      </p:sp>
+      <p:sp>
+        <p:nvSpPr>
+          <p:cNvPr id="14" name="TextBox 13"/>
+          <p:cNvSpPr txBox="1"/>
+          <p:nvPr/>
+        </p:nvSpPr>
+        <p:spPr>
+          <a:xfrm>
+            <a:off x="5193792" y="2194560"/>
+            <a:ext cx="1783080" cy="347472"/>
+          </a:xfrm>
+          <a:prstGeom prst="rect">
+            <a:avLst/>
+          </a:prstGeom>
+          <a:noFill/>
+        </p:spPr>
+        <p:txBody>
+          <a:bodyPr wrap="square" anchor="t" lIns="0" rIns="0" tIns="0" bIns="0">
+            <a:spAutoFit/>
+          </a:bodyPr>
+          <a:lstStyle/>
+          <a:p>
+            <a:pPr algn="l"/>
+            <a:r>
+              <a:rPr sz="1700" b="1">
+                <a:solidFill>
+                  <a:srgbClr val="0F2145"/>
+                </a:solidFill>
+                <a:latin typeface="Georgia"/>
+              </a:rPr>
+              <a:t>2.3</a:t>
+            </a:r>
+          </a:p>
+        </p:txBody>
+      </p:sp>
+      <p:sp>
+        <p:nvSpPr>
+          <p:cNvPr id="15" name="Rectangle 14"/>
+          <p:cNvSpPr/>
+          <p:nvPr/>
+        </p:nvSpPr>
+        <p:spPr>
+          <a:xfrm>
+            <a:off x="7269480" y="1810512"/>
+            <a:ext cx="2103120" cy="786384"/>
+          </a:xfrm>
+          <a:prstGeom prst="rect">
+            <a:avLst/>
+          </a:prstGeom>
+          <a:solidFill>
+            <a:srgbClr val="FFFFFF"/>
+          </a:solidFill>
+          <a:ln>
+            <a:noFill/>
+          </a:ln>
+          <a:effectLst/>
+        </p:spPr>
+        <p:style>
+          <a:lnRef idx="1">
+            <a:schemeClr val="accent1"/>
+          </a:lnRef>
+          <a:fillRef idx="3">
+            <a:schemeClr val="accent1"/>
+          </a:fillRef>
+          <a:effectRef idx="2">
+            <a:schemeClr val="accent1"/>
+          </a:effectRef>
+          <a:fontRef idx="minor">
+            <a:schemeClr val="lt1"/>
+          </a:fontRef>
+        </p:style>
+        <p:txBody>
+          <a:bodyPr rtlCol="0" anchor="ctr"/>
+          <a:lstStyle/>
+          <a:p>
+            <a:pPr algn="ctr"/>
+          </a:p>
+        </p:txBody>
+      </p:sp>
+      <p:sp>
+        <p:nvSpPr>
+          <p:cNvPr id="16" name="TextBox 15"/>
+          <p:cNvSpPr txBox="1"/>
+          <p:nvPr/>
+        </p:nvSpPr>
+        <p:spPr>
+          <a:xfrm>
+            <a:off x="7434072" y="1920240"/>
+            <a:ext cx="1783080" cy="274320"/>
+          </a:xfrm>
+          <a:prstGeom prst="rect">
+            <a:avLst/>
+          </a:prstGeom>
+          <a:noFill/>
+        </p:spPr>
+        <p:txBody>
+          <a:bodyPr wrap="square" anchor="t" lIns="0" rIns="0" tIns="0" bIns="0">
+            <a:spAutoFit/>
+          </a:bodyPr>
+          <a:lstStyle/>
+          <a:p>
+            <a:pPr algn="l"/>
+            <a:r>
+              <a:rPr sz="900" b="1">
+                <a:solidFill>
+                  <a:srgbClr val="3A5C9E"/>
+                </a:solidFill>
+              </a:rPr>
+              <a:t>Sales growth</a:t>
+            </a:r>
+          </a:p>
+        </p:txBody>
+      </p:sp>
+      <p:sp>
+        <p:nvSpPr>
+          <p:cNvPr id="17" name="TextBox 16"/>
+          <p:cNvSpPr txBox="1"/>
+          <p:nvPr/>
+        </p:nvSpPr>
+        <p:spPr>
+          <a:xfrm>
+            <a:off x="7434072" y="2194560"/>
+            <a:ext cx="1783080" cy="347472"/>
+          </a:xfrm>
+          <a:prstGeom prst="rect">
+            <a:avLst/>
+          </a:prstGeom>
+          <a:noFill/>
+        </p:spPr>
+        <p:txBody>
+          <a:bodyPr wrap="square" anchor="t" lIns="0" rIns="0" tIns="0" bIns="0">
+            <a:spAutoFit/>
+          </a:bodyPr>
+          <a:lstStyle/>
+          <a:p>
+            <a:pPr algn="l"/>
+            <a:r>
+              <a:rPr sz="1700" b="1">
+                <a:solidFill>
+                  <a:srgbClr val="0F2145"/>
+                </a:solidFill>
+                <a:latin typeface="Georgia"/>
+              </a:rPr>
+              <a:t>−4%</a:t>
+            </a:r>
+          </a:p>
+        </p:txBody>
+      </p:sp>
+      <p:sp>
+        <p:nvSpPr>
+          <p:cNvPr id="18" name="Rectangle 17"/>
+          <p:cNvSpPr/>
+          <p:nvPr/>
+        </p:nvSpPr>
+        <p:spPr>
+          <a:xfrm>
+            <a:off x="9509760" y="1810512"/>
+            <a:ext cx="2103120" cy="786384"/>
+          </a:xfrm>
+          <a:prstGeom prst="rect">
+            <a:avLst/>
+          </a:prstGeom>
+          <a:solidFill>
+            <a:srgbClr val="FFFFFF"/>
+          </a:solidFill>
+          <a:ln>
+            <a:noFill/>
+          </a:ln>
+          <a:effectLst/>
+        </p:spPr>
+        <p:style>
+          <a:lnRef idx="1">
+            <a:schemeClr val="accent1"/>
+          </a:lnRef>
+          <a:fillRef idx="3">
+            <a:schemeClr val="accent1"/>
+          </a:fillRef>
+          <a:effectRef idx="2">
+            <a:schemeClr val="accent1"/>
+          </a:effectRef>
+          <a:fontRef idx="minor">
+            <a:schemeClr val="lt1"/>
+          </a:fontRef>
+        </p:style>
+        <p:txBody>
+          <a:bodyPr rtlCol="0" anchor="ctr"/>
+          <a:lstStyle/>
+          <a:p>
+            <a:pPr algn="ctr"/>
+          </a:p>
+        </p:txBody>
+      </p:sp>
+      <p:sp>
+        <p:nvSpPr>
+          <p:cNvPr id="19" name="TextBox 18"/>
+          <p:cNvSpPr txBox="1"/>
+          <p:nvPr/>
+        </p:nvSpPr>
+        <p:spPr>
+          <a:xfrm>
+            <a:off x="9674352" y="1920240"/>
+            <a:ext cx="1783080" cy="274320"/>
+          </a:xfrm>
+          <a:prstGeom prst="rect">
+            <a:avLst/>
+          </a:prstGeom>
+          <a:noFill/>
+        </p:spPr>
+        <p:txBody>
+          <a:bodyPr wrap="square" anchor="t" lIns="0" rIns="0" tIns="0" bIns="0">
+            <a:spAutoFit/>
+          </a:bodyPr>
+          <a:lstStyle/>
+          <a:p>
+            <a:pPr algn="l"/>
+            <a:r>
+              <a:rPr sz="900" b="1">
+                <a:solidFill>
+                  <a:srgbClr val="3A5C9E"/>
+                </a:solidFill>
+              </a:rPr>
+              <a:t>Times paid late</a:t>
+            </a:r>
+          </a:p>
+        </p:txBody>
+      </p:sp>
+      <p:sp>
+        <p:nvSpPr>
+          <p:cNvPr id="20" name="TextBox 19"/>
+          <p:cNvSpPr txBox="1"/>
+          <p:nvPr/>
+        </p:nvSpPr>
+        <p:spPr>
+          <a:xfrm>
+            <a:off x="9674352" y="2194560"/>
+            <a:ext cx="1783080" cy="347472"/>
+          </a:xfrm>
+          <a:prstGeom prst="rect">
+            <a:avLst/>
+          </a:prstGeom>
+          <a:noFill/>
+        </p:spPr>
+        <p:txBody>
+          <a:bodyPr wrap="square" anchor="t" lIns="0" rIns="0" tIns="0" bIns="0">
+            <a:spAutoFit/>
+          </a:bodyPr>
+          <a:lstStyle/>
+          <a:p>
+            <a:pPr algn="l"/>
+            <a:r>
+              <a:rPr sz="1700" b="1">
+                <a:solidFill>
+                  <a:srgbClr val="0F2145"/>
+                </a:solidFill>
+                <a:latin typeface="Georgia"/>
+              </a:rPr>
+              <a:t>3</a:t>
+            </a:r>
+          </a:p>
+        </p:txBody>
+      </p:sp>
+      <p:sp>
+        <p:nvSpPr>
+          <p:cNvPr id="21" name="Rectangle 20"/>
+          <p:cNvSpPr/>
+          <p:nvPr/>
+        </p:nvSpPr>
+        <p:spPr>
+          <a:xfrm>
+            <a:off x="548640" y="2761488"/>
+            <a:ext cx="11091672" cy="658368"/>
+          </a:xfrm>
+          <a:prstGeom prst="rect">
+            <a:avLst/>
+          </a:prstGeom>
+          <a:solidFill>
+            <a:srgbClr val="0F2145"/>
+          </a:solidFill>
+          <a:ln>
+            <a:noFill/>
+          </a:ln>
+          <a:effectLst/>
+        </p:spPr>
+        <p:style>
+          <a:lnRef idx="1">
+            <a:schemeClr val="accent1"/>
+          </a:lnRef>
+          <a:fillRef idx="3">
+            <a:schemeClr val="accent1"/>
+          </a:fillRef>
+          <a:effectRef idx="2">
+            <a:schemeClr val="accent1"/>
+          </a:effectRef>
+          <a:fontRef idx="minor">
+            <a:schemeClr val="lt1"/>
+          </a:fontRef>
+        </p:style>
+        <p:txBody>
+          <a:bodyPr rtlCol="0" anchor="ctr"/>
+          <a:lstStyle/>
+          <a:p>
+            <a:pPr algn="ctr"/>
+          </a:p>
+        </p:txBody>
+      </p:sp>
+      <p:sp>
+        <p:nvSpPr>
+          <p:cNvPr id="22" name="Rectangle 21"/>
+          <p:cNvSpPr/>
+          <p:nvPr/>
+        </p:nvSpPr>
+        <p:spPr>
+          <a:xfrm>
+            <a:off x="548640" y="2761488"/>
+            <a:ext cx="64008" cy="658368"/>
           </a:xfrm>
           <a:prstGeom prst="rect">
             <a:avLst/>
@@ -7869,88 +9743,164 @@
       </p:sp>
       <p:sp>
         <p:nvSpPr>
-          <p:cNvPr id="7" name="TextBox 6"/>
-          <p:cNvSpPr txBox="1"/>
-          <p:nvPr/>
-        </p:nvSpPr>
-        <p:spPr>
-          <a:xfrm>
-            <a:off x="822959" y="1737360"/>
-            <a:ext cx="4937760" cy="292608"/>
-          </a:xfrm>
-          <a:prstGeom prst="rect">
-            <a:avLst/>
-          </a:prstGeom>
-          <a:noFill/>
-        </p:spPr>
-        <p:txBody>
-          <a:bodyPr wrap="square" anchor="t" lIns="0" rIns="0" tIns="0" bIns="0">
-            <a:spAutoFit/>
-          </a:bodyPr>
-          <a:lstStyle/>
-          <a:p>
-            <a:pPr algn="l"/>
-            <a:r>
-              <a:rPr sz="1100" b="1">
-                <a:solidFill>
-                  <a:srgbClr val="3A5C9E"/>
-                </a:solidFill>
-              </a:rPr>
-              <a:t>AUC-ROC</a:t>
-            </a:r>
-          </a:p>
-        </p:txBody>
-      </p:sp>
-      <p:sp>
-        <p:nvSpPr>
-          <p:cNvPr id="8" name="TextBox 7"/>
-          <p:cNvSpPr txBox="1"/>
-          <p:nvPr/>
-        </p:nvSpPr>
-        <p:spPr>
-          <a:xfrm>
-            <a:off x="822959" y="2084832"/>
-            <a:ext cx="4937760" cy="640080"/>
-          </a:xfrm>
-          <a:prstGeom prst="rect">
-            <a:avLst/>
-          </a:prstGeom>
-          <a:noFill/>
-        </p:spPr>
-        <p:txBody>
-          <a:bodyPr wrap="square" anchor="t" lIns="0" rIns="0" tIns="0" bIns="0">
-            <a:spAutoFit/>
-          </a:bodyPr>
-          <a:lstStyle/>
-          <a:p>
-            <a:pPr algn="l"/>
-            <a:r>
-              <a:rPr sz="1050" b="0">
+          <p:cNvPr id="23" name="TextBox 22"/>
+          <p:cNvSpPr txBox="1"/>
+          <p:nvPr/>
+        </p:nvSpPr>
+        <p:spPr>
+          <a:xfrm>
+            <a:off x="868680" y="2761488"/>
+            <a:ext cx="10515600" cy="658368"/>
+          </a:xfrm>
+          <a:prstGeom prst="rect">
+            <a:avLst/>
+          </a:prstGeom>
+          <a:noFill/>
+        </p:spPr>
+        <p:txBody>
+          <a:bodyPr wrap="square" anchor="ctr" lIns="0" rIns="0" tIns="0" bIns="0">
+            <a:spAutoFit/>
+          </a:bodyPr>
+          <a:lstStyle/>
+          <a:p>
+            <a:pPr algn="l"/>
+            <a:r>
+              <a:rPr sz="1300" b="1">
+                <a:solidFill>
+                  <a:srgbClr val="FFFFFF"/>
+                </a:solidFill>
+                <a:latin typeface="Georgia"/>
+              </a:rPr>
+              <a:t>SCORE  =  −3.2  +  (0.8 × debt to equity)  −  (0.5 × interest cover)  +  (0.4 × times late)      </a:t>
+            </a:r>
+            <a:r>
+              <a:rPr sz="1400" b="1">
+                <a:solidFill>
+                  <a:srgbClr val="C9A227"/>
+                </a:solidFill>
+                <a:latin typeface="Georgia"/>
+              </a:rPr>
+              <a:t>→  PD = 4%</a:t>
+            </a:r>
+          </a:p>
+        </p:txBody>
+      </p:sp>
+      <p:sp>
+        <p:nvSpPr>
+          <p:cNvPr id="24" name="TextBox 23"/>
+          <p:cNvSpPr txBox="1"/>
+          <p:nvPr/>
+        </p:nvSpPr>
+        <p:spPr>
+          <a:xfrm>
+            <a:off x="548640" y="3602736"/>
+            <a:ext cx="5486400" cy="1554480"/>
+          </a:xfrm>
+          <a:prstGeom prst="rect">
+            <a:avLst/>
+          </a:prstGeom>
+          <a:noFill/>
+        </p:spPr>
+        <p:txBody>
+          <a:bodyPr wrap="square" anchor="t" lIns="0" rIns="0" tIns="0" bIns="0">
+            <a:spAutoFit/>
+          </a:bodyPr>
+          <a:lstStyle/>
+          <a:p>
+            <a:pPr algn="l"/>
+            <a:r>
+              <a:rPr sz="1500" b="1">
+                <a:solidFill>
+                  <a:srgbClr val="0F2145"/>
+                </a:solidFill>
+                <a:latin typeface="Georgia"/>
+              </a:rPr>
+              <a:t>Say what just happened</a:t>
+            </a:r>
+          </a:p>
+          <a:p>
+            <a:pPr algn="l">
+              <a:spcBef>
+                <a:spcPts val="600"/>
+              </a:spcBef>
+            </a:pPr>
+            <a:r>
+              <a:rPr sz="1100" b="0">
                 <a:solidFill>
                   <a:srgbClr val="1B2A41"/>
                 </a:solidFill>
               </a:rPr>
-              <a:t>Pick one borrower who defaulted and one who did not, at random. AUC is the chance the model scored the defaulter as riskier. 0.5 is a coin flip. A real model sits near 0.75.</a:t>
-            </a:r>
-          </a:p>
-        </p:txBody>
-      </p:sp>
-      <p:sp>
-        <p:nvSpPr>
-          <p:cNvPr id="9" name="Rectangle 8"/>
+              <a:t>Every ratio gets a weight. Multiply each ratio by its weight and add them up. That total is the score. A curve then squeezes the score into a number between 0 and 1, and that number is the probability of default. There is nothing else inside a logistic regression.</a:t>
+            </a:r>
+          </a:p>
+        </p:txBody>
+      </p:sp>
+      <p:sp>
+        <p:nvSpPr>
+          <p:cNvPr id="25" name="TextBox 24"/>
+          <p:cNvSpPr txBox="1"/>
+          <p:nvPr/>
+        </p:nvSpPr>
+        <p:spPr>
+          <a:xfrm>
+            <a:off x="6309360" y="3602736"/>
+            <a:ext cx="5330952" cy="1554480"/>
+          </a:xfrm>
+          <a:prstGeom prst="rect">
+            <a:avLst/>
+          </a:prstGeom>
+          <a:noFill/>
+        </p:spPr>
+        <p:txBody>
+          <a:bodyPr wrap="square" anchor="t" lIns="0" rIns="0" tIns="0" bIns="0">
+            <a:spAutoFit/>
+          </a:bodyPr>
+          <a:lstStyle/>
+          <a:p>
+            <a:pPr algn="l"/>
+            <a:r>
+              <a:rPr sz="1500" b="1">
+                <a:solidFill>
+                  <a:srgbClr val="0F2145"/>
+                </a:solidFill>
+                <a:latin typeface="Georgia"/>
+              </a:rPr>
+              <a:t>Why banks still start here</a:t>
+            </a:r>
+          </a:p>
+          <a:p>
+            <a:pPr algn="l">
+              <a:spcBef>
+                <a:spcPts val="600"/>
+              </a:spcBef>
+            </a:pPr>
+            <a:r>
+              <a:rPr sz="1100" b="0">
+                <a:solidFill>
+                  <a:srgbClr val="1B2A41"/>
+                </a:solidFill>
+              </a:rPr>
+              <a:t>You can print this model on one line. You can point at the weight that hurt this borrower. A supervisor can recompute it by hand. For a regulated lending decision, that matters more than the last two points of accuracy.</a:t>
+            </a:r>
+          </a:p>
+        </p:txBody>
+      </p:sp>
+      <p:sp>
+        <p:nvSpPr>
+          <p:cNvPr id="26" name="Rectangle 25"/>
           <p:cNvSpPr/>
           <p:nvPr/>
         </p:nvSpPr>
         <p:spPr>
           <a:xfrm>
-            <a:off x="6153912" y="1572768"/>
-            <a:ext cx="5486400" cy="1225296"/>
+            <a:off x="548640" y="5760720"/>
+            <a:ext cx="11091672" cy="603504"/>
           </a:xfrm>
           <a:prstGeom prst="rect">
             <a:avLst/>
           </a:prstGeom>
           <a:solidFill>
-            <a:srgbClr val="FFFFFF"/>
+            <a:srgbClr val="0F2145"/>
           </a:solidFill>
           <a:ln>
             <a:noFill/>
@@ -7981,14 +9931,14 @@
       </p:sp>
       <p:sp>
         <p:nvSpPr>
-          <p:cNvPr id="10" name="Rectangle 9"/>
+          <p:cNvPr id="27" name="Rectangle 26"/>
           <p:cNvSpPr/>
           <p:nvPr/>
         </p:nvSpPr>
         <p:spPr>
           <a:xfrm>
-            <a:off x="6153912" y="1572768"/>
-            <a:ext cx="54864" cy="1225296"/>
+            <a:off x="548640" y="5760720"/>
+            <a:ext cx="64008" cy="603504"/>
           </a:xfrm>
           <a:prstGeom prst="rect">
             <a:avLst/>
@@ -8025,559 +9975,49 @@
       </p:sp>
       <p:sp>
         <p:nvSpPr>
-          <p:cNvPr id="11" name="TextBox 10"/>
-          <p:cNvSpPr txBox="1"/>
-          <p:nvPr/>
-        </p:nvSpPr>
-        <p:spPr>
-          <a:xfrm>
-            <a:off x="6428231" y="1737360"/>
-            <a:ext cx="4937760" cy="292608"/>
-          </a:xfrm>
-          <a:prstGeom prst="rect">
-            <a:avLst/>
-          </a:prstGeom>
-          <a:noFill/>
-        </p:spPr>
-        <p:txBody>
-          <a:bodyPr wrap="square" anchor="t" lIns="0" rIns="0" tIns="0" bIns="0">
-            <a:spAutoFit/>
-          </a:bodyPr>
-          <a:lstStyle/>
-          <a:p>
-            <a:pPr algn="l"/>
-            <a:r>
-              <a:rPr sz="1100" b="1">
-                <a:solidFill>
-                  <a:srgbClr val="3A5C9E"/>
-                </a:solidFill>
-              </a:rPr>
-              <a:t>GINI</a:t>
-            </a:r>
-          </a:p>
-        </p:txBody>
-      </p:sp>
-      <p:sp>
-        <p:nvSpPr>
-          <p:cNvPr id="12" name="TextBox 11"/>
-          <p:cNvSpPr txBox="1"/>
-          <p:nvPr/>
-        </p:nvSpPr>
-        <p:spPr>
-          <a:xfrm>
-            <a:off x="6428231" y="2084832"/>
-            <a:ext cx="4937760" cy="640080"/>
-          </a:xfrm>
-          <a:prstGeom prst="rect">
-            <a:avLst/>
-          </a:prstGeom>
-          <a:noFill/>
-        </p:spPr>
-        <p:txBody>
-          <a:bodyPr wrap="square" anchor="t" lIns="0" rIns="0" tIns="0" bIns="0">
-            <a:spAutoFit/>
-          </a:bodyPr>
-          <a:lstStyle/>
-          <a:p>
-            <a:pPr algn="l"/>
-            <a:r>
-              <a:rPr sz="1050" b="0">
-                <a:solidFill>
-                  <a:srgbClr val="1B2A41"/>
-                </a:solidFill>
-              </a:rPr>
-              <a:t>The same information on a different scale: Gini = 2 × AUC − 1. A working scorecard is usually somewhere around 0.5. Banks quote this one out of habit.</a:t>
-            </a:r>
-          </a:p>
-        </p:txBody>
-      </p:sp>
-      <p:sp>
-        <p:nvSpPr>
-          <p:cNvPr id="13" name="Rectangle 12"/>
-          <p:cNvSpPr/>
-          <p:nvPr/>
-        </p:nvSpPr>
-        <p:spPr>
-          <a:xfrm>
-            <a:off x="548640" y="2944368"/>
-            <a:ext cx="5486400" cy="1225296"/>
-          </a:xfrm>
-          <a:prstGeom prst="rect">
-            <a:avLst/>
-          </a:prstGeom>
-          <a:solidFill>
-            <a:srgbClr val="FFFFFF"/>
-          </a:solidFill>
-          <a:ln>
-            <a:noFill/>
-          </a:ln>
-          <a:effectLst/>
-        </p:spPr>
-        <p:style>
-          <a:lnRef idx="1">
-            <a:schemeClr val="accent1"/>
-          </a:lnRef>
-          <a:fillRef idx="3">
-            <a:schemeClr val="accent1"/>
-          </a:fillRef>
-          <a:effectRef idx="2">
-            <a:schemeClr val="accent1"/>
-          </a:effectRef>
-          <a:fontRef idx="minor">
-            <a:schemeClr val="lt1"/>
-          </a:fontRef>
-        </p:style>
-        <p:txBody>
-          <a:bodyPr rtlCol="0" anchor="ctr"/>
-          <a:lstStyle/>
-          <a:p>
-            <a:pPr algn="ctr"/>
-          </a:p>
-        </p:txBody>
-      </p:sp>
-      <p:sp>
-        <p:nvSpPr>
-          <p:cNvPr id="14" name="Rectangle 13"/>
-          <p:cNvSpPr/>
-          <p:nvPr/>
-        </p:nvSpPr>
-        <p:spPr>
-          <a:xfrm>
-            <a:off x="548640" y="2944368"/>
-            <a:ext cx="54864" cy="1225296"/>
-          </a:xfrm>
-          <a:prstGeom prst="rect">
-            <a:avLst/>
-          </a:prstGeom>
-          <a:solidFill>
-            <a:srgbClr val="C9A227"/>
-          </a:solidFill>
-          <a:ln>
-            <a:noFill/>
-          </a:ln>
-          <a:effectLst/>
-        </p:spPr>
-        <p:style>
-          <a:lnRef idx="1">
-            <a:schemeClr val="accent1"/>
-          </a:lnRef>
-          <a:fillRef idx="3">
-            <a:schemeClr val="accent1"/>
-          </a:fillRef>
-          <a:effectRef idx="2">
-            <a:schemeClr val="accent1"/>
-          </a:effectRef>
-          <a:fontRef idx="minor">
-            <a:schemeClr val="lt1"/>
-          </a:fontRef>
-        </p:style>
-        <p:txBody>
-          <a:bodyPr rtlCol="0" anchor="ctr"/>
-          <a:lstStyle/>
-          <a:p>
-            <a:pPr algn="ctr"/>
-          </a:p>
-        </p:txBody>
-      </p:sp>
-      <p:sp>
-        <p:nvSpPr>
-          <p:cNvPr id="15" name="TextBox 14"/>
-          <p:cNvSpPr txBox="1"/>
-          <p:nvPr/>
-        </p:nvSpPr>
-        <p:spPr>
-          <a:xfrm>
-            <a:off x="822959" y="3108960"/>
-            <a:ext cx="4937760" cy="292608"/>
-          </a:xfrm>
-          <a:prstGeom prst="rect">
-            <a:avLst/>
-          </a:prstGeom>
-          <a:noFill/>
-        </p:spPr>
-        <p:txBody>
-          <a:bodyPr wrap="square" anchor="t" lIns="0" rIns="0" tIns="0" bIns="0">
-            <a:spAutoFit/>
-          </a:bodyPr>
-          <a:lstStyle/>
-          <a:p>
-            <a:pPr algn="l"/>
-            <a:r>
-              <a:rPr sz="1100" b="1">
-                <a:solidFill>
-                  <a:srgbClr val="3A5C9E"/>
-                </a:solidFill>
-              </a:rPr>
-              <a:t>KS STATISTIC</a:t>
-            </a:r>
-          </a:p>
-        </p:txBody>
-      </p:sp>
-      <p:sp>
-        <p:nvSpPr>
-          <p:cNvPr id="16" name="TextBox 15"/>
-          <p:cNvSpPr txBox="1"/>
-          <p:nvPr/>
-        </p:nvSpPr>
-        <p:spPr>
-          <a:xfrm>
-            <a:off x="822959" y="3456432"/>
-            <a:ext cx="4937760" cy="640080"/>
-          </a:xfrm>
-          <a:prstGeom prst="rect">
-            <a:avLst/>
-          </a:prstGeom>
-          <a:noFill/>
-        </p:spPr>
-        <p:txBody>
-          <a:bodyPr wrap="square" anchor="t" lIns="0" rIns="0" tIns="0" bIns="0">
-            <a:spAutoFit/>
-          </a:bodyPr>
-          <a:lstStyle/>
-          <a:p>
-            <a:pPr algn="l"/>
-            <a:r>
-              <a:rPr sz="1050" b="0">
-                <a:solidFill>
-                  <a:srgbClr val="1B2A41"/>
-                </a:solidFill>
-              </a:rPr>
-              <a:t>The widest gap between the good borrowers and the bad ones as you move down the score. It tells you where to put the cut-off.</a:t>
-            </a:r>
-          </a:p>
-        </p:txBody>
-      </p:sp>
-      <p:sp>
-        <p:nvSpPr>
-          <p:cNvPr id="17" name="Rectangle 16"/>
-          <p:cNvSpPr/>
-          <p:nvPr/>
-        </p:nvSpPr>
-        <p:spPr>
-          <a:xfrm>
-            <a:off x="6153912" y="2944368"/>
-            <a:ext cx="5486400" cy="1225296"/>
-          </a:xfrm>
-          <a:prstGeom prst="rect">
-            <a:avLst/>
-          </a:prstGeom>
-          <a:solidFill>
-            <a:srgbClr val="FFFFFF"/>
-          </a:solidFill>
-          <a:ln>
-            <a:noFill/>
-          </a:ln>
-          <a:effectLst/>
-        </p:spPr>
-        <p:style>
-          <a:lnRef idx="1">
-            <a:schemeClr val="accent1"/>
-          </a:lnRef>
-          <a:fillRef idx="3">
-            <a:schemeClr val="accent1"/>
-          </a:fillRef>
-          <a:effectRef idx="2">
-            <a:schemeClr val="accent1"/>
-          </a:effectRef>
-          <a:fontRef idx="minor">
-            <a:schemeClr val="lt1"/>
-          </a:fontRef>
-        </p:style>
-        <p:txBody>
-          <a:bodyPr rtlCol="0" anchor="ctr"/>
-          <a:lstStyle/>
-          <a:p>
-            <a:pPr algn="ctr"/>
-          </a:p>
-        </p:txBody>
-      </p:sp>
-      <p:sp>
-        <p:nvSpPr>
-          <p:cNvPr id="18" name="Rectangle 17"/>
-          <p:cNvSpPr/>
-          <p:nvPr/>
-        </p:nvSpPr>
-        <p:spPr>
-          <a:xfrm>
-            <a:off x="6153912" y="2944368"/>
-            <a:ext cx="54864" cy="1225296"/>
-          </a:xfrm>
-          <a:prstGeom prst="rect">
-            <a:avLst/>
-          </a:prstGeom>
-          <a:solidFill>
-            <a:srgbClr val="C9A227"/>
-          </a:solidFill>
-          <a:ln>
-            <a:noFill/>
-          </a:ln>
-          <a:effectLst/>
-        </p:spPr>
-        <p:style>
-          <a:lnRef idx="1">
-            <a:schemeClr val="accent1"/>
-          </a:lnRef>
-          <a:fillRef idx="3">
-            <a:schemeClr val="accent1"/>
-          </a:fillRef>
-          <a:effectRef idx="2">
-            <a:schemeClr val="accent1"/>
-          </a:effectRef>
-          <a:fontRef idx="minor">
-            <a:schemeClr val="lt1"/>
-          </a:fontRef>
-        </p:style>
-        <p:txBody>
-          <a:bodyPr rtlCol="0" anchor="ctr"/>
-          <a:lstStyle/>
-          <a:p>
-            <a:pPr algn="ctr"/>
-          </a:p>
-        </p:txBody>
-      </p:sp>
-      <p:sp>
-        <p:nvSpPr>
-          <p:cNvPr id="19" name="TextBox 18"/>
-          <p:cNvSpPr txBox="1"/>
-          <p:nvPr/>
-        </p:nvSpPr>
-        <p:spPr>
-          <a:xfrm>
-            <a:off x="6428231" y="3108960"/>
-            <a:ext cx="4937760" cy="292608"/>
-          </a:xfrm>
-          <a:prstGeom prst="rect">
-            <a:avLst/>
-          </a:prstGeom>
-          <a:noFill/>
-        </p:spPr>
-        <p:txBody>
-          <a:bodyPr wrap="square" anchor="t" lIns="0" rIns="0" tIns="0" bIns="0">
-            <a:spAutoFit/>
-          </a:bodyPr>
-          <a:lstStyle/>
-          <a:p>
-            <a:pPr algn="l"/>
-            <a:r>
-              <a:rPr sz="1100" b="1">
-                <a:solidFill>
-                  <a:srgbClr val="3A5C9E"/>
-                </a:solidFill>
-              </a:rPr>
-              <a:t>SHAP</a:t>
-            </a:r>
-          </a:p>
-        </p:txBody>
-      </p:sp>
-      <p:sp>
-        <p:nvSpPr>
-          <p:cNvPr id="20" name="TextBox 19"/>
-          <p:cNvSpPr txBox="1"/>
-          <p:nvPr/>
-        </p:nvSpPr>
-        <p:spPr>
-          <a:xfrm>
-            <a:off x="6428231" y="3456432"/>
-            <a:ext cx="4937760" cy="640080"/>
-          </a:xfrm>
-          <a:prstGeom prst="rect">
-            <a:avLst/>
-          </a:prstGeom>
-          <a:noFill/>
-        </p:spPr>
-        <p:txBody>
-          <a:bodyPr wrap="square" anchor="t" lIns="0" rIns="0" tIns="0" bIns="0">
-            <a:spAutoFit/>
-          </a:bodyPr>
-          <a:lstStyle/>
-          <a:p>
-            <a:pPr algn="l"/>
-            <a:r>
-              <a:rPr sz="1050" b="0">
-                <a:solidFill>
-                  <a:srgbClr val="1B2A41"/>
-                </a:solidFill>
-              </a:rPr>
-              <a:t>Which input pushed THIS applicant's score up or down. It is how you answer the only question the customer asks, which is why they were declined.</a:t>
-            </a:r>
-          </a:p>
-        </p:txBody>
-      </p:sp>
-      <p:sp>
-        <p:nvSpPr>
-          <p:cNvPr id="21" name="Rectangle 20"/>
-          <p:cNvSpPr/>
-          <p:nvPr/>
-        </p:nvSpPr>
-        <p:spPr>
-          <a:xfrm>
-            <a:off x="548640" y="4370832"/>
-            <a:ext cx="11091672" cy="1207008"/>
-          </a:xfrm>
-          <a:prstGeom prst="rect">
-            <a:avLst/>
-          </a:prstGeom>
-          <a:solidFill>
-            <a:srgbClr val="0F2145"/>
-          </a:solidFill>
-          <a:ln>
-            <a:noFill/>
-          </a:ln>
-          <a:effectLst/>
-        </p:spPr>
-        <p:style>
-          <a:lnRef idx="1">
-            <a:schemeClr val="accent1"/>
-          </a:lnRef>
-          <a:fillRef idx="3">
-            <a:schemeClr val="accent1"/>
-          </a:fillRef>
-          <a:effectRef idx="2">
-            <a:schemeClr val="accent1"/>
-          </a:effectRef>
-          <a:fontRef idx="minor">
-            <a:schemeClr val="lt1"/>
-          </a:fontRef>
-        </p:style>
-        <p:txBody>
-          <a:bodyPr rtlCol="0" anchor="ctr"/>
-          <a:lstStyle/>
-          <a:p>
-            <a:pPr algn="ctr"/>
-          </a:p>
-        </p:txBody>
-      </p:sp>
-      <p:sp>
-        <p:nvSpPr>
-          <p:cNvPr id="22" name="Rectangle 21"/>
-          <p:cNvSpPr/>
-          <p:nvPr/>
-        </p:nvSpPr>
-        <p:spPr>
-          <a:xfrm>
-            <a:off x="548640" y="4370832"/>
-            <a:ext cx="64008" cy="1207008"/>
-          </a:xfrm>
-          <a:prstGeom prst="rect">
-            <a:avLst/>
-          </a:prstGeom>
-          <a:solidFill>
-            <a:srgbClr val="C9A227"/>
-          </a:solidFill>
-          <a:ln>
-            <a:noFill/>
-          </a:ln>
-          <a:effectLst/>
-        </p:spPr>
-        <p:style>
-          <a:lnRef idx="1">
-            <a:schemeClr val="accent1"/>
-          </a:lnRef>
-          <a:fillRef idx="3">
-            <a:schemeClr val="accent1"/>
-          </a:fillRef>
-          <a:effectRef idx="2">
-            <a:schemeClr val="accent1"/>
-          </a:effectRef>
-          <a:fontRef idx="minor">
-            <a:schemeClr val="lt1"/>
-          </a:fontRef>
-        </p:style>
-        <p:txBody>
-          <a:bodyPr rtlCol="0" anchor="ctr"/>
-          <a:lstStyle/>
-          <a:p>
-            <a:pPr algn="ctr"/>
-          </a:p>
-        </p:txBody>
-      </p:sp>
-      <p:sp>
-        <p:nvSpPr>
-          <p:cNvPr id="23" name="TextBox 22"/>
-          <p:cNvSpPr txBox="1"/>
-          <p:nvPr/>
-        </p:nvSpPr>
-        <p:spPr>
-          <a:xfrm>
-            <a:off x="868680" y="4535424"/>
-            <a:ext cx="10515600" cy="914400"/>
-          </a:xfrm>
-          <a:prstGeom prst="rect">
-            <a:avLst/>
-          </a:prstGeom>
-          <a:noFill/>
-        </p:spPr>
-        <p:txBody>
-          <a:bodyPr wrap="square" anchor="t" lIns="0" rIns="0" tIns="0" bIns="0">
-            <a:spAutoFit/>
-          </a:bodyPr>
-          <a:lstStyle/>
-          <a:p>
-            <a:pPr algn="l"/>
-            <a:r>
-              <a:rPr sz="1000" b="1">
+          <p:cNvPr id="28" name="TextBox 27"/>
+          <p:cNvSpPr txBox="1"/>
+          <p:nvPr/>
+        </p:nvSpPr>
+        <p:spPr>
+          <a:xfrm>
+            <a:off x="822960" y="5760720"/>
+            <a:ext cx="10543032" cy="603504"/>
+          </a:xfrm>
+          <a:prstGeom prst="rect">
+            <a:avLst/>
+          </a:prstGeom>
+          <a:noFill/>
+        </p:spPr>
+        <p:txBody>
+          <a:bodyPr wrap="square" anchor="ctr" lIns="0" rIns="0" tIns="0" bIns="0">
+            <a:spAutoFit/>
+          </a:bodyPr>
+          <a:lstStyle/>
+          <a:p>
+            <a:pPr algn="l"/>
+            <a:r>
+              <a:rPr sz="1200" b="1">
                 <a:solidFill>
                   <a:srgbClr val="C9A227"/>
                 </a:solidFill>
               </a:rPr>
-              <a:t>CASE  ·  WHEN A LENDER'S PD MODEL FAILS</a:t>
-            </a:r>
-          </a:p>
-          <a:p>
-            <a:pPr algn="l">
-              <a:spcBef>
-                <a:spcPts val="500"/>
-              </a:spcBef>
-            </a:pPr>
-            <a:r>
-              <a:rPr sz="1100" b="0">
-                <a:solidFill>
-                  <a:srgbClr val="C9D6EE"/>
-                </a:solidFill>
-              </a:rPr>
-              <a:t>The pattern repeats. A lender trains on a boom, so the model has never seen a downturn. Approvals rise because the model is confident. Nobody can explain an individual decline, so the complaints land with the regulator. The finding is rarely the mathematics. It is that the lender could not show how the model was built, tested or monitored.</a:t>
-            </a:r>
-          </a:p>
-        </p:txBody>
-      </p:sp>
-      <p:sp>
-        <p:nvSpPr>
-          <p:cNvPr id="24" name="TextBox 23"/>
-          <p:cNvSpPr txBox="1"/>
-          <p:nvPr/>
-        </p:nvSpPr>
-        <p:spPr>
-          <a:xfrm>
-            <a:off x="548640" y="5760720"/>
-            <a:ext cx="11091672" cy="365760"/>
-          </a:xfrm>
-          <a:prstGeom prst="rect">
-            <a:avLst/>
-          </a:prstGeom>
-          <a:noFill/>
-        </p:spPr>
-        <p:txBody>
-          <a:bodyPr wrap="square" anchor="t" lIns="0" rIns="0" tIns="0" bIns="0">
-            <a:spAutoFit/>
-          </a:bodyPr>
-          <a:lstStyle/>
-          <a:p>
-            <a:pPr algn="l"/>
-            <a:r>
-              <a:rPr sz="1400" b="1">
-                <a:solidFill>
-                  <a:srgbClr val="0F2145"/>
-                </a:solidFill>
-                <a:latin typeface="Georgia"/>
-              </a:rPr>
-              <a:t>A model you cannot explain is a model you cannot defend, and defending it is the job.</a:t>
-            </a:r>
-          </a:p>
-        </p:txBody>
-      </p:sp>
-      <p:sp>
-        <p:nvSpPr>
-          <p:cNvPr id="25" name="TextBox 24"/>
+              <a:t>Do it live:  </a:t>
+            </a:r>
+            <a:r>
+              <a:rPr sz="1200" b="0">
+                <a:solidFill>
+                  <a:srgbClr val="FFFFFF"/>
+                </a:solidFill>
+              </a:rPr>
+              <a:t>change interest cover from 2.3 to 1.1 in front of the class, recompute the score, and watch the PD move.</a:t>
+            </a:r>
+          </a:p>
+        </p:txBody>
+      </p:sp>
+      <p:sp>
+        <p:nvSpPr>
+          <p:cNvPr id="29" name="TextBox 28"/>
           <p:cNvSpPr txBox="1"/>
           <p:nvPr/>
         </p:nvSpPr>
@@ -8611,7 +10051,7 @@
       </p:sp>
       <p:sp>
         <p:nvSpPr>
-          <p:cNvPr id="26" name="TextBox 25"/>
+          <p:cNvPr id="30" name="TextBox 29"/>
           <p:cNvSpPr txBox="1"/>
           <p:nvPr/>
         </p:nvSpPr>
@@ -8742,7 +10182,7 @@
                   <a:srgbClr val="C9A227"/>
                 </a:solidFill>
               </a:rPr>
-              <a:t>HOUR 2 · MARKET RISK</a:t>
+              <a:t>HOUR 1 · THE CHOICE EVERY TEAM ARGUES ABOUT</a:t>
             </a:r>
           </a:p>
         </p:txBody>
@@ -8777,7 +10217,7 @@
                 </a:solidFill>
                 <a:latin typeface="Georgia"/>
               </a:rPr>
-              <a:t>VaR is one sentence. The rest is how you compute it.</a:t>
+              <a:t>The older model, or the one that predicts better?</a:t>
             </a:r>
           </a:p>
         </p:txBody>
@@ -8790,8 +10230,402 @@
         </p:nvSpPr>
         <p:spPr>
           <a:xfrm>
-            <a:off x="548640" y="1463040"/>
-            <a:ext cx="11091672" cy="694944"/>
+            <a:off x="548640" y="1536192"/>
+            <a:ext cx="3611880" cy="2743200"/>
+          </a:xfrm>
+          <a:prstGeom prst="rect">
+            <a:avLst/>
+          </a:prstGeom>
+          <a:solidFill>
+            <a:srgbClr val="FFFFFF"/>
+          </a:solidFill>
+          <a:ln>
+            <a:noFill/>
+          </a:ln>
+          <a:effectLst/>
+        </p:spPr>
+        <p:style>
+          <a:lnRef idx="1">
+            <a:schemeClr val="accent1"/>
+          </a:lnRef>
+          <a:fillRef idx="3">
+            <a:schemeClr val="accent1"/>
+          </a:fillRef>
+          <a:effectRef idx="2">
+            <a:schemeClr val="accent1"/>
+          </a:effectRef>
+          <a:fontRef idx="minor">
+            <a:schemeClr val="lt1"/>
+          </a:fontRef>
+        </p:style>
+        <p:txBody>
+          <a:bodyPr rtlCol="0" anchor="ctr"/>
+          <a:lstStyle/>
+          <a:p>
+            <a:pPr algn="ctr"/>
+          </a:p>
+        </p:txBody>
+      </p:sp>
+      <p:sp>
+        <p:nvSpPr>
+          <p:cNvPr id="6" name="TextBox 5"/>
+          <p:cNvSpPr txBox="1"/>
+          <p:nvPr/>
+        </p:nvSpPr>
+        <p:spPr>
+          <a:xfrm>
+            <a:off x="804672" y="1737360"/>
+            <a:ext cx="3099816" cy="274320"/>
+          </a:xfrm>
+          <a:prstGeom prst="rect">
+            <a:avLst/>
+          </a:prstGeom>
+          <a:noFill/>
+        </p:spPr>
+        <p:txBody>
+          <a:bodyPr wrap="square" anchor="t" lIns="0" rIns="0" tIns="0" bIns="0">
+            <a:spAutoFit/>
+          </a:bodyPr>
+          <a:lstStyle/>
+          <a:p>
+            <a:pPr algn="l"/>
+            <a:r>
+              <a:rPr sz="950" b="1">
+                <a:solidFill>
+                  <a:srgbClr val="3A5C9E"/>
+                </a:solidFill>
+              </a:rPr>
+              <a:t>LOGISTIC REGRESSION</a:t>
+            </a:r>
+          </a:p>
+        </p:txBody>
+      </p:sp>
+      <p:sp>
+        <p:nvSpPr>
+          <p:cNvPr id="7" name="TextBox 6"/>
+          <p:cNvSpPr txBox="1"/>
+          <p:nvPr/>
+        </p:nvSpPr>
+        <p:spPr>
+          <a:xfrm>
+            <a:off x="804672" y="2048256"/>
+            <a:ext cx="3099816" cy="548640"/>
+          </a:xfrm>
+          <a:prstGeom prst="rect">
+            <a:avLst/>
+          </a:prstGeom>
+          <a:noFill/>
+        </p:spPr>
+        <p:txBody>
+          <a:bodyPr wrap="square" anchor="t" lIns="0" rIns="0" tIns="0" bIns="0">
+            <a:spAutoFit/>
+          </a:bodyPr>
+          <a:lstStyle/>
+          <a:p>
+            <a:pPr algn="l"/>
+            <a:r>
+              <a:rPr sz="1500" b="1">
+                <a:solidFill>
+                  <a:srgbClr val="0F2145"/>
+                </a:solidFill>
+                <a:latin typeface="Georgia"/>
+              </a:rPr>
+              <a:t>One weight per ratio, added up.</a:t>
+            </a:r>
+          </a:p>
+        </p:txBody>
+      </p:sp>
+      <p:sp>
+        <p:nvSpPr>
+          <p:cNvPr id="8" name="TextBox 7"/>
+          <p:cNvSpPr txBox="1"/>
+          <p:nvPr/>
+        </p:nvSpPr>
+        <p:spPr>
+          <a:xfrm>
+            <a:off x="804672" y="2706624"/>
+            <a:ext cx="3099816" cy="676656"/>
+          </a:xfrm>
+          <a:prstGeom prst="rect">
+            <a:avLst/>
+          </a:prstGeom>
+          <a:noFill/>
+        </p:spPr>
+        <p:txBody>
+          <a:bodyPr wrap="square" anchor="t" lIns="0" rIns="0" tIns="0" bIns="0">
+            <a:spAutoFit/>
+          </a:bodyPr>
+          <a:lstStyle/>
+          <a:p>
+            <a:pPr algn="l"/>
+            <a:r>
+              <a:rPr sz="1000" b="1">
+                <a:solidFill>
+                  <a:srgbClr val="C9A227"/>
+                </a:solidFill>
+              </a:rPr>
+              <a:t>+  </a:t>
+            </a:r>
+            <a:r>
+              <a:rPr sz="1000" b="0">
+                <a:solidFill>
+                  <a:srgbClr val="1B2A41"/>
+                </a:solidFill>
+              </a:rPr>
+              <a:t>You can print it, explain one decline, and defend it line by line.</a:t>
+            </a:r>
+          </a:p>
+        </p:txBody>
+      </p:sp>
+      <p:sp>
+        <p:nvSpPr>
+          <p:cNvPr id="9" name="TextBox 8"/>
+          <p:cNvSpPr txBox="1"/>
+          <p:nvPr/>
+        </p:nvSpPr>
+        <p:spPr>
+          <a:xfrm>
+            <a:off x="804672" y="3493008"/>
+            <a:ext cx="3099816" cy="676656"/>
+          </a:xfrm>
+          <a:prstGeom prst="rect">
+            <a:avLst/>
+          </a:prstGeom>
+          <a:noFill/>
+        </p:spPr>
+        <p:txBody>
+          <a:bodyPr wrap="square" anchor="t" lIns="0" rIns="0" tIns="0" bIns="0">
+            <a:spAutoFit/>
+          </a:bodyPr>
+          <a:lstStyle/>
+          <a:p>
+            <a:pPr algn="l"/>
+            <a:r>
+              <a:rPr sz="1000" b="1">
+                <a:solidFill>
+                  <a:srgbClr val="C9A227"/>
+                </a:solidFill>
+              </a:rPr>
+              <a:t>−  </a:t>
+            </a:r>
+            <a:r>
+              <a:rPr sz="1000" b="0">
+                <a:solidFill>
+                  <a:srgbClr val="5D6B7E"/>
+                </a:solidFill>
+              </a:rPr>
+              <a:t>It assumes each ratio pushes in a straight line, which is not always true.</a:t>
+            </a:r>
+          </a:p>
+        </p:txBody>
+      </p:sp>
+      <p:sp>
+        <p:nvSpPr>
+          <p:cNvPr id="10" name="Rectangle 9"/>
+          <p:cNvSpPr/>
+          <p:nvPr/>
+        </p:nvSpPr>
+        <p:spPr>
+          <a:xfrm>
+            <a:off x="4315968" y="1536192"/>
+            <a:ext cx="3611880" cy="2743200"/>
+          </a:xfrm>
+          <a:prstGeom prst="rect">
+            <a:avLst/>
+          </a:prstGeom>
+          <a:solidFill>
+            <a:srgbClr val="FFFFFF"/>
+          </a:solidFill>
+          <a:ln>
+            <a:noFill/>
+          </a:ln>
+          <a:effectLst/>
+        </p:spPr>
+        <p:style>
+          <a:lnRef idx="1">
+            <a:schemeClr val="accent1"/>
+          </a:lnRef>
+          <a:fillRef idx="3">
+            <a:schemeClr val="accent1"/>
+          </a:fillRef>
+          <a:effectRef idx="2">
+            <a:schemeClr val="accent1"/>
+          </a:effectRef>
+          <a:fontRef idx="minor">
+            <a:schemeClr val="lt1"/>
+          </a:fontRef>
+        </p:style>
+        <p:txBody>
+          <a:bodyPr rtlCol="0" anchor="ctr"/>
+          <a:lstStyle/>
+          <a:p>
+            <a:pPr algn="ctr"/>
+          </a:p>
+        </p:txBody>
+      </p:sp>
+      <p:sp>
+        <p:nvSpPr>
+          <p:cNvPr id="11" name="TextBox 10"/>
+          <p:cNvSpPr txBox="1"/>
+          <p:nvPr/>
+        </p:nvSpPr>
+        <p:spPr>
+          <a:xfrm>
+            <a:off x="4572000" y="1737360"/>
+            <a:ext cx="3099816" cy="274320"/>
+          </a:xfrm>
+          <a:prstGeom prst="rect">
+            <a:avLst/>
+          </a:prstGeom>
+          <a:noFill/>
+        </p:spPr>
+        <p:txBody>
+          <a:bodyPr wrap="square" anchor="t" lIns="0" rIns="0" tIns="0" bIns="0">
+            <a:spAutoFit/>
+          </a:bodyPr>
+          <a:lstStyle/>
+          <a:p>
+            <a:pPr algn="l"/>
+            <a:r>
+              <a:rPr sz="950" b="1">
+                <a:solidFill>
+                  <a:srgbClr val="3A5C9E"/>
+                </a:solidFill>
+              </a:rPr>
+              <a:t>DECISION TREE</a:t>
+            </a:r>
+          </a:p>
+        </p:txBody>
+      </p:sp>
+      <p:sp>
+        <p:nvSpPr>
+          <p:cNvPr id="12" name="TextBox 11"/>
+          <p:cNvSpPr txBox="1"/>
+          <p:nvPr/>
+        </p:nvSpPr>
+        <p:spPr>
+          <a:xfrm>
+            <a:off x="4572000" y="2048256"/>
+            <a:ext cx="3099816" cy="548640"/>
+          </a:xfrm>
+          <a:prstGeom prst="rect">
+            <a:avLst/>
+          </a:prstGeom>
+          <a:noFill/>
+        </p:spPr>
+        <p:txBody>
+          <a:bodyPr wrap="square" anchor="t" lIns="0" rIns="0" tIns="0" bIns="0">
+            <a:spAutoFit/>
+          </a:bodyPr>
+          <a:lstStyle/>
+          <a:p>
+            <a:pPr algn="l"/>
+            <a:r>
+              <a:rPr sz="1500" b="1">
+                <a:solidFill>
+                  <a:srgbClr val="0F2145"/>
+                </a:solidFill>
+                <a:latin typeface="Georgia"/>
+              </a:rPr>
+              <a:t>A flowchart of yes and no questions.</a:t>
+            </a:r>
+          </a:p>
+        </p:txBody>
+      </p:sp>
+      <p:sp>
+        <p:nvSpPr>
+          <p:cNvPr id="13" name="TextBox 12"/>
+          <p:cNvSpPr txBox="1"/>
+          <p:nvPr/>
+        </p:nvSpPr>
+        <p:spPr>
+          <a:xfrm>
+            <a:off x="4572000" y="2706624"/>
+            <a:ext cx="3099816" cy="676656"/>
+          </a:xfrm>
+          <a:prstGeom prst="rect">
+            <a:avLst/>
+          </a:prstGeom>
+          <a:noFill/>
+        </p:spPr>
+        <p:txBody>
+          <a:bodyPr wrap="square" anchor="t" lIns="0" rIns="0" tIns="0" bIns="0">
+            <a:spAutoFit/>
+          </a:bodyPr>
+          <a:lstStyle/>
+          <a:p>
+            <a:pPr algn="l"/>
+            <a:r>
+              <a:rPr sz="1000" b="1">
+                <a:solidFill>
+                  <a:srgbClr val="C9A227"/>
+                </a:solidFill>
+              </a:rPr>
+              <a:t>+  </a:t>
+            </a:r>
+            <a:r>
+              <a:rPr sz="1000" b="0">
+                <a:solidFill>
+                  <a:srgbClr val="1B2A41"/>
+                </a:solidFill>
+              </a:rPr>
+              <a:t>Anyone can read it. Interest cover below 1.5? Then debt to equity above 3?</a:t>
+            </a:r>
+          </a:p>
+        </p:txBody>
+      </p:sp>
+      <p:sp>
+        <p:nvSpPr>
+          <p:cNvPr id="14" name="TextBox 13"/>
+          <p:cNvSpPr txBox="1"/>
+          <p:nvPr/>
+        </p:nvSpPr>
+        <p:spPr>
+          <a:xfrm>
+            <a:off x="4572000" y="3493008"/>
+            <a:ext cx="3099816" cy="676656"/>
+          </a:xfrm>
+          <a:prstGeom prst="rect">
+            <a:avLst/>
+          </a:prstGeom>
+          <a:noFill/>
+        </p:spPr>
+        <p:txBody>
+          <a:bodyPr wrap="square" anchor="t" lIns="0" rIns="0" tIns="0" bIns="0">
+            <a:spAutoFit/>
+          </a:bodyPr>
+          <a:lstStyle/>
+          <a:p>
+            <a:pPr algn="l"/>
+            <a:r>
+              <a:rPr sz="1000" b="1">
+                <a:solidFill>
+                  <a:srgbClr val="C9A227"/>
+                </a:solidFill>
+              </a:rPr>
+              <a:t>−  </a:t>
+            </a:r>
+            <a:r>
+              <a:rPr sz="1000" b="0">
+                <a:solidFill>
+                  <a:srgbClr val="5D6B7E"/>
+                </a:solidFill>
+              </a:rPr>
+              <a:t>Change the data slightly and the tree redraws itself completely.</a:t>
+            </a:r>
+          </a:p>
+        </p:txBody>
+      </p:sp>
+      <p:sp>
+        <p:nvSpPr>
+          <p:cNvPr id="15" name="Rectangle 14"/>
+          <p:cNvSpPr/>
+          <p:nvPr/>
+        </p:nvSpPr>
+        <p:spPr>
+          <a:xfrm>
+            <a:off x="8083296" y="1536192"/>
+            <a:ext cx="3557016" cy="2743200"/>
           </a:xfrm>
           <a:prstGeom prst="rect">
             <a:avLst/>
@@ -8828,14 +10662,348 @@
       </p:sp>
       <p:sp>
         <p:nvSpPr>
-          <p:cNvPr id="6" name="Rectangle 5"/>
+          <p:cNvPr id="16" name="TextBox 15"/>
+          <p:cNvSpPr txBox="1"/>
+          <p:nvPr/>
+        </p:nvSpPr>
+        <p:spPr>
+          <a:xfrm>
+            <a:off x="8339327" y="1737360"/>
+            <a:ext cx="3044952" cy="274320"/>
+          </a:xfrm>
+          <a:prstGeom prst="rect">
+            <a:avLst/>
+          </a:prstGeom>
+          <a:noFill/>
+        </p:spPr>
+        <p:txBody>
+          <a:bodyPr wrap="square" anchor="t" lIns="0" rIns="0" tIns="0" bIns="0">
+            <a:spAutoFit/>
+          </a:bodyPr>
+          <a:lstStyle/>
+          <a:p>
+            <a:pPr algn="l"/>
+            <a:r>
+              <a:rPr sz="950" b="1">
+                <a:solidFill>
+                  <a:srgbClr val="C9A227"/>
+                </a:solidFill>
+              </a:rPr>
+              <a:t>XGBOOST</a:t>
+            </a:r>
+          </a:p>
+        </p:txBody>
+      </p:sp>
+      <p:sp>
+        <p:nvSpPr>
+          <p:cNvPr id="17" name="TextBox 16"/>
+          <p:cNvSpPr txBox="1"/>
+          <p:nvPr/>
+        </p:nvSpPr>
+        <p:spPr>
+          <a:xfrm>
+            <a:off x="8339327" y="2048256"/>
+            <a:ext cx="3044952" cy="548640"/>
+          </a:xfrm>
+          <a:prstGeom prst="rect">
+            <a:avLst/>
+          </a:prstGeom>
+          <a:noFill/>
+        </p:spPr>
+        <p:txBody>
+          <a:bodyPr wrap="square" anchor="t" lIns="0" rIns="0" tIns="0" bIns="0">
+            <a:spAutoFit/>
+          </a:bodyPr>
+          <a:lstStyle/>
+          <a:p>
+            <a:pPr algn="l"/>
+            <a:r>
+              <a:rPr sz="1500" b="1">
+                <a:solidFill>
+                  <a:srgbClr val="FFFFFF"/>
+                </a:solidFill>
+                <a:latin typeface="Georgia"/>
+              </a:rPr>
+              <a:t>Hundreds of small trees, voting.</a:t>
+            </a:r>
+          </a:p>
+        </p:txBody>
+      </p:sp>
+      <p:sp>
+        <p:nvSpPr>
+          <p:cNvPr id="18" name="TextBox 17"/>
+          <p:cNvSpPr txBox="1"/>
+          <p:nvPr/>
+        </p:nvSpPr>
+        <p:spPr>
+          <a:xfrm>
+            <a:off x="8339327" y="2706624"/>
+            <a:ext cx="3044952" cy="676656"/>
+          </a:xfrm>
+          <a:prstGeom prst="rect">
+            <a:avLst/>
+          </a:prstGeom>
+          <a:noFill/>
+        </p:spPr>
+        <p:txBody>
+          <a:bodyPr wrap="square" anchor="t" lIns="0" rIns="0" tIns="0" bIns="0">
+            <a:spAutoFit/>
+          </a:bodyPr>
+          <a:lstStyle/>
+          <a:p>
+            <a:pPr algn="l"/>
+            <a:r>
+              <a:rPr sz="1000" b="1">
+                <a:solidFill>
+                  <a:srgbClr val="C9A227"/>
+                </a:solidFill>
+              </a:rPr>
+              <a:t>+  </a:t>
+            </a:r>
+            <a:r>
+              <a:rPr sz="1000" b="0">
+                <a:solidFill>
+                  <a:srgbClr val="C9D6EE"/>
+                </a:solidFill>
+              </a:rPr>
+              <a:t>Each tree fixes the mistakes of the one before it. Usually the most accurate.</a:t>
+            </a:r>
+          </a:p>
+        </p:txBody>
+      </p:sp>
+      <p:sp>
+        <p:nvSpPr>
+          <p:cNvPr id="19" name="TextBox 18"/>
+          <p:cNvSpPr txBox="1"/>
+          <p:nvPr/>
+        </p:nvSpPr>
+        <p:spPr>
+          <a:xfrm>
+            <a:off x="8339327" y="3493008"/>
+            <a:ext cx="3044952" cy="676656"/>
+          </a:xfrm>
+          <a:prstGeom prst="rect">
+            <a:avLst/>
+          </a:prstGeom>
+          <a:noFill/>
+        </p:spPr>
+        <p:txBody>
+          <a:bodyPr wrap="square" anchor="t" lIns="0" rIns="0" tIns="0" bIns="0">
+            <a:spAutoFit/>
+          </a:bodyPr>
+          <a:lstStyle/>
+          <a:p>
+            <a:pPr algn="l"/>
+            <a:r>
+              <a:rPr sz="1000" b="1">
+                <a:solidFill>
+                  <a:srgbClr val="C9A227"/>
+                </a:solidFill>
+              </a:rPr>
+              <a:t>−  </a:t>
+            </a:r>
+            <a:r>
+              <a:rPr sz="1000" b="0">
+                <a:solidFill>
+                  <a:srgbClr val="C9D6EE"/>
+                </a:solidFill>
+              </a:rPr>
+              <a:t>There is no single weight to point at, so a decline is hard to explain.</a:t>
+            </a:r>
+          </a:p>
+        </p:txBody>
+      </p:sp>
+      <p:sp>
+        <p:nvSpPr>
+          <p:cNvPr id="20" name="Rectangle 19"/>
           <p:cNvSpPr/>
           <p:nvPr/>
         </p:nvSpPr>
         <p:spPr>
           <a:xfrm>
-            <a:off x="548640" y="1463040"/>
-            <a:ext cx="64008" cy="694944"/>
+            <a:off x="548640" y="4443984"/>
+            <a:ext cx="11091672" cy="1005840"/>
+          </a:xfrm>
+          <a:prstGeom prst="rect">
+            <a:avLst/>
+          </a:prstGeom>
+          <a:solidFill>
+            <a:srgbClr val="E9EFF8"/>
+          </a:solidFill>
+          <a:ln>
+            <a:noFill/>
+          </a:ln>
+          <a:effectLst/>
+        </p:spPr>
+        <p:style>
+          <a:lnRef idx="1">
+            <a:schemeClr val="accent1"/>
+          </a:lnRef>
+          <a:fillRef idx="3">
+            <a:schemeClr val="accent1"/>
+          </a:fillRef>
+          <a:effectRef idx="2">
+            <a:schemeClr val="accent1"/>
+          </a:effectRef>
+          <a:fontRef idx="minor">
+            <a:schemeClr val="lt1"/>
+          </a:fontRef>
+        </p:style>
+        <p:txBody>
+          <a:bodyPr rtlCol="0" anchor="ctr"/>
+          <a:lstStyle/>
+          <a:p>
+            <a:pPr algn="ctr"/>
+          </a:p>
+        </p:txBody>
+      </p:sp>
+      <p:sp>
+        <p:nvSpPr>
+          <p:cNvPr id="21" name="Rectangle 20"/>
+          <p:cNvSpPr/>
+          <p:nvPr/>
+        </p:nvSpPr>
+        <p:spPr>
+          <a:xfrm>
+            <a:off x="548640" y="4443984"/>
+            <a:ext cx="64008" cy="1005840"/>
+          </a:xfrm>
+          <a:prstGeom prst="rect">
+            <a:avLst/>
+          </a:prstGeom>
+          <a:solidFill>
+            <a:srgbClr val="3A5C9E"/>
+          </a:solidFill>
+          <a:ln>
+            <a:noFill/>
+          </a:ln>
+          <a:effectLst/>
+        </p:spPr>
+        <p:style>
+          <a:lnRef idx="1">
+            <a:schemeClr val="accent1"/>
+          </a:lnRef>
+          <a:fillRef idx="3">
+            <a:schemeClr val="accent1"/>
+          </a:fillRef>
+          <a:effectRef idx="2">
+            <a:schemeClr val="accent1"/>
+          </a:effectRef>
+          <a:fontRef idx="minor">
+            <a:schemeClr val="lt1"/>
+          </a:fontRef>
+        </p:style>
+        <p:txBody>
+          <a:bodyPr rtlCol="0" anchor="ctr"/>
+          <a:lstStyle/>
+          <a:p>
+            <a:pPr algn="ctr"/>
+          </a:p>
+        </p:txBody>
+      </p:sp>
+      <p:sp>
+        <p:nvSpPr>
+          <p:cNvPr id="22" name="TextBox 21"/>
+          <p:cNvSpPr txBox="1"/>
+          <p:nvPr/>
+        </p:nvSpPr>
+        <p:spPr>
+          <a:xfrm>
+            <a:off x="868680" y="4572000"/>
+            <a:ext cx="10515600" cy="822960"/>
+          </a:xfrm>
+          <a:prstGeom prst="rect">
+            <a:avLst/>
+          </a:prstGeom>
+          <a:noFill/>
+        </p:spPr>
+        <p:txBody>
+          <a:bodyPr wrap="square" anchor="t" lIns="0" rIns="0" tIns="0" bIns="0">
+            <a:spAutoFit/>
+          </a:bodyPr>
+          <a:lstStyle/>
+          <a:p>
+            <a:pPr algn="l"/>
+            <a:r>
+              <a:rPr sz="950" b="1">
+                <a:solidFill>
+                  <a:srgbClr val="3A5C9E"/>
+                </a:solidFill>
+              </a:rPr>
+              <a:t>WHAT YOU ACTUALLY GAIN AND LOSE</a:t>
+            </a:r>
+          </a:p>
+          <a:p>
+            <a:pPr algn="l">
+              <a:spcBef>
+                <a:spcPts val="400"/>
+              </a:spcBef>
+            </a:pPr>
+            <a:r>
+              <a:rPr sz="1100" b="0">
+                <a:solidFill>
+                  <a:srgbClr val="1B2A41"/>
+                </a:solidFill>
+              </a:rPr>
+              <a:t>On the same data XGBoost usually buys you a few points of accuracy. That is real, and it is smaller than people expect. What it costs you is the sentence you give the customer who was declined. Most banks build both, use the sharper one to challenge the simpler one, and ship the one they can explain.</a:t>
+            </a:r>
+          </a:p>
+        </p:txBody>
+      </p:sp>
+      <p:sp>
+        <p:nvSpPr>
+          <p:cNvPr id="23" name="Rectangle 22"/>
+          <p:cNvSpPr/>
+          <p:nvPr/>
+        </p:nvSpPr>
+        <p:spPr>
+          <a:xfrm>
+            <a:off x="548640" y="5760720"/>
+            <a:ext cx="11091672" cy="603504"/>
+          </a:xfrm>
+          <a:prstGeom prst="rect">
+            <a:avLst/>
+          </a:prstGeom>
+          <a:solidFill>
+            <a:srgbClr val="0F2145"/>
+          </a:solidFill>
+          <a:ln>
+            <a:noFill/>
+          </a:ln>
+          <a:effectLst/>
+        </p:spPr>
+        <p:style>
+          <a:lnRef idx="1">
+            <a:schemeClr val="accent1"/>
+          </a:lnRef>
+          <a:fillRef idx="3">
+            <a:schemeClr val="accent1"/>
+          </a:fillRef>
+          <a:effectRef idx="2">
+            <a:schemeClr val="accent1"/>
+          </a:effectRef>
+          <a:fontRef idx="minor">
+            <a:schemeClr val="lt1"/>
+          </a:fontRef>
+        </p:style>
+        <p:txBody>
+          <a:bodyPr rtlCol="0" anchor="ctr"/>
+          <a:lstStyle/>
+          <a:p>
+            <a:pPr algn="ctr"/>
+          </a:p>
+        </p:txBody>
+      </p:sp>
+      <p:sp>
+        <p:nvSpPr>
+          <p:cNvPr id="24" name="Rectangle 23"/>
+          <p:cNvSpPr/>
+          <p:nvPr/>
+        </p:nvSpPr>
+        <p:spPr>
+          <a:xfrm>
+            <a:off x="548640" y="5760720"/>
+            <a:ext cx="64008" cy="603504"/>
           </a:xfrm>
           <a:prstGeom prst="rect">
             <a:avLst/>
@@ -8872,14 +11040,14 @@
       </p:sp>
       <p:sp>
         <p:nvSpPr>
-          <p:cNvPr id="7" name="TextBox 6"/>
-          <p:cNvSpPr txBox="1"/>
-          <p:nvPr/>
-        </p:nvSpPr>
-        <p:spPr>
-          <a:xfrm>
-            <a:off x="868680" y="1463040"/>
-            <a:ext cx="10515600" cy="694944"/>
+          <p:cNvPr id="25" name="TextBox 24"/>
+          <p:cNvSpPr txBox="1"/>
+          <p:nvPr/>
+        </p:nvSpPr>
+        <p:spPr>
+          <a:xfrm>
+            <a:off x="822960" y="5760720"/>
+            <a:ext cx="10543032" cy="603504"/>
           </a:xfrm>
           <a:prstGeom prst="rect">
             <a:avLst/>
@@ -8899,7 +11067,7 @@
                   <a:srgbClr val="C9A227"/>
                 </a:solidFill>
               </a:rPr>
-              <a:t>A 99% one-day VaR of ₹6,60,000 means this:  </a:t>
+              <a:t>The rule of thumb:  </a:t>
             </a:r>
             <a:r>
               <a:rPr sz="1200" b="0">
@@ -8907,702 +11075,14 @@
                   <a:srgbClr val="FFFFFF"/>
                 </a:solidFill>
               </a:rPr>
-              <a:t>on 99 days out of 100, we should lose less than ₹6,60,000. It says nothing about the hundredth day.</a:t>
-            </a:r>
-          </a:p>
-        </p:txBody>
-      </p:sp>
-      <p:sp>
-        <p:nvSpPr>
-          <p:cNvPr id="8" name="Rectangle 7"/>
-          <p:cNvSpPr/>
-          <p:nvPr/>
-        </p:nvSpPr>
-        <p:spPr>
-          <a:xfrm>
-            <a:off x="548640" y="2340864"/>
-            <a:ext cx="3611880" cy="2212848"/>
-          </a:xfrm>
-          <a:prstGeom prst="rect">
-            <a:avLst/>
-          </a:prstGeom>
-          <a:solidFill>
-            <a:srgbClr val="FFFFFF"/>
-          </a:solidFill>
-          <a:ln>
-            <a:noFill/>
-          </a:ln>
-          <a:effectLst/>
-        </p:spPr>
-        <p:style>
-          <a:lnRef idx="1">
-            <a:schemeClr val="accent1"/>
-          </a:lnRef>
-          <a:fillRef idx="3">
-            <a:schemeClr val="accent1"/>
-          </a:fillRef>
-          <a:effectRef idx="2">
-            <a:schemeClr val="accent1"/>
-          </a:effectRef>
-          <a:fontRef idx="minor">
-            <a:schemeClr val="lt1"/>
-          </a:fontRef>
-        </p:style>
-        <p:txBody>
-          <a:bodyPr rtlCol="0" anchor="ctr"/>
-          <a:lstStyle/>
-          <a:p>
-            <a:pPr algn="ctr"/>
-          </a:p>
-        </p:txBody>
-      </p:sp>
-      <p:sp>
-        <p:nvSpPr>
-          <p:cNvPr id="9" name="TextBox 8"/>
-          <p:cNvSpPr txBox="1"/>
-          <p:nvPr/>
-        </p:nvSpPr>
-        <p:spPr>
-          <a:xfrm>
-            <a:off x="804672" y="2542032"/>
-            <a:ext cx="3108960" cy="274320"/>
-          </a:xfrm>
-          <a:prstGeom prst="rect">
-            <a:avLst/>
-          </a:prstGeom>
-          <a:noFill/>
-        </p:spPr>
-        <p:txBody>
-          <a:bodyPr wrap="square" anchor="t" lIns="0" rIns="0" tIns="0" bIns="0">
-            <a:spAutoFit/>
-          </a:bodyPr>
-          <a:lstStyle/>
-          <a:p>
-            <a:pPr algn="l"/>
-            <a:r>
-              <a:rPr sz="1000" b="1">
-                <a:solidFill>
-                  <a:srgbClr val="3A5C9E"/>
-                </a:solidFill>
-              </a:rPr>
-              <a:t>HISTORICAL SIMULATION</a:t>
-            </a:r>
-          </a:p>
-        </p:txBody>
-      </p:sp>
-      <p:sp>
-        <p:nvSpPr>
-          <p:cNvPr id="10" name="TextBox 9"/>
-          <p:cNvSpPr txBox="1"/>
-          <p:nvPr/>
-        </p:nvSpPr>
-        <p:spPr>
-          <a:xfrm>
-            <a:off x="804672" y="2871216"/>
-            <a:ext cx="3108960" cy="566928"/>
-          </a:xfrm>
-          <a:prstGeom prst="rect">
-            <a:avLst/>
-          </a:prstGeom>
-          <a:noFill/>
-        </p:spPr>
-        <p:txBody>
-          <a:bodyPr wrap="square" anchor="t" lIns="0" rIns="0" tIns="0" bIns="0">
-            <a:spAutoFit/>
-          </a:bodyPr>
-          <a:lstStyle/>
-          <a:p>
-            <a:pPr algn="l"/>
-            <a:r>
-              <a:rPr sz="1100" b="1">
-                <a:solidFill>
-                  <a:srgbClr val="0F2145"/>
-                </a:solidFill>
-              </a:rPr>
-              <a:t>Replay the last 500 days that actually happened.</a:t>
-            </a:r>
-          </a:p>
-        </p:txBody>
-      </p:sp>
-      <p:sp>
-        <p:nvSpPr>
-          <p:cNvPr id="11" name="TextBox 10"/>
-          <p:cNvSpPr txBox="1"/>
-          <p:nvPr/>
-        </p:nvSpPr>
-        <p:spPr>
-          <a:xfrm>
-            <a:off x="804672" y="3529584"/>
-            <a:ext cx="3108960" cy="457200"/>
-          </a:xfrm>
-          <a:prstGeom prst="rect">
-            <a:avLst/>
-          </a:prstGeom>
-          <a:noFill/>
-        </p:spPr>
-        <p:txBody>
-          <a:bodyPr wrap="square" anchor="t" lIns="0" rIns="0" tIns="0" bIns="0">
-            <a:spAutoFit/>
-          </a:bodyPr>
-          <a:lstStyle/>
-          <a:p>
-            <a:pPr algn="l"/>
-            <a:r>
-              <a:rPr sz="1000" b="1">
-                <a:solidFill>
-                  <a:srgbClr val="C9A227"/>
-                </a:solidFill>
-              </a:rPr>
-              <a:t>+  </a:t>
-            </a:r>
-            <a:r>
-              <a:rPr sz="1000" b="0">
-                <a:solidFill>
-                  <a:srgbClr val="1B2A41"/>
-                </a:solidFill>
-              </a:rPr>
-              <a:t>Assumes nothing about the shape of returns.</a:t>
-            </a:r>
-          </a:p>
-        </p:txBody>
-      </p:sp>
-      <p:sp>
-        <p:nvSpPr>
-          <p:cNvPr id="12" name="TextBox 11"/>
-          <p:cNvSpPr txBox="1"/>
-          <p:nvPr/>
-        </p:nvSpPr>
-        <p:spPr>
-          <a:xfrm>
-            <a:off x="804672" y="4023360"/>
-            <a:ext cx="3108960" cy="457200"/>
-          </a:xfrm>
-          <a:prstGeom prst="rect">
-            <a:avLst/>
-          </a:prstGeom>
-          <a:noFill/>
-        </p:spPr>
-        <p:txBody>
-          <a:bodyPr wrap="square" anchor="t" lIns="0" rIns="0" tIns="0" bIns="0">
-            <a:spAutoFit/>
-          </a:bodyPr>
-          <a:lstStyle/>
-          <a:p>
-            <a:pPr algn="l"/>
-            <a:r>
-              <a:rPr sz="1000" b="1">
-                <a:solidFill>
-                  <a:srgbClr val="C9A227"/>
-                </a:solidFill>
-              </a:rPr>
-              <a:t>−  </a:t>
-            </a:r>
-            <a:r>
-              <a:rPr sz="1000" b="0">
-                <a:solidFill>
-                  <a:srgbClr val="5D6B7E"/>
-                </a:solidFill>
-              </a:rPr>
-              <a:t>You only ever see what already occurred.</a:t>
-            </a:r>
-          </a:p>
-        </p:txBody>
-      </p:sp>
-      <p:sp>
-        <p:nvSpPr>
-          <p:cNvPr id="13" name="Rectangle 12"/>
-          <p:cNvSpPr/>
-          <p:nvPr/>
-        </p:nvSpPr>
-        <p:spPr>
-          <a:xfrm>
-            <a:off x="4315968" y="2340864"/>
-            <a:ext cx="3611880" cy="2212848"/>
-          </a:xfrm>
-          <a:prstGeom prst="rect">
-            <a:avLst/>
-          </a:prstGeom>
-          <a:solidFill>
-            <a:srgbClr val="FFFFFF"/>
-          </a:solidFill>
-          <a:ln>
-            <a:noFill/>
-          </a:ln>
-          <a:effectLst/>
-        </p:spPr>
-        <p:style>
-          <a:lnRef idx="1">
-            <a:schemeClr val="accent1"/>
-          </a:lnRef>
-          <a:fillRef idx="3">
-            <a:schemeClr val="accent1"/>
-          </a:fillRef>
-          <a:effectRef idx="2">
-            <a:schemeClr val="accent1"/>
-          </a:effectRef>
-          <a:fontRef idx="minor">
-            <a:schemeClr val="lt1"/>
-          </a:fontRef>
-        </p:style>
-        <p:txBody>
-          <a:bodyPr rtlCol="0" anchor="ctr"/>
-          <a:lstStyle/>
-          <a:p>
-            <a:pPr algn="ctr"/>
-          </a:p>
-        </p:txBody>
-      </p:sp>
-      <p:sp>
-        <p:nvSpPr>
-          <p:cNvPr id="14" name="TextBox 13"/>
-          <p:cNvSpPr txBox="1"/>
-          <p:nvPr/>
-        </p:nvSpPr>
-        <p:spPr>
-          <a:xfrm>
-            <a:off x="4572000" y="2542032"/>
-            <a:ext cx="3108960" cy="274320"/>
-          </a:xfrm>
-          <a:prstGeom prst="rect">
-            <a:avLst/>
-          </a:prstGeom>
-          <a:noFill/>
-        </p:spPr>
-        <p:txBody>
-          <a:bodyPr wrap="square" anchor="t" lIns="0" rIns="0" tIns="0" bIns="0">
-            <a:spAutoFit/>
-          </a:bodyPr>
-          <a:lstStyle/>
-          <a:p>
-            <a:pPr algn="l"/>
-            <a:r>
-              <a:rPr sz="1000" b="1">
-                <a:solidFill>
-                  <a:srgbClr val="3A5C9E"/>
-                </a:solidFill>
-              </a:rPr>
-              <a:t>PARAMETRIC</a:t>
-            </a:r>
-          </a:p>
-        </p:txBody>
-      </p:sp>
-      <p:sp>
-        <p:nvSpPr>
-          <p:cNvPr id="15" name="TextBox 14"/>
-          <p:cNvSpPr txBox="1"/>
-          <p:nvPr/>
-        </p:nvSpPr>
-        <p:spPr>
-          <a:xfrm>
-            <a:off x="4572000" y="2871216"/>
-            <a:ext cx="3108960" cy="566928"/>
-          </a:xfrm>
-          <a:prstGeom prst="rect">
-            <a:avLst/>
-          </a:prstGeom>
-          <a:noFill/>
-        </p:spPr>
-        <p:txBody>
-          <a:bodyPr wrap="square" anchor="t" lIns="0" rIns="0" tIns="0" bIns="0">
-            <a:spAutoFit/>
-          </a:bodyPr>
-          <a:lstStyle/>
-          <a:p>
-            <a:pPr algn="l"/>
-            <a:r>
-              <a:rPr sz="1100" b="1">
-                <a:solidFill>
-                  <a:srgbClr val="0F2145"/>
-                </a:solidFill>
-              </a:rPr>
-              <a:t>Assume a normal curve and use one volatility number.</a:t>
-            </a:r>
-          </a:p>
-        </p:txBody>
-      </p:sp>
-      <p:sp>
-        <p:nvSpPr>
-          <p:cNvPr id="16" name="TextBox 15"/>
-          <p:cNvSpPr txBox="1"/>
-          <p:nvPr/>
-        </p:nvSpPr>
-        <p:spPr>
-          <a:xfrm>
-            <a:off x="4572000" y="3529584"/>
-            <a:ext cx="3108960" cy="457200"/>
-          </a:xfrm>
-          <a:prstGeom prst="rect">
-            <a:avLst/>
-          </a:prstGeom>
-          <a:noFill/>
-        </p:spPr>
-        <p:txBody>
-          <a:bodyPr wrap="square" anchor="t" lIns="0" rIns="0" tIns="0" bIns="0">
-            <a:spAutoFit/>
-          </a:bodyPr>
-          <a:lstStyle/>
-          <a:p>
-            <a:pPr algn="l"/>
-            <a:r>
-              <a:rPr sz="1000" b="1">
-                <a:solidFill>
-                  <a:srgbClr val="C9A227"/>
-                </a:solidFill>
-              </a:rPr>
-              <a:t>+  </a:t>
-            </a:r>
-            <a:r>
-              <a:rPr sz="1000" b="0">
-                <a:solidFill>
-                  <a:srgbClr val="1B2A41"/>
-                </a:solidFill>
-              </a:rPr>
-              <a:t>Fast, and you can do it in a spreadsheet.</a:t>
-            </a:r>
-          </a:p>
-        </p:txBody>
-      </p:sp>
-      <p:sp>
-        <p:nvSpPr>
-          <p:cNvPr id="17" name="TextBox 16"/>
-          <p:cNvSpPr txBox="1"/>
-          <p:nvPr/>
-        </p:nvSpPr>
-        <p:spPr>
-          <a:xfrm>
-            <a:off x="4572000" y="4023360"/>
-            <a:ext cx="3108960" cy="457200"/>
-          </a:xfrm>
-          <a:prstGeom prst="rect">
-            <a:avLst/>
-          </a:prstGeom>
-          <a:noFill/>
-        </p:spPr>
-        <p:txBody>
-          <a:bodyPr wrap="square" anchor="t" lIns="0" rIns="0" tIns="0" bIns="0">
-            <a:spAutoFit/>
-          </a:bodyPr>
-          <a:lstStyle/>
-          <a:p>
-            <a:pPr algn="l"/>
-            <a:r>
-              <a:rPr sz="1000" b="1">
-                <a:solidFill>
-                  <a:srgbClr val="C9A227"/>
-                </a:solidFill>
-              </a:rPr>
-              <a:t>−  </a:t>
-            </a:r>
-            <a:r>
-              <a:rPr sz="1000" b="0">
-                <a:solidFill>
-                  <a:srgbClr val="5D6B7E"/>
-                </a:solidFill>
-              </a:rPr>
-              <a:t>Real markets have fatter tails than normal.</a:t>
-            </a:r>
-          </a:p>
-        </p:txBody>
-      </p:sp>
-      <p:sp>
-        <p:nvSpPr>
-          <p:cNvPr id="18" name="Rectangle 17"/>
-          <p:cNvSpPr/>
-          <p:nvPr/>
-        </p:nvSpPr>
-        <p:spPr>
-          <a:xfrm>
-            <a:off x="8083296" y="2340864"/>
-            <a:ext cx="3611880" cy="2212848"/>
-          </a:xfrm>
-          <a:prstGeom prst="rect">
-            <a:avLst/>
-          </a:prstGeom>
-          <a:solidFill>
-            <a:srgbClr val="0F2145"/>
-          </a:solidFill>
-          <a:ln>
-            <a:noFill/>
-          </a:ln>
-          <a:effectLst/>
-        </p:spPr>
-        <p:style>
-          <a:lnRef idx="1">
-            <a:schemeClr val="accent1"/>
-          </a:lnRef>
-          <a:fillRef idx="3">
-            <a:schemeClr val="accent1"/>
-          </a:fillRef>
-          <a:effectRef idx="2">
-            <a:schemeClr val="accent1"/>
-          </a:effectRef>
-          <a:fontRef idx="minor">
-            <a:schemeClr val="lt1"/>
-          </a:fontRef>
-        </p:style>
-        <p:txBody>
-          <a:bodyPr rtlCol="0" anchor="ctr"/>
-          <a:lstStyle/>
-          <a:p>
-            <a:pPr algn="ctr"/>
-          </a:p>
-        </p:txBody>
-      </p:sp>
-      <p:sp>
-        <p:nvSpPr>
-          <p:cNvPr id="19" name="TextBox 18"/>
-          <p:cNvSpPr txBox="1"/>
-          <p:nvPr/>
-        </p:nvSpPr>
-        <p:spPr>
-          <a:xfrm>
-            <a:off x="8339327" y="2542032"/>
-            <a:ext cx="3108960" cy="274320"/>
-          </a:xfrm>
-          <a:prstGeom prst="rect">
-            <a:avLst/>
-          </a:prstGeom>
-          <a:noFill/>
-        </p:spPr>
-        <p:txBody>
-          <a:bodyPr wrap="square" anchor="t" lIns="0" rIns="0" tIns="0" bIns="0">
-            <a:spAutoFit/>
-          </a:bodyPr>
-          <a:lstStyle/>
-          <a:p>
-            <a:pPr algn="l"/>
-            <a:r>
-              <a:rPr sz="1000" b="1">
-                <a:solidFill>
-                  <a:srgbClr val="C9A227"/>
-                </a:solidFill>
-              </a:rPr>
-              <a:t>MONTE CARLO</a:t>
-            </a:r>
-          </a:p>
-        </p:txBody>
-      </p:sp>
-      <p:sp>
-        <p:nvSpPr>
-          <p:cNvPr id="20" name="TextBox 19"/>
-          <p:cNvSpPr txBox="1"/>
-          <p:nvPr/>
-        </p:nvSpPr>
-        <p:spPr>
-          <a:xfrm>
-            <a:off x="8339327" y="2871216"/>
-            <a:ext cx="3108960" cy="566928"/>
-          </a:xfrm>
-          <a:prstGeom prst="rect">
-            <a:avLst/>
-          </a:prstGeom>
-          <a:noFill/>
-        </p:spPr>
-        <p:txBody>
-          <a:bodyPr wrap="square" anchor="t" lIns="0" rIns="0" tIns="0" bIns="0">
-            <a:spAutoFit/>
-          </a:bodyPr>
-          <a:lstStyle/>
-          <a:p>
-            <a:pPr algn="l"/>
-            <a:r>
-              <a:rPr sz="1100" b="1">
-                <a:solidFill>
-                  <a:srgbClr val="FFFFFF"/>
-                </a:solidFill>
-              </a:rPr>
-              <a:t>Invent 10,000 tomorrows from volatility and correlation.</a:t>
-            </a:r>
-          </a:p>
-        </p:txBody>
-      </p:sp>
-      <p:sp>
-        <p:nvSpPr>
-          <p:cNvPr id="21" name="TextBox 20"/>
-          <p:cNvSpPr txBox="1"/>
-          <p:nvPr/>
-        </p:nvSpPr>
-        <p:spPr>
-          <a:xfrm>
-            <a:off x="8339327" y="3529584"/>
-            <a:ext cx="3108960" cy="457200"/>
-          </a:xfrm>
-          <a:prstGeom prst="rect">
-            <a:avLst/>
-          </a:prstGeom>
-          <a:noFill/>
-        </p:spPr>
-        <p:txBody>
-          <a:bodyPr wrap="square" anchor="t" lIns="0" rIns="0" tIns="0" bIns="0">
-            <a:spAutoFit/>
-          </a:bodyPr>
-          <a:lstStyle/>
-          <a:p>
-            <a:pPr algn="l"/>
-            <a:r>
-              <a:rPr sz="1000" b="1">
-                <a:solidFill>
-                  <a:srgbClr val="C9A227"/>
-                </a:solidFill>
-              </a:rPr>
-              <a:t>+  </a:t>
-            </a:r>
-            <a:r>
-              <a:rPr sz="1000" b="0">
-                <a:solidFill>
-                  <a:srgbClr val="C9D6EE"/>
-                </a:solidFill>
-              </a:rPr>
-              <a:t>Handles many assets and odd payoffs.</a:t>
-            </a:r>
-          </a:p>
-        </p:txBody>
-      </p:sp>
-      <p:sp>
-        <p:nvSpPr>
-          <p:cNvPr id="22" name="TextBox 21"/>
-          <p:cNvSpPr txBox="1"/>
-          <p:nvPr/>
-        </p:nvSpPr>
-        <p:spPr>
-          <a:xfrm>
-            <a:off x="8339327" y="4023360"/>
-            <a:ext cx="3108960" cy="457200"/>
-          </a:xfrm>
-          <a:prstGeom prst="rect">
-            <a:avLst/>
-          </a:prstGeom>
-          <a:noFill/>
-        </p:spPr>
-        <p:txBody>
-          <a:bodyPr wrap="square" anchor="t" lIns="0" rIns="0" tIns="0" bIns="0">
-            <a:spAutoFit/>
-          </a:bodyPr>
-          <a:lstStyle/>
-          <a:p>
-            <a:pPr algn="l"/>
-            <a:r>
-              <a:rPr sz="1000" b="1">
-                <a:solidFill>
-                  <a:srgbClr val="C9A227"/>
-                </a:solidFill>
-              </a:rPr>
-              <a:t>−  </a:t>
-            </a:r>
-            <a:r>
-              <a:rPr sz="1000" b="0">
-                <a:solidFill>
-                  <a:srgbClr val="C9D6EE"/>
-                </a:solidFill>
-              </a:rPr>
-              <a:t>Only as good as the assumptions you fed it.</a:t>
-            </a:r>
-          </a:p>
-        </p:txBody>
-      </p:sp>
-      <p:sp>
-        <p:nvSpPr>
-          <p:cNvPr id="23" name="TextBox 22"/>
-          <p:cNvSpPr txBox="1"/>
-          <p:nvPr/>
-        </p:nvSpPr>
-        <p:spPr>
-          <a:xfrm>
-            <a:off x="548640" y="4718304"/>
-            <a:ext cx="5486400" cy="1005840"/>
-          </a:xfrm>
-          <a:prstGeom prst="rect">
-            <a:avLst/>
-          </a:prstGeom>
-          <a:noFill/>
-        </p:spPr>
-        <p:txBody>
-          <a:bodyPr wrap="square" anchor="t" lIns="0" rIns="0" tIns="0" bIns="0">
-            <a:spAutoFit/>
-          </a:bodyPr>
-          <a:lstStyle/>
-          <a:p>
-            <a:pPr algn="l"/>
-            <a:r>
-              <a:rPr sz="1500" b="1">
-                <a:solidFill>
-                  <a:srgbClr val="0F2145"/>
-                </a:solidFill>
-                <a:latin typeface="Georgia"/>
-              </a:rPr>
-              <a:t>CVaR, the question VaR ducks</a:t>
-            </a:r>
-          </a:p>
-          <a:p>
-            <a:pPr algn="l">
-              <a:spcBef>
-                <a:spcPts val="600"/>
-              </a:spcBef>
-            </a:pPr>
-            <a:r>
-              <a:rPr sz="1100" b="0">
-                <a:solidFill>
-                  <a:srgbClr val="1B2A41"/>
-                </a:solidFill>
-              </a:rPr>
-              <a:t>VaR tells you the edge of the bad 1%. CVaR tells you the average loss once you are inside it. VaR says ₹6.6 lakh; CVaR might say ₹9.4 lakh.</a:t>
-            </a:r>
-          </a:p>
-        </p:txBody>
-      </p:sp>
-      <p:sp>
-        <p:nvSpPr>
-          <p:cNvPr id="24" name="TextBox 23"/>
-          <p:cNvSpPr txBox="1"/>
-          <p:nvPr/>
-        </p:nvSpPr>
-        <p:spPr>
-          <a:xfrm>
-            <a:off x="6309360" y="4718304"/>
-            <a:ext cx="5330952" cy="1005840"/>
-          </a:xfrm>
-          <a:prstGeom prst="rect">
-            <a:avLst/>
-          </a:prstGeom>
-          <a:noFill/>
-        </p:spPr>
-        <p:txBody>
-          <a:bodyPr wrap="square" anchor="t" lIns="0" rIns="0" tIns="0" bIns="0">
-            <a:spAutoFit/>
-          </a:bodyPr>
-          <a:lstStyle/>
-          <a:p>
-            <a:pPr algn="l"/>
-            <a:r>
-              <a:rPr sz="1500" b="1">
-                <a:solidFill>
-                  <a:srgbClr val="0F2145"/>
-                </a:solidFill>
-                <a:latin typeface="Georgia"/>
-              </a:rPr>
-              <a:t>Basel III asks for both levels</a:t>
-            </a:r>
-          </a:p>
-          <a:p>
-            <a:pPr algn="l">
-              <a:spcBef>
-                <a:spcPts val="600"/>
-              </a:spcBef>
-            </a:pPr>
-            <a:r>
-              <a:rPr sz="1100" b="0">
-                <a:solidFill>
-                  <a:srgbClr val="1B2A41"/>
-                </a:solidFill>
-              </a:rPr>
-              <a:t>95% and 99% are the thresholds you report. Run all three methods on the same portfolio and you get three different answers. That gap is the lesson.</a:t>
-            </a:r>
-          </a:p>
-        </p:txBody>
-      </p:sp>
-      <p:sp>
-        <p:nvSpPr>
-          <p:cNvPr id="25" name="TextBox 24"/>
+              <a:t>the newer the model, the better it predicts and the harder it is to defend to the person you just declined.</a:t>
+            </a:r>
+          </a:p>
+        </p:txBody>
+      </p:sp>
+      <p:sp>
+        <p:nvSpPr>
+          <p:cNvPr id="26" name="TextBox 25"/>
           <p:cNvSpPr txBox="1"/>
           <p:nvPr/>
         </p:nvSpPr>
@@ -9636,7 +11116,7 @@
       </p:sp>
       <p:sp>
         <p:nvSpPr>
-          <p:cNvPr id="26" name="TextBox 25"/>
+          <p:cNvPr id="27" name="TextBox 26"/>
           <p:cNvSpPr txBox="1"/>
           <p:nvPr/>
         </p:nvSpPr>
@@ -9767,7 +11247,7 @@
                   <a:srgbClr val="C9A227"/>
                 </a:solidFill>
               </a:rPr>
-              <a:t>HOUR 3 · THE LAB</a:t>
+              <a:t>HOUR 1 · DOES IT WORK, AND CAN YOU EXPLAIN IT?</a:t>
             </a:r>
           </a:p>
         </p:txBody>
@@ -9802,27 +11282,61 @@
                 </a:solidFill>
                 <a:latin typeface="Georgia"/>
               </a:rPr>
-              <a:t>Build it, compare it, then test it</a:t>
-            </a:r>
-          </a:p>
-        </p:txBody>
-      </p:sp>
-      <p:sp>
-        <p:nvSpPr>
-          <p:cNvPr id="5" name="Rectangle 4"/>
+              <a:t>Three checks on the model, one check on the decision</a:t>
+            </a:r>
+          </a:p>
+        </p:txBody>
+      </p:sp>
+      <p:sp>
+        <p:nvSpPr>
+          <p:cNvPr id="5" name="TextBox 4"/>
+          <p:cNvSpPr txBox="1"/>
+          <p:nvPr/>
+        </p:nvSpPr>
+        <p:spPr>
+          <a:xfrm>
+            <a:off x="548640" y="1426464"/>
+            <a:ext cx="11091672" cy="292608"/>
+          </a:xfrm>
+          <a:prstGeom prst="rect">
+            <a:avLst/>
+          </a:prstGeom>
+          <a:noFill/>
+        </p:spPr>
+        <p:txBody>
+          <a:bodyPr wrap="square" anchor="t" lIns="0" rIns="0" tIns="0" bIns="0">
+            <a:spAutoFit/>
+          </a:bodyPr>
+          <a:lstStyle/>
+          <a:p>
+            <a:pPr algn="l"/>
+            <a:r>
+              <a:rPr sz="1200" b="0">
+                <a:solidFill>
+                  <a:srgbClr val="5D6B7E"/>
+                </a:solidFill>
+              </a:rPr>
+              <a:t>Take 1,000 borrowers. Fifty of them defaulted. Here is how you find out whether the model saw them coming.</a:t>
+            </a:r>
+          </a:p>
+        </p:txBody>
+      </p:sp>
+      <p:sp>
+        <p:nvSpPr>
+          <p:cNvPr id="6" name="Rectangle 5"/>
           <p:cNvSpPr/>
           <p:nvPr/>
         </p:nvSpPr>
         <p:spPr>
           <a:xfrm>
-            <a:off x="548640" y="1444752"/>
-            <a:ext cx="11091672" cy="621792"/>
+            <a:off x="548640" y="1792224"/>
+            <a:ext cx="3611880" cy="2011680"/>
           </a:xfrm>
           <a:prstGeom prst="rect">
             <a:avLst/>
           </a:prstGeom>
           <a:solidFill>
-            <a:srgbClr val="0B1936"/>
+            <a:srgbClr val="FFFFFF"/>
           </a:solidFill>
           <a:ln>
             <a:noFill/>
@@ -9853,14 +11367,14 @@
       </p:sp>
       <p:sp>
         <p:nvSpPr>
-          <p:cNvPr id="6" name="Rectangle 5"/>
+          <p:cNvPr id="7" name="Rectangle 6"/>
           <p:cNvSpPr/>
           <p:nvPr/>
         </p:nvSpPr>
         <p:spPr>
           <a:xfrm>
-            <a:off x="548640" y="1444752"/>
-            <a:ext cx="64008" cy="621792"/>
+            <a:off x="548640" y="1792224"/>
+            <a:ext cx="3611880" cy="45720"/>
           </a:xfrm>
           <a:prstGeom prst="rect">
             <a:avLst/>
@@ -9897,64 +11411,117 @@
       </p:sp>
       <p:sp>
         <p:nvSpPr>
-          <p:cNvPr id="7" name="TextBox 6"/>
-          <p:cNvSpPr txBox="1"/>
-          <p:nvPr/>
-        </p:nvSpPr>
-        <p:spPr>
-          <a:xfrm>
-            <a:off x="868680" y="1444752"/>
-            <a:ext cx="10515600" cy="621792"/>
-          </a:xfrm>
-          <a:prstGeom prst="rect">
-            <a:avLst/>
-          </a:prstGeom>
-          <a:noFill/>
-        </p:spPr>
-        <p:txBody>
-          <a:bodyPr wrap="square" anchor="ctr" lIns="0" rIns="0" tIns="0" bIns="0">
-            <a:spAutoFit/>
-          </a:bodyPr>
-          <a:lstStyle/>
-          <a:p>
-            <a:pPr algn="l"/>
-            <a:r>
-              <a:rPr sz="850" b="1">
-                <a:solidFill>
-                  <a:srgbClr val="C9A227"/>
-                </a:solidFill>
-              </a:rPr>
-              <a:t>THE SENTENCE WE TYPE</a:t>
-            </a:r>
-          </a:p>
-          <a:p>
-            <a:pPr algn="l">
-              <a:spcBef>
-                <a:spcPts val="200"/>
-              </a:spcBef>
-            </a:pPr>
-            <a:r>
-              <a:rPr sz="1300" b="1">
-                <a:solidFill>
-                  <a:srgbClr val="FFFFFF"/>
+          <p:cNvPr id="8" name="TextBox 7"/>
+          <p:cNvSpPr txBox="1"/>
+          <p:nvPr/>
+        </p:nvSpPr>
+        <p:spPr>
+          <a:xfrm>
+            <a:off x="804672" y="2011680"/>
+            <a:ext cx="2011680" cy="292608"/>
+          </a:xfrm>
+          <a:prstGeom prst="rect">
+            <a:avLst/>
+          </a:prstGeom>
+          <a:noFill/>
+        </p:spPr>
+        <p:txBody>
+          <a:bodyPr wrap="square" anchor="t" lIns="0" rIns="0" tIns="0" bIns="0">
+            <a:spAutoFit/>
+          </a:bodyPr>
+          <a:lstStyle/>
+          <a:p>
+            <a:pPr algn="l"/>
+            <a:r>
+              <a:rPr sz="1000" b="1">
+                <a:solidFill>
+                  <a:srgbClr val="3A5C9E"/>
+                </a:solidFill>
+              </a:rPr>
+              <a:t>AUC-ROC</a:t>
+            </a:r>
+          </a:p>
+        </p:txBody>
+      </p:sp>
+      <p:sp>
+        <p:nvSpPr>
+          <p:cNvPr id="9" name="TextBox 8"/>
+          <p:cNvSpPr txBox="1"/>
+          <p:nvPr/>
+        </p:nvSpPr>
+        <p:spPr>
+          <a:xfrm>
+            <a:off x="2971800" y="1938528"/>
+            <a:ext cx="960120" cy="402336"/>
+          </a:xfrm>
+          <a:prstGeom prst="rect">
+            <a:avLst/>
+          </a:prstGeom>
+          <a:noFill/>
+        </p:spPr>
+        <p:txBody>
+          <a:bodyPr wrap="square" anchor="t" lIns="0" rIns="0" tIns="0" bIns="0">
+            <a:spAutoFit/>
+          </a:bodyPr>
+          <a:lstStyle/>
+          <a:p>
+            <a:pPr algn="r"/>
+            <a:r>
+              <a:rPr sz="2000" b="1">
+                <a:solidFill>
+                  <a:srgbClr val="0F2145"/>
                 </a:solidFill>
                 <a:latin typeface="Georgia"/>
               </a:rPr>
-              <a:t>“Build a Monte Carlo VaR engine for five NSE stocks, run 10,000 paths, and give me 95% and 99% VaR and CVaR.”</a:t>
-            </a:r>
-          </a:p>
-        </p:txBody>
-      </p:sp>
-      <p:sp>
-        <p:nvSpPr>
-          <p:cNvPr id="8" name="Rectangle 7"/>
+              <a:t>0.78</a:t>
+            </a:r>
+          </a:p>
+        </p:txBody>
+      </p:sp>
+      <p:sp>
+        <p:nvSpPr>
+          <p:cNvPr id="10" name="TextBox 9"/>
+          <p:cNvSpPr txBox="1"/>
+          <p:nvPr/>
+        </p:nvSpPr>
+        <p:spPr>
+          <a:xfrm>
+            <a:off x="804672" y="2432304"/>
+            <a:ext cx="3099816" cy="1188720"/>
+          </a:xfrm>
+          <a:prstGeom prst="rect">
+            <a:avLst/>
+          </a:prstGeom>
+          <a:noFill/>
+        </p:spPr>
+        <p:txBody>
+          <a:bodyPr wrap="square" anchor="t" lIns="0" rIns="0" tIns="0" bIns="0">
+            <a:spAutoFit/>
+          </a:bodyPr>
+          <a:lstStyle/>
+          <a:p>
+            <a:pPr algn="l"/>
+            <a:r>
+              <a:rPr sz="1000" b="0">
+                <a:solidFill>
+                  <a:srgbClr val="1B2A41"/>
+                </a:solidFill>
+              </a:rPr>
+              <a:t>Pick one borrower who defaulted and one who did not, at random. AUC is how often the model gave the defaulter the higher risk score. Half is a coin flip. A real working model sits near 0.78.</a:t>
+            </a:r>
+          </a:p>
+        </p:txBody>
+      </p:sp>
+      <p:sp>
+        <p:nvSpPr>
+          <p:cNvPr id="11" name="Rectangle 10"/>
           <p:cNvSpPr/>
           <p:nvPr/>
         </p:nvSpPr>
         <p:spPr>
           <a:xfrm>
-            <a:off x="548640" y="2212848"/>
-            <a:ext cx="3611880" cy="3054096"/>
+            <a:off x="4315968" y="1792224"/>
+            <a:ext cx="3611880" cy="2011680"/>
           </a:xfrm>
           <a:prstGeom prst="rect">
             <a:avLst/>
@@ -9991,251 +11558,161 @@
       </p:sp>
       <p:sp>
         <p:nvSpPr>
-          <p:cNvPr id="9" name="TextBox 8"/>
-          <p:cNvSpPr txBox="1"/>
-          <p:nvPr/>
-        </p:nvSpPr>
-        <p:spPr>
-          <a:xfrm>
-            <a:off x="804672" y="2414016"/>
-            <a:ext cx="3099816" cy="274320"/>
-          </a:xfrm>
-          <a:prstGeom prst="rect">
-            <a:avLst/>
-          </a:prstGeom>
-          <a:noFill/>
-        </p:spPr>
-        <p:txBody>
-          <a:bodyPr wrap="square" anchor="t" lIns="0" rIns="0" tIns="0" bIns="0">
-            <a:spAutoFit/>
-          </a:bodyPr>
-          <a:lstStyle/>
-          <a:p>
-            <a:pPr algn="l"/>
-            <a:r>
-              <a:rPr sz="950" b="1">
+          <p:cNvPr id="12" name="Rectangle 11"/>
+          <p:cNvSpPr/>
+          <p:nvPr/>
+        </p:nvSpPr>
+        <p:spPr>
+          <a:xfrm>
+            <a:off x="4315968" y="1792224"/>
+            <a:ext cx="3611880" cy="45720"/>
+          </a:xfrm>
+          <a:prstGeom prst="rect">
+            <a:avLst/>
+          </a:prstGeom>
+          <a:solidFill>
+            <a:srgbClr val="C9A227"/>
+          </a:solidFill>
+          <a:ln>
+            <a:noFill/>
+          </a:ln>
+          <a:effectLst/>
+        </p:spPr>
+        <p:style>
+          <a:lnRef idx="1">
+            <a:schemeClr val="accent1"/>
+          </a:lnRef>
+          <a:fillRef idx="3">
+            <a:schemeClr val="accent1"/>
+          </a:fillRef>
+          <a:effectRef idx="2">
+            <a:schemeClr val="accent1"/>
+          </a:effectRef>
+          <a:fontRef idx="minor">
+            <a:schemeClr val="lt1"/>
+          </a:fontRef>
+        </p:style>
+        <p:txBody>
+          <a:bodyPr rtlCol="0" anchor="ctr"/>
+          <a:lstStyle/>
+          <a:p>
+            <a:pPr algn="ctr"/>
+          </a:p>
+        </p:txBody>
+      </p:sp>
+      <p:sp>
+        <p:nvSpPr>
+          <p:cNvPr id="13" name="TextBox 12"/>
+          <p:cNvSpPr txBox="1"/>
+          <p:nvPr/>
+        </p:nvSpPr>
+        <p:spPr>
+          <a:xfrm>
+            <a:off x="4572000" y="2011680"/>
+            <a:ext cx="2011680" cy="292608"/>
+          </a:xfrm>
+          <a:prstGeom prst="rect">
+            <a:avLst/>
+          </a:prstGeom>
+          <a:noFill/>
+        </p:spPr>
+        <p:txBody>
+          <a:bodyPr wrap="square" anchor="t" lIns="0" rIns="0" tIns="0" bIns="0">
+            <a:spAutoFit/>
+          </a:bodyPr>
+          <a:lstStyle/>
+          <a:p>
+            <a:pPr algn="l"/>
+            <a:r>
+              <a:rPr sz="1000" b="1">
                 <a:solidFill>
                   <a:srgbClr val="3A5C9E"/>
                 </a:solidFill>
               </a:rPr>
-              <a:t>PART A  ·  35 MIN</a:t>
-            </a:r>
-          </a:p>
-        </p:txBody>
-      </p:sp>
-      <p:sp>
-        <p:nvSpPr>
-          <p:cNvPr id="10" name="TextBox 9"/>
-          <p:cNvSpPr txBox="1"/>
-          <p:nvPr/>
-        </p:nvSpPr>
-        <p:spPr>
-          <a:xfrm>
-            <a:off x="804672" y="2724912"/>
-            <a:ext cx="3099816" cy="402336"/>
-          </a:xfrm>
-          <a:prstGeom prst="rect">
-            <a:avLst/>
-          </a:prstGeom>
-          <a:noFill/>
-        </p:spPr>
-        <p:txBody>
-          <a:bodyPr wrap="square" anchor="t" lIns="0" rIns="0" tIns="0" bIns="0">
-            <a:spAutoFit/>
-          </a:bodyPr>
-          <a:lstStyle/>
-          <a:p>
-            <a:pPr algn="l"/>
-            <a:r>
-              <a:rPr sz="1700" b="1">
+              <a:t>GINI</a:t>
+            </a:r>
+          </a:p>
+        </p:txBody>
+      </p:sp>
+      <p:sp>
+        <p:nvSpPr>
+          <p:cNvPr id="14" name="TextBox 13"/>
+          <p:cNvSpPr txBox="1"/>
+          <p:nvPr/>
+        </p:nvSpPr>
+        <p:spPr>
+          <a:xfrm>
+            <a:off x="6739128" y="1938528"/>
+            <a:ext cx="960120" cy="402336"/>
+          </a:xfrm>
+          <a:prstGeom prst="rect">
+            <a:avLst/>
+          </a:prstGeom>
+          <a:noFill/>
+        </p:spPr>
+        <p:txBody>
+          <a:bodyPr wrap="square" anchor="t" lIns="0" rIns="0" tIns="0" bIns="0">
+            <a:spAutoFit/>
+          </a:bodyPr>
+          <a:lstStyle/>
+          <a:p>
+            <a:pPr algn="r"/>
+            <a:r>
+              <a:rPr sz="2000" b="1">
                 <a:solidFill>
                   <a:srgbClr val="0F2145"/>
                 </a:solidFill>
                 <a:latin typeface="Georgia"/>
               </a:rPr>
-              <a:t>Build it</a:t>
-            </a:r>
-          </a:p>
-        </p:txBody>
-      </p:sp>
-      <p:sp>
-        <p:nvSpPr>
-          <p:cNvPr id="11" name="TextBox 10"/>
-          <p:cNvSpPr txBox="1"/>
-          <p:nvPr/>
-        </p:nvSpPr>
-        <p:spPr>
-          <a:xfrm>
-            <a:off x="804672" y="3255264"/>
-            <a:ext cx="3099816" cy="493776"/>
-          </a:xfrm>
-          <a:prstGeom prst="rect">
-            <a:avLst/>
-          </a:prstGeom>
-          <a:noFill/>
-        </p:spPr>
-        <p:txBody>
-          <a:bodyPr wrap="square" anchor="t" lIns="0" rIns="0" tIns="0" bIns="0">
-            <a:spAutoFit/>
-          </a:bodyPr>
-          <a:lstStyle/>
-          <a:p>
-            <a:pPr algn="l"/>
-            <a:r>
-              <a:rPr sz="1000" b="1">
-                <a:solidFill>
-                  <a:srgbClr val="C9A227"/>
-                </a:solidFill>
-              </a:rPr>
-              <a:t>▪  </a:t>
-            </a:r>
+              <a:t>0.56</a:t>
+            </a:r>
+          </a:p>
+        </p:txBody>
+      </p:sp>
+      <p:sp>
+        <p:nvSpPr>
+          <p:cNvPr id="15" name="TextBox 14"/>
+          <p:cNvSpPr txBox="1"/>
+          <p:nvPr/>
+        </p:nvSpPr>
+        <p:spPr>
+          <a:xfrm>
+            <a:off x="4572000" y="2432304"/>
+            <a:ext cx="3099816" cy="1188720"/>
+          </a:xfrm>
+          <a:prstGeom prst="rect">
+            <a:avLst/>
+          </a:prstGeom>
+          <a:noFill/>
+        </p:spPr>
+        <p:txBody>
+          <a:bodyPr wrap="square" anchor="t" lIns="0" rIns="0" tIns="0" bIns="0">
+            <a:spAutoFit/>
+          </a:bodyPr>
+          <a:lstStyle/>
+          <a:p>
+            <a:pPr algn="l"/>
             <a:r>
               <a:rPr sz="1000" b="0">
                 <a:solidFill>
                   <a:srgbClr val="1B2A41"/>
                 </a:solidFill>
               </a:rPr>
-              <a:t>Five NSE stocks, two years of daily returns</a:t>
-            </a:r>
-          </a:p>
-        </p:txBody>
-      </p:sp>
-      <p:sp>
-        <p:nvSpPr>
-          <p:cNvPr id="12" name="TextBox 11"/>
-          <p:cNvSpPr txBox="1"/>
-          <p:nvPr/>
-        </p:nvSpPr>
-        <p:spPr>
-          <a:xfrm>
-            <a:off x="804672" y="3767328"/>
-            <a:ext cx="3099816" cy="493776"/>
-          </a:xfrm>
-          <a:prstGeom prst="rect">
-            <a:avLst/>
-          </a:prstGeom>
-          <a:noFill/>
-        </p:spPr>
-        <p:txBody>
-          <a:bodyPr wrap="square" anchor="t" lIns="0" rIns="0" tIns="0" bIns="0">
-            <a:spAutoFit/>
-          </a:bodyPr>
-          <a:lstStyle/>
-          <a:p>
-            <a:pPr algn="l"/>
-            <a:r>
-              <a:rPr sz="1000" b="1">
-                <a:solidFill>
-                  <a:srgbClr val="C9A227"/>
-                </a:solidFill>
-              </a:rPr>
-              <a:t>▪  </a:t>
-            </a:r>
-            <a:r>
-              <a:rPr sz="1000" b="0">
-                <a:solidFill>
-                  <a:srgbClr val="1B2A41"/>
-                </a:solidFill>
-              </a:rPr>
-              <a:t>Each stock's volatility, and how the five move together</a:t>
-            </a:r>
-          </a:p>
-        </p:txBody>
-      </p:sp>
-      <p:sp>
-        <p:nvSpPr>
-          <p:cNvPr id="13" name="TextBox 12"/>
-          <p:cNvSpPr txBox="1"/>
-          <p:nvPr/>
-        </p:nvSpPr>
-        <p:spPr>
-          <a:xfrm>
-            <a:off x="804672" y="4279392"/>
-            <a:ext cx="3099816" cy="493776"/>
-          </a:xfrm>
-          <a:prstGeom prst="rect">
-            <a:avLst/>
-          </a:prstGeom>
-          <a:noFill/>
-        </p:spPr>
-        <p:txBody>
-          <a:bodyPr wrap="square" anchor="t" lIns="0" rIns="0" tIns="0" bIns="0">
-            <a:spAutoFit/>
-          </a:bodyPr>
-          <a:lstStyle/>
-          <a:p>
-            <a:pPr algn="l"/>
-            <a:r>
-              <a:rPr sz="1000" b="1">
-                <a:solidFill>
-                  <a:srgbClr val="C9A227"/>
-                </a:solidFill>
-              </a:rPr>
-              <a:t>▪  </a:t>
-            </a:r>
-            <a:r>
-              <a:rPr sz="1000" b="0">
-                <a:solidFill>
-                  <a:srgbClr val="1B2A41"/>
-                </a:solidFill>
-              </a:rPr>
-              <a:t>Ten thousand simulated tomorrows</a:t>
-            </a:r>
-          </a:p>
-        </p:txBody>
-      </p:sp>
-      <p:sp>
-        <p:nvSpPr>
-          <p:cNvPr id="14" name="TextBox 13"/>
-          <p:cNvSpPr txBox="1"/>
-          <p:nvPr/>
-        </p:nvSpPr>
-        <p:spPr>
-          <a:xfrm>
-            <a:off x="804672" y="4791456"/>
-            <a:ext cx="3099816" cy="493776"/>
-          </a:xfrm>
-          <a:prstGeom prst="rect">
-            <a:avLst/>
-          </a:prstGeom>
-          <a:noFill/>
-        </p:spPr>
-        <p:txBody>
-          <a:bodyPr wrap="square" anchor="t" lIns="0" rIns="0" tIns="0" bIns="0">
-            <a:spAutoFit/>
-          </a:bodyPr>
-          <a:lstStyle/>
-          <a:p>
-            <a:pPr algn="l"/>
-            <a:r>
-              <a:rPr sz="1000" b="1">
-                <a:solidFill>
-                  <a:srgbClr val="C9A227"/>
-                </a:solidFill>
-              </a:rPr>
-              <a:t>▪  </a:t>
-            </a:r>
-            <a:r>
-              <a:rPr sz="1000" b="0">
-                <a:solidFill>
-                  <a:srgbClr val="1B2A41"/>
-                </a:solidFill>
-              </a:rPr>
-              <a:t>Sort them: the 100th worst is your 99% VaR, and the tail past it is CVaR</a:t>
-            </a:r>
-          </a:p>
-        </p:txBody>
-      </p:sp>
-      <p:sp>
-        <p:nvSpPr>
-          <p:cNvPr id="15" name="Rectangle 14"/>
+              <a:t>The same fact on the scale banks prefer: Gini = 2 × AUC − 1. An AUC of 0.78 is a Gini of 0.56. If somebody quotes you one, you can compute the other.</a:t>
+            </a:r>
+          </a:p>
+        </p:txBody>
+      </p:sp>
+      <p:sp>
+        <p:nvSpPr>
+          <p:cNvPr id="16" name="Rectangle 15"/>
           <p:cNvSpPr/>
           <p:nvPr/>
         </p:nvSpPr>
         <p:spPr>
           <a:xfrm>
-            <a:off x="4315968" y="2212848"/>
-            <a:ext cx="3611880" cy="3054096"/>
+            <a:off x="8083296" y="1792224"/>
+            <a:ext cx="3557016" cy="2011680"/>
           </a:xfrm>
           <a:prstGeom prst="rect">
             <a:avLst/>
@@ -10272,251 +11749,161 @@
       </p:sp>
       <p:sp>
         <p:nvSpPr>
-          <p:cNvPr id="16" name="TextBox 15"/>
-          <p:cNvSpPr txBox="1"/>
-          <p:nvPr/>
-        </p:nvSpPr>
-        <p:spPr>
-          <a:xfrm>
-            <a:off x="4572000" y="2414016"/>
-            <a:ext cx="3099816" cy="274320"/>
-          </a:xfrm>
-          <a:prstGeom prst="rect">
-            <a:avLst/>
-          </a:prstGeom>
-          <a:noFill/>
-        </p:spPr>
-        <p:txBody>
-          <a:bodyPr wrap="square" anchor="t" lIns="0" rIns="0" tIns="0" bIns="0">
-            <a:spAutoFit/>
-          </a:bodyPr>
-          <a:lstStyle/>
-          <a:p>
-            <a:pPr algn="l"/>
-            <a:r>
-              <a:rPr sz="950" b="1">
+          <p:cNvPr id="17" name="Rectangle 16"/>
+          <p:cNvSpPr/>
+          <p:nvPr/>
+        </p:nvSpPr>
+        <p:spPr>
+          <a:xfrm>
+            <a:off x="8083296" y="1792224"/>
+            <a:ext cx="3557016" cy="45720"/>
+          </a:xfrm>
+          <a:prstGeom prst="rect">
+            <a:avLst/>
+          </a:prstGeom>
+          <a:solidFill>
+            <a:srgbClr val="C9A227"/>
+          </a:solidFill>
+          <a:ln>
+            <a:noFill/>
+          </a:ln>
+          <a:effectLst/>
+        </p:spPr>
+        <p:style>
+          <a:lnRef idx="1">
+            <a:schemeClr val="accent1"/>
+          </a:lnRef>
+          <a:fillRef idx="3">
+            <a:schemeClr val="accent1"/>
+          </a:fillRef>
+          <a:effectRef idx="2">
+            <a:schemeClr val="accent1"/>
+          </a:effectRef>
+          <a:fontRef idx="minor">
+            <a:schemeClr val="lt1"/>
+          </a:fontRef>
+        </p:style>
+        <p:txBody>
+          <a:bodyPr rtlCol="0" anchor="ctr"/>
+          <a:lstStyle/>
+          <a:p>
+            <a:pPr algn="ctr"/>
+          </a:p>
+        </p:txBody>
+      </p:sp>
+      <p:sp>
+        <p:nvSpPr>
+          <p:cNvPr id="18" name="TextBox 17"/>
+          <p:cNvSpPr txBox="1"/>
+          <p:nvPr/>
+        </p:nvSpPr>
+        <p:spPr>
+          <a:xfrm>
+            <a:off x="8339327" y="2011680"/>
+            <a:ext cx="2011680" cy="292608"/>
+          </a:xfrm>
+          <a:prstGeom prst="rect">
+            <a:avLst/>
+          </a:prstGeom>
+          <a:noFill/>
+        </p:spPr>
+        <p:txBody>
+          <a:bodyPr wrap="square" anchor="t" lIns="0" rIns="0" tIns="0" bIns="0">
+            <a:spAutoFit/>
+          </a:bodyPr>
+          <a:lstStyle/>
+          <a:p>
+            <a:pPr algn="l"/>
+            <a:r>
+              <a:rPr sz="1000" b="1">
                 <a:solidFill>
                   <a:srgbClr val="3A5C9E"/>
                 </a:solidFill>
               </a:rPr>
-              <a:t>PART B  ·  10 MIN</a:t>
-            </a:r>
-          </a:p>
-        </p:txBody>
-      </p:sp>
-      <p:sp>
-        <p:nvSpPr>
-          <p:cNvPr id="17" name="TextBox 16"/>
-          <p:cNvSpPr txBox="1"/>
-          <p:nvPr/>
-        </p:nvSpPr>
-        <p:spPr>
-          <a:xfrm>
-            <a:off x="4572000" y="2724912"/>
-            <a:ext cx="3099816" cy="402336"/>
-          </a:xfrm>
-          <a:prstGeom prst="rect">
-            <a:avLst/>
-          </a:prstGeom>
-          <a:noFill/>
-        </p:spPr>
-        <p:txBody>
-          <a:bodyPr wrap="square" anchor="t" lIns="0" rIns="0" tIns="0" bIns="0">
-            <a:spAutoFit/>
-          </a:bodyPr>
-          <a:lstStyle/>
-          <a:p>
-            <a:pPr algn="l"/>
-            <a:r>
-              <a:rPr sz="1700" b="1">
+              <a:t>KS STATISTIC</a:t>
+            </a:r>
+          </a:p>
+        </p:txBody>
+      </p:sp>
+      <p:sp>
+        <p:nvSpPr>
+          <p:cNvPr id="19" name="TextBox 18"/>
+          <p:cNvSpPr txBox="1"/>
+          <p:nvPr/>
+        </p:nvSpPr>
+        <p:spPr>
+          <a:xfrm>
+            <a:off x="10451592" y="1938528"/>
+            <a:ext cx="960120" cy="402336"/>
+          </a:xfrm>
+          <a:prstGeom prst="rect">
+            <a:avLst/>
+          </a:prstGeom>
+          <a:noFill/>
+        </p:spPr>
+        <p:txBody>
+          <a:bodyPr wrap="square" anchor="t" lIns="0" rIns="0" tIns="0" bIns="0">
+            <a:spAutoFit/>
+          </a:bodyPr>
+          <a:lstStyle/>
+          <a:p>
+            <a:pPr algn="r"/>
+            <a:r>
+              <a:rPr sz="2000" b="1">
                 <a:solidFill>
                   <a:srgbClr val="0F2145"/>
                 </a:solidFill>
                 <a:latin typeface="Georgia"/>
               </a:rPr>
-              <a:t>Compare it</a:t>
-            </a:r>
-          </a:p>
-        </p:txBody>
-      </p:sp>
-      <p:sp>
-        <p:nvSpPr>
-          <p:cNvPr id="18" name="TextBox 17"/>
-          <p:cNvSpPr txBox="1"/>
-          <p:nvPr/>
-        </p:nvSpPr>
-        <p:spPr>
-          <a:xfrm>
-            <a:off x="4572000" y="3255264"/>
-            <a:ext cx="3099816" cy="493776"/>
-          </a:xfrm>
-          <a:prstGeom prst="rect">
-            <a:avLst/>
-          </a:prstGeom>
-          <a:noFill/>
-        </p:spPr>
-        <p:txBody>
-          <a:bodyPr wrap="square" anchor="t" lIns="0" rIns="0" tIns="0" bIns="0">
-            <a:spAutoFit/>
-          </a:bodyPr>
-          <a:lstStyle/>
-          <a:p>
-            <a:pPr algn="l"/>
-            <a:r>
-              <a:rPr sz="1000" b="1">
-                <a:solidFill>
-                  <a:srgbClr val="C9A227"/>
-                </a:solidFill>
-              </a:rPr>
-              <a:t>▪  </a:t>
-            </a:r>
+              <a:t>0.41</a:t>
+            </a:r>
+          </a:p>
+        </p:txBody>
+      </p:sp>
+      <p:sp>
+        <p:nvSpPr>
+          <p:cNvPr id="20" name="TextBox 19"/>
+          <p:cNvSpPr txBox="1"/>
+          <p:nvPr/>
+        </p:nvSpPr>
+        <p:spPr>
+          <a:xfrm>
+            <a:off x="8339327" y="2432304"/>
+            <a:ext cx="3044952" cy="1188720"/>
+          </a:xfrm>
+          <a:prstGeom prst="rect">
+            <a:avLst/>
+          </a:prstGeom>
+          <a:noFill/>
+        </p:spPr>
+        <p:txBody>
+          <a:bodyPr wrap="square" anchor="t" lIns="0" rIns="0" tIns="0" bIns="0">
+            <a:spAutoFit/>
+          </a:bodyPr>
+          <a:lstStyle/>
+          <a:p>
+            <a:pPr algn="l"/>
             <a:r>
               <a:rPr sz="1000" b="0">
                 <a:solidFill>
                   <a:srgbClr val="1B2A41"/>
                 </a:solidFill>
               </a:rPr>
-              <a:t>Run the same portfolio through historical and parametric</a:t>
-            </a:r>
-          </a:p>
-        </p:txBody>
-      </p:sp>
-      <p:sp>
-        <p:nvSpPr>
-          <p:cNvPr id="19" name="TextBox 18"/>
-          <p:cNvSpPr txBox="1"/>
-          <p:nvPr/>
-        </p:nvSpPr>
-        <p:spPr>
-          <a:xfrm>
-            <a:off x="4572000" y="3767328"/>
-            <a:ext cx="3099816" cy="493776"/>
-          </a:xfrm>
-          <a:prstGeom prst="rect">
-            <a:avLst/>
-          </a:prstGeom>
-          <a:noFill/>
-        </p:spPr>
-        <p:txBody>
-          <a:bodyPr wrap="square" anchor="t" lIns="0" rIns="0" tIns="0" bIns="0">
-            <a:spAutoFit/>
-          </a:bodyPr>
-          <a:lstStyle/>
-          <a:p>
-            <a:pPr algn="l"/>
-            <a:r>
-              <a:rPr sz="1000" b="1">
-                <a:solidFill>
-                  <a:srgbClr val="C9A227"/>
-                </a:solidFill>
-              </a:rPr>
-              <a:t>▪  </a:t>
-            </a:r>
-            <a:r>
-              <a:rPr sz="1000" b="0">
-                <a:solidFill>
-                  <a:srgbClr val="1B2A41"/>
-                </a:solidFill>
-              </a:rPr>
-              <a:t>Three methods, three different answers</a:t>
-            </a:r>
-          </a:p>
-        </p:txBody>
-      </p:sp>
-      <p:sp>
-        <p:nvSpPr>
-          <p:cNvPr id="20" name="TextBox 19"/>
-          <p:cNvSpPr txBox="1"/>
-          <p:nvPr/>
-        </p:nvSpPr>
-        <p:spPr>
-          <a:xfrm>
-            <a:off x="4572000" y="4279392"/>
-            <a:ext cx="3099816" cy="493776"/>
-          </a:xfrm>
-          <a:prstGeom prst="rect">
-            <a:avLst/>
-          </a:prstGeom>
-          <a:noFill/>
-        </p:spPr>
-        <p:txBody>
-          <a:bodyPr wrap="square" anchor="t" lIns="0" rIns="0" tIns="0" bIns="0">
-            <a:spAutoFit/>
-          </a:bodyPr>
-          <a:lstStyle/>
-          <a:p>
-            <a:pPr algn="l"/>
-            <a:r>
-              <a:rPr sz="1000" b="1">
-                <a:solidFill>
-                  <a:srgbClr val="C9A227"/>
-                </a:solidFill>
-              </a:rPr>
-              <a:t>▪  </a:t>
-            </a:r>
-            <a:r>
-              <a:rPr sz="1000" b="0">
-                <a:solidFill>
-                  <a:srgbClr val="1B2A41"/>
-                </a:solidFill>
-              </a:rPr>
-              <a:t>Which one do you report, and why that one?</a:t>
-            </a:r>
-          </a:p>
-        </p:txBody>
-      </p:sp>
-      <p:sp>
-        <p:nvSpPr>
-          <p:cNvPr id="21" name="TextBox 20"/>
-          <p:cNvSpPr txBox="1"/>
-          <p:nvPr/>
-        </p:nvSpPr>
-        <p:spPr>
-          <a:xfrm>
-            <a:off x="4572000" y="4791456"/>
-            <a:ext cx="3099816" cy="493776"/>
-          </a:xfrm>
-          <a:prstGeom prst="rect">
-            <a:avLst/>
-          </a:prstGeom>
-          <a:noFill/>
-        </p:spPr>
-        <p:txBody>
-          <a:bodyPr wrap="square" anchor="t" lIns="0" rIns="0" tIns="0" bIns="0">
-            <a:spAutoFit/>
-          </a:bodyPr>
-          <a:lstStyle/>
-          <a:p>
-            <a:pPr algn="l"/>
-            <a:r>
-              <a:rPr sz="1000" b="1">
-                <a:solidFill>
-                  <a:srgbClr val="C9A227"/>
-                </a:solidFill>
-              </a:rPr>
-              <a:t>▪  </a:t>
-            </a:r>
-            <a:r>
-              <a:rPr sz="1000" b="0">
-                <a:solidFill>
-                  <a:srgbClr val="1B2A41"/>
-                </a:solidFill>
-              </a:rPr>
-              <a:t>The gap between them is your uncertainty, made visible</a:t>
-            </a:r>
-          </a:p>
-        </p:txBody>
-      </p:sp>
-      <p:sp>
-        <p:nvSpPr>
-          <p:cNvPr id="22" name="Rectangle 21"/>
+              <a:t>Sort all 1,000 by score, riskiest first. Walk down the list and track how many defaulters and how many good borrowers you have picked up. KS is the widest gap between the two, and it shows you where the cut-off earns its keep.</a:t>
+            </a:r>
+          </a:p>
+        </p:txBody>
+      </p:sp>
+      <p:sp>
+        <p:nvSpPr>
+          <p:cNvPr id="21" name="Rectangle 20"/>
           <p:cNvSpPr/>
           <p:nvPr/>
         </p:nvSpPr>
         <p:spPr>
           <a:xfrm>
-            <a:off x="8083296" y="2212848"/>
-            <a:ext cx="3557016" cy="3054096"/>
+            <a:off x="548640" y="3931920"/>
+            <a:ext cx="11091672" cy="1499616"/>
           </a:xfrm>
           <a:prstGeom prst="rect">
             <a:avLst/>
@@ -10553,244 +11940,115 @@
       </p:sp>
       <p:sp>
         <p:nvSpPr>
+          <p:cNvPr id="22" name="Rectangle 21"/>
+          <p:cNvSpPr/>
+          <p:nvPr/>
+        </p:nvSpPr>
+        <p:spPr>
+          <a:xfrm>
+            <a:off x="548640" y="3931920"/>
+            <a:ext cx="64008" cy="1499616"/>
+          </a:xfrm>
+          <a:prstGeom prst="rect">
+            <a:avLst/>
+          </a:prstGeom>
+          <a:solidFill>
+            <a:srgbClr val="C9A227"/>
+          </a:solidFill>
+          <a:ln>
+            <a:noFill/>
+          </a:ln>
+          <a:effectLst/>
+        </p:spPr>
+        <p:style>
+          <a:lnRef idx="1">
+            <a:schemeClr val="accent1"/>
+          </a:lnRef>
+          <a:fillRef idx="3">
+            <a:schemeClr val="accent1"/>
+          </a:fillRef>
+          <a:effectRef idx="2">
+            <a:schemeClr val="accent1"/>
+          </a:effectRef>
+          <a:fontRef idx="minor">
+            <a:schemeClr val="lt1"/>
+          </a:fontRef>
+        </p:style>
+        <p:txBody>
+          <a:bodyPr rtlCol="0" anchor="ctr"/>
+          <a:lstStyle/>
+          <a:p>
+            <a:pPr algn="ctr"/>
+          </a:p>
+        </p:txBody>
+      </p:sp>
+      <p:sp>
+        <p:nvSpPr>
           <p:cNvPr id="23" name="TextBox 22"/>
           <p:cNvSpPr txBox="1"/>
           <p:nvPr/>
         </p:nvSpPr>
         <p:spPr>
           <a:xfrm>
-            <a:off x="8339327" y="2414016"/>
-            <a:ext cx="3044952" cy="274320"/>
-          </a:xfrm>
-          <a:prstGeom prst="rect">
-            <a:avLst/>
-          </a:prstGeom>
-          <a:noFill/>
-        </p:spPr>
-        <p:txBody>
-          <a:bodyPr wrap="square" anchor="t" lIns="0" rIns="0" tIns="0" bIns="0">
-            <a:spAutoFit/>
-          </a:bodyPr>
-          <a:lstStyle/>
-          <a:p>
-            <a:pPr algn="l"/>
-            <a:r>
-              <a:rPr sz="950" b="1">
+            <a:off x="868680" y="4096512"/>
+            <a:ext cx="10515600" cy="1188720"/>
+          </a:xfrm>
+          <a:prstGeom prst="rect">
+            <a:avLst/>
+          </a:prstGeom>
+          <a:noFill/>
+        </p:spPr>
+        <p:txBody>
+          <a:bodyPr wrap="square" anchor="t" lIns="0" rIns="0" tIns="0" bIns="0">
+            <a:spAutoFit/>
+          </a:bodyPr>
+          <a:lstStyle/>
+          <a:p>
+            <a:pPr algn="l"/>
+            <a:r>
+              <a:rPr sz="1000" b="1">
                 <a:solidFill>
                   <a:srgbClr val="C9A227"/>
                 </a:solidFill>
               </a:rPr>
-              <a:t>PART C  ·  15 MIN</a:t>
-            </a:r>
-          </a:p>
-        </p:txBody>
-      </p:sp>
-      <p:sp>
-        <p:nvSpPr>
-          <p:cNvPr id="24" name="TextBox 23"/>
-          <p:cNvSpPr txBox="1"/>
-          <p:nvPr/>
-        </p:nvSpPr>
-        <p:spPr>
-          <a:xfrm>
-            <a:off x="8339327" y="2724912"/>
-            <a:ext cx="3044952" cy="402336"/>
-          </a:xfrm>
-          <a:prstGeom prst="rect">
-            <a:avLst/>
-          </a:prstGeom>
-          <a:noFill/>
-        </p:spPr>
-        <p:txBody>
-          <a:bodyPr wrap="square" anchor="t" lIns="0" rIns="0" tIns="0" bIns="0">
-            <a:spAutoFit/>
-          </a:bodyPr>
-          <a:lstStyle/>
-          <a:p>
-            <a:pPr algn="l"/>
-            <a:r>
-              <a:rPr sz="1700" b="1">
+              <a:t>SHAP  ·  THE ONE THAT EXPLAINS A PERSON, NOT A MODEL</a:t>
+            </a:r>
+          </a:p>
+          <a:p>
+            <a:pPr algn="l">
+              <a:spcBef>
+                <a:spcPts val="500"/>
+              </a:spcBef>
+            </a:pPr>
+            <a:r>
+              <a:rPr sz="1100" b="0">
+                <a:solidFill>
+                  <a:srgbClr val="C9D6EE"/>
+                </a:solidFill>
+              </a:rPr>
+              <a:t>The three numbers above judge the whole model. They tell you it ranks borrowers well. They cannot tell one rejected applicant why.</a:t>
+            </a:r>
+          </a:p>
+          <a:p>
+            <a:pPr algn="l">
+              <a:spcBef>
+                <a:spcPts val="500"/>
+              </a:spcBef>
+            </a:pPr>
+            <a:r>
+              <a:rPr sz="1100" b="0">
                 <a:solidFill>
                   <a:srgbClr val="FFFFFF"/>
                 </a:solidFill>
-                <a:latin typeface="Georgia"/>
-              </a:rPr>
-              <a:t>Test it</a:t>
-            </a:r>
-          </a:p>
-        </p:txBody>
-      </p:sp>
-      <p:sp>
-        <p:nvSpPr>
-          <p:cNvPr id="25" name="TextBox 24"/>
-          <p:cNvSpPr txBox="1"/>
-          <p:nvPr/>
-        </p:nvSpPr>
-        <p:spPr>
-          <a:xfrm>
-            <a:off x="8339327" y="3255264"/>
-            <a:ext cx="3044952" cy="493776"/>
-          </a:xfrm>
-          <a:prstGeom prst="rect">
-            <a:avLst/>
-          </a:prstGeom>
-          <a:noFill/>
-        </p:spPr>
-        <p:txBody>
-          <a:bodyPr wrap="square" anchor="t" lIns="0" rIns="0" tIns="0" bIns="0">
-            <a:spAutoFit/>
-          </a:bodyPr>
-          <a:lstStyle/>
-          <a:p>
-            <a:pPr algn="l"/>
-            <a:r>
-              <a:rPr sz="1000" b="1">
-                <a:solidFill>
-                  <a:srgbClr val="C9A227"/>
-                </a:solidFill>
-              </a:rPr>
-              <a:t>▪  </a:t>
-            </a:r>
-            <a:r>
-              <a:rPr sz="1000" b="0">
-                <a:solidFill>
-                  <a:srgbClr val="C9D6EE"/>
-                </a:solidFill>
-              </a:rPr>
-              <a:t>Count the breaches over 250 real trading days</a:t>
-            </a:r>
-          </a:p>
-        </p:txBody>
-      </p:sp>
-      <p:sp>
-        <p:nvSpPr>
-          <p:cNvPr id="26" name="TextBox 25"/>
-          <p:cNvSpPr txBox="1"/>
-          <p:nvPr/>
-        </p:nvSpPr>
-        <p:spPr>
-          <a:xfrm>
-            <a:off x="8339327" y="3767328"/>
-            <a:ext cx="3044952" cy="493776"/>
-          </a:xfrm>
-          <a:prstGeom prst="rect">
-            <a:avLst/>
-          </a:prstGeom>
-          <a:noFill/>
-        </p:spPr>
-        <p:txBody>
-          <a:bodyPr wrap="square" anchor="t" lIns="0" rIns="0" tIns="0" bIns="0">
-            <a:spAutoFit/>
-          </a:bodyPr>
-          <a:lstStyle/>
-          <a:p>
-            <a:pPr algn="l"/>
-            <a:r>
-              <a:rPr sz="1000" b="1">
-                <a:solidFill>
-                  <a:srgbClr val="C9A227"/>
-                </a:solidFill>
-              </a:rPr>
-              <a:t>▪  </a:t>
-            </a:r>
-            <a:r>
-              <a:rPr sz="1000" b="0">
-                <a:solidFill>
-                  <a:srgbClr val="C9D6EE"/>
-                </a:solidFill>
-              </a:rPr>
-              <a:t>At 99% you expect two or three, not nine</a:t>
-            </a:r>
-          </a:p>
-        </p:txBody>
-      </p:sp>
-      <p:sp>
-        <p:nvSpPr>
-          <p:cNvPr id="27" name="TextBox 26"/>
-          <p:cNvSpPr txBox="1"/>
-          <p:nvPr/>
-        </p:nvSpPr>
-        <p:spPr>
-          <a:xfrm>
-            <a:off x="8339327" y="4279392"/>
-            <a:ext cx="3044952" cy="493776"/>
-          </a:xfrm>
-          <a:prstGeom prst="rect">
-            <a:avLst/>
-          </a:prstGeom>
-          <a:noFill/>
-        </p:spPr>
-        <p:txBody>
-          <a:bodyPr wrap="square" anchor="t" lIns="0" rIns="0" tIns="0" bIns="0">
-            <a:spAutoFit/>
-          </a:bodyPr>
-          <a:lstStyle/>
-          <a:p>
-            <a:pPr algn="l"/>
-            <a:r>
-              <a:rPr sz="1000" b="1">
-                <a:solidFill>
-                  <a:srgbClr val="C9A227"/>
-                </a:solidFill>
-              </a:rPr>
-              <a:t>▪  </a:t>
-            </a:r>
-            <a:r>
-              <a:rPr sz="1000" b="0">
-                <a:solidFill>
-                  <a:srgbClr val="C9D6EE"/>
-                </a:solidFill>
-              </a:rPr>
-              <a:t>Basel zones: 0-4 green, 5-9 yellow, 10 or more red</a:t>
-            </a:r>
-          </a:p>
-        </p:txBody>
-      </p:sp>
-      <p:sp>
-        <p:nvSpPr>
-          <p:cNvPr id="28" name="TextBox 27"/>
-          <p:cNvSpPr txBox="1"/>
-          <p:nvPr/>
-        </p:nvSpPr>
-        <p:spPr>
-          <a:xfrm>
-            <a:off x="8339327" y="4791456"/>
-            <a:ext cx="3044952" cy="493776"/>
-          </a:xfrm>
-          <a:prstGeom prst="rect">
-            <a:avLst/>
-          </a:prstGeom>
-          <a:noFill/>
-        </p:spPr>
-        <p:txBody>
-          <a:bodyPr wrap="square" anchor="t" lIns="0" rIns="0" tIns="0" bIns="0">
-            <a:spAutoFit/>
-          </a:bodyPr>
-          <a:lstStyle/>
-          <a:p>
-            <a:pPr algn="l"/>
-            <a:r>
-              <a:rPr sz="1000" b="1">
-                <a:solidFill>
-                  <a:srgbClr val="C9A227"/>
-                </a:solidFill>
-              </a:rPr>
-              <a:t>▪  </a:t>
-            </a:r>
-            <a:r>
-              <a:rPr sz="1000" b="0">
-                <a:solidFill>
-                  <a:srgbClr val="C9D6EE"/>
-                </a:solidFill>
-              </a:rPr>
-              <a:t>A red zone means rebuild it, not explain it away</a:t>
-            </a:r>
-          </a:p>
-        </p:txBody>
-      </p:sp>
-      <p:sp>
-        <p:nvSpPr>
-          <p:cNvPr id="29" name="Rectangle 28"/>
+              </a:rPr>
+              <a:t>SHAP takes a single decision apart. For this borrower: the interest cover of 2.3 pushed the PD up by 1.8 points, the three late payments pushed it up 0.9 more, and the current ratio pulled it back down 0.3. That is the sentence you give the customer, and it is the one the regulator asks to see.</a:t>
+            </a:r>
+          </a:p>
+        </p:txBody>
+      </p:sp>
+      <p:sp>
+        <p:nvSpPr>
+          <p:cNvPr id="24" name="Rectangle 23"/>
           <p:cNvSpPr/>
           <p:nvPr/>
         </p:nvSpPr>
@@ -10834,7 +12092,7 @@
       </p:sp>
       <p:sp>
         <p:nvSpPr>
-          <p:cNvPr id="30" name="Rectangle 29"/>
+          <p:cNvPr id="25" name="Rectangle 24"/>
           <p:cNvSpPr/>
           <p:nvPr/>
         </p:nvSpPr>
@@ -10878,7 +12136,7 @@
       </p:sp>
       <p:sp>
         <p:nvSpPr>
-          <p:cNvPr id="31" name="TextBox 30"/>
+          <p:cNvPr id="26" name="TextBox 25"/>
           <p:cNvSpPr txBox="1"/>
           <p:nvPr/>
         </p:nvSpPr>
@@ -10905,7 +12163,7 @@
                   <a:srgbClr val="C9A227"/>
                 </a:solidFill>
               </a:rPr>
-              <a:t>Why Part C matters most:  </a:t>
+              <a:t>Do it live:  </a:t>
             </a:r>
             <a:r>
               <a:rPr sz="1200" b="0">
@@ -10913,14 +12171,14 @@
                   <a:srgbClr val="FFFFFF"/>
                 </a:solidFill>
               </a:rPr>
-              <a:t>building a VaR takes 35 minutes. Finding out it breached nine times when it should have breached three takes 15.</a:t>
-            </a:r>
-          </a:p>
-        </p:txBody>
-      </p:sp>
-      <p:sp>
-        <p:nvSpPr>
-          <p:cNvPr id="32" name="TextBox 31"/>
+              <a:t>train both models on a public credit file, print the AUC of each, then SHAP one rejected applicant and read the reason out loud.</a:t>
+            </a:r>
+          </a:p>
+        </p:txBody>
+      </p:sp>
+      <p:sp>
+        <p:nvSpPr>
+          <p:cNvPr id="27" name="TextBox 26"/>
           <p:cNvSpPr txBox="1"/>
           <p:nvPr/>
         </p:nvSpPr>
@@ -10954,7 +12212,7 @@
       </p:sp>
       <p:sp>
         <p:nvSpPr>
-          <p:cNvPr id="33" name="TextBox 32"/>
+          <p:cNvPr id="28" name="TextBox 27"/>
           <p:cNvSpPr txBox="1"/>
           <p:nvPr/>
         </p:nvSpPr>
@@ -11085,7 +12343,7 @@
                   <a:srgbClr val="C9A227"/>
                 </a:solidFill>
               </a:rPr>
-              <a:t>PRACTICE QUESTIONS</a:t>
+              <a:t>HOUR 2 · MARKET RISK</a:t>
             </a:r>
           </a:p>
         </p:txBody>
@@ -11120,7 +12378,7 @@
                 </a:solidFill>
                 <a:latin typeface="Georgia"/>
               </a:rPr>
-              <a:t>Six questions before the exam</a:t>
+              <a:t>VaR is one sentence. The rest is how you compute it.</a:t>
             </a:r>
           </a:p>
         </p:txBody>
@@ -11133,8 +12391,138 @@
         </p:nvSpPr>
         <p:spPr>
           <a:xfrm>
-            <a:off x="548640" y="1444752"/>
-            <a:ext cx="11091672" cy="676656"/>
+            <a:off x="548640" y="1463040"/>
+            <a:ext cx="11091672" cy="694944"/>
+          </a:xfrm>
+          <a:prstGeom prst="rect">
+            <a:avLst/>
+          </a:prstGeom>
+          <a:solidFill>
+            <a:srgbClr val="0F2145"/>
+          </a:solidFill>
+          <a:ln>
+            <a:noFill/>
+          </a:ln>
+          <a:effectLst/>
+        </p:spPr>
+        <p:style>
+          <a:lnRef idx="1">
+            <a:schemeClr val="accent1"/>
+          </a:lnRef>
+          <a:fillRef idx="3">
+            <a:schemeClr val="accent1"/>
+          </a:fillRef>
+          <a:effectRef idx="2">
+            <a:schemeClr val="accent1"/>
+          </a:effectRef>
+          <a:fontRef idx="minor">
+            <a:schemeClr val="lt1"/>
+          </a:fontRef>
+        </p:style>
+        <p:txBody>
+          <a:bodyPr rtlCol="0" anchor="ctr"/>
+          <a:lstStyle/>
+          <a:p>
+            <a:pPr algn="ctr"/>
+          </a:p>
+        </p:txBody>
+      </p:sp>
+      <p:sp>
+        <p:nvSpPr>
+          <p:cNvPr id="6" name="Rectangle 5"/>
+          <p:cNvSpPr/>
+          <p:nvPr/>
+        </p:nvSpPr>
+        <p:spPr>
+          <a:xfrm>
+            <a:off x="548640" y="1463040"/>
+            <a:ext cx="64008" cy="694944"/>
+          </a:xfrm>
+          <a:prstGeom prst="rect">
+            <a:avLst/>
+          </a:prstGeom>
+          <a:solidFill>
+            <a:srgbClr val="C9A227"/>
+          </a:solidFill>
+          <a:ln>
+            <a:noFill/>
+          </a:ln>
+          <a:effectLst/>
+        </p:spPr>
+        <p:style>
+          <a:lnRef idx="1">
+            <a:schemeClr val="accent1"/>
+          </a:lnRef>
+          <a:fillRef idx="3">
+            <a:schemeClr val="accent1"/>
+          </a:fillRef>
+          <a:effectRef idx="2">
+            <a:schemeClr val="accent1"/>
+          </a:effectRef>
+          <a:fontRef idx="minor">
+            <a:schemeClr val="lt1"/>
+          </a:fontRef>
+        </p:style>
+        <p:txBody>
+          <a:bodyPr rtlCol="0" anchor="ctr"/>
+          <a:lstStyle/>
+          <a:p>
+            <a:pPr algn="ctr"/>
+          </a:p>
+        </p:txBody>
+      </p:sp>
+      <p:sp>
+        <p:nvSpPr>
+          <p:cNvPr id="7" name="TextBox 6"/>
+          <p:cNvSpPr txBox="1"/>
+          <p:nvPr/>
+        </p:nvSpPr>
+        <p:spPr>
+          <a:xfrm>
+            <a:off x="868680" y="1463040"/>
+            <a:ext cx="10515600" cy="694944"/>
+          </a:xfrm>
+          <a:prstGeom prst="rect">
+            <a:avLst/>
+          </a:prstGeom>
+          <a:noFill/>
+        </p:spPr>
+        <p:txBody>
+          <a:bodyPr wrap="square" anchor="ctr" lIns="0" rIns="0" tIns="0" bIns="0">
+            <a:spAutoFit/>
+          </a:bodyPr>
+          <a:lstStyle/>
+          <a:p>
+            <a:pPr algn="l"/>
+            <a:r>
+              <a:rPr sz="1200" b="1">
+                <a:solidFill>
+                  <a:srgbClr val="C9A227"/>
+                </a:solidFill>
+              </a:rPr>
+              <a:t>A 99% one-day VaR of ₹6,60,000 means this:  </a:t>
+            </a:r>
+            <a:r>
+              <a:rPr sz="1200" b="0">
+                <a:solidFill>
+                  <a:srgbClr val="FFFFFF"/>
+                </a:solidFill>
+              </a:rPr>
+              <a:t>on 99 days out of 100, we should lose less than ₹6,60,000. It says nothing about the hundredth day.</a:t>
+            </a:r>
+          </a:p>
+        </p:txBody>
+      </p:sp>
+      <p:sp>
+        <p:nvSpPr>
+          <p:cNvPr id="8" name="Rectangle 7"/>
+          <p:cNvSpPr/>
+          <p:nvPr/>
+        </p:nvSpPr>
+        <p:spPr>
+          <a:xfrm>
+            <a:off x="548640" y="2340864"/>
+            <a:ext cx="3611880" cy="2212848"/>
           </a:xfrm>
           <a:prstGeom prst="rect">
             <a:avLst/>
@@ -11171,150 +12559,166 @@
       </p:sp>
       <p:sp>
         <p:nvSpPr>
-          <p:cNvPr id="6" name="Rectangle 5"/>
+          <p:cNvPr id="9" name="TextBox 8"/>
+          <p:cNvSpPr txBox="1"/>
+          <p:nvPr/>
+        </p:nvSpPr>
+        <p:spPr>
+          <a:xfrm>
+            <a:off x="804672" y="2542032"/>
+            <a:ext cx="3108960" cy="274320"/>
+          </a:xfrm>
+          <a:prstGeom prst="rect">
+            <a:avLst/>
+          </a:prstGeom>
+          <a:noFill/>
+        </p:spPr>
+        <p:txBody>
+          <a:bodyPr wrap="square" anchor="t" lIns="0" rIns="0" tIns="0" bIns="0">
+            <a:spAutoFit/>
+          </a:bodyPr>
+          <a:lstStyle/>
+          <a:p>
+            <a:pPr algn="l"/>
+            <a:r>
+              <a:rPr sz="1000" b="1">
+                <a:solidFill>
+                  <a:srgbClr val="3A5C9E"/>
+                </a:solidFill>
+              </a:rPr>
+              <a:t>HISTORICAL SIMULATION</a:t>
+            </a:r>
+          </a:p>
+        </p:txBody>
+      </p:sp>
+      <p:sp>
+        <p:nvSpPr>
+          <p:cNvPr id="10" name="TextBox 9"/>
+          <p:cNvSpPr txBox="1"/>
+          <p:nvPr/>
+        </p:nvSpPr>
+        <p:spPr>
+          <a:xfrm>
+            <a:off x="804672" y="2871216"/>
+            <a:ext cx="3108960" cy="566928"/>
+          </a:xfrm>
+          <a:prstGeom prst="rect">
+            <a:avLst/>
+          </a:prstGeom>
+          <a:noFill/>
+        </p:spPr>
+        <p:txBody>
+          <a:bodyPr wrap="square" anchor="t" lIns="0" rIns="0" tIns="0" bIns="0">
+            <a:spAutoFit/>
+          </a:bodyPr>
+          <a:lstStyle/>
+          <a:p>
+            <a:pPr algn="l"/>
+            <a:r>
+              <a:rPr sz="1100" b="1">
+                <a:solidFill>
+                  <a:srgbClr val="0F2145"/>
+                </a:solidFill>
+              </a:rPr>
+              <a:t>Replay the last 500 days that actually happened.</a:t>
+            </a:r>
+          </a:p>
+        </p:txBody>
+      </p:sp>
+      <p:sp>
+        <p:nvSpPr>
+          <p:cNvPr id="11" name="TextBox 10"/>
+          <p:cNvSpPr txBox="1"/>
+          <p:nvPr/>
+        </p:nvSpPr>
+        <p:spPr>
+          <a:xfrm>
+            <a:off x="804672" y="3529584"/>
+            <a:ext cx="3108960" cy="457200"/>
+          </a:xfrm>
+          <a:prstGeom prst="rect">
+            <a:avLst/>
+          </a:prstGeom>
+          <a:noFill/>
+        </p:spPr>
+        <p:txBody>
+          <a:bodyPr wrap="square" anchor="t" lIns="0" rIns="0" tIns="0" bIns="0">
+            <a:spAutoFit/>
+          </a:bodyPr>
+          <a:lstStyle/>
+          <a:p>
+            <a:pPr algn="l"/>
+            <a:r>
+              <a:rPr sz="1000" b="1">
+                <a:solidFill>
+                  <a:srgbClr val="C9A227"/>
+                </a:solidFill>
+              </a:rPr>
+              <a:t>+  </a:t>
+            </a:r>
+            <a:r>
+              <a:rPr sz="1000" b="0">
+                <a:solidFill>
+                  <a:srgbClr val="1B2A41"/>
+                </a:solidFill>
+              </a:rPr>
+              <a:t>Assumes nothing about the shape of returns.</a:t>
+            </a:r>
+          </a:p>
+        </p:txBody>
+      </p:sp>
+      <p:sp>
+        <p:nvSpPr>
+          <p:cNvPr id="12" name="TextBox 11"/>
+          <p:cNvSpPr txBox="1"/>
+          <p:nvPr/>
+        </p:nvSpPr>
+        <p:spPr>
+          <a:xfrm>
+            <a:off x="804672" y="4023360"/>
+            <a:ext cx="3108960" cy="457200"/>
+          </a:xfrm>
+          <a:prstGeom prst="rect">
+            <a:avLst/>
+          </a:prstGeom>
+          <a:noFill/>
+        </p:spPr>
+        <p:txBody>
+          <a:bodyPr wrap="square" anchor="t" lIns="0" rIns="0" tIns="0" bIns="0">
+            <a:spAutoFit/>
+          </a:bodyPr>
+          <a:lstStyle/>
+          <a:p>
+            <a:pPr algn="l"/>
+            <a:r>
+              <a:rPr sz="1000" b="1">
+                <a:solidFill>
+                  <a:srgbClr val="C9A227"/>
+                </a:solidFill>
+              </a:rPr>
+              <a:t>−  </a:t>
+            </a:r>
+            <a:r>
+              <a:rPr sz="1000" b="0">
+                <a:solidFill>
+                  <a:srgbClr val="5D6B7E"/>
+                </a:solidFill>
+              </a:rPr>
+              <a:t>You only ever see what already occurred.</a:t>
+            </a:r>
+          </a:p>
+        </p:txBody>
+      </p:sp>
+      <p:sp>
+        <p:nvSpPr>
+          <p:cNvPr id="13" name="Rectangle 12"/>
           <p:cNvSpPr/>
           <p:nvPr/>
         </p:nvSpPr>
         <p:spPr>
           <a:xfrm>
-            <a:off x="548640" y="1444752"/>
-            <a:ext cx="64008" cy="676656"/>
-          </a:xfrm>
-          <a:prstGeom prst="rect">
-            <a:avLst/>
-          </a:prstGeom>
-          <a:solidFill>
-            <a:srgbClr val="3A5C9E"/>
-          </a:solidFill>
-          <a:ln>
-            <a:noFill/>
-          </a:ln>
-          <a:effectLst/>
-        </p:spPr>
-        <p:style>
-          <a:lnRef idx="1">
-            <a:schemeClr val="accent1"/>
-          </a:lnRef>
-          <a:fillRef idx="3">
-            <a:schemeClr val="accent1"/>
-          </a:fillRef>
-          <a:effectRef idx="2">
-            <a:schemeClr val="accent1"/>
-          </a:effectRef>
-          <a:fontRef idx="minor">
-            <a:schemeClr val="lt1"/>
-          </a:fontRef>
-        </p:style>
-        <p:txBody>
-          <a:bodyPr rtlCol="0" anchor="ctr"/>
-          <a:lstStyle/>
-          <a:p>
-            <a:pPr algn="ctr"/>
-          </a:p>
-        </p:txBody>
-      </p:sp>
-      <p:sp>
-        <p:nvSpPr>
-          <p:cNvPr id="7" name="TextBox 6"/>
-          <p:cNvSpPr txBox="1"/>
-          <p:nvPr/>
-        </p:nvSpPr>
-        <p:spPr>
-          <a:xfrm>
-            <a:off x="822960" y="1508760"/>
-            <a:ext cx="640080" cy="365760"/>
-          </a:xfrm>
-          <a:prstGeom prst="rect">
-            <a:avLst/>
-          </a:prstGeom>
-          <a:noFill/>
-        </p:spPr>
-        <p:txBody>
-          <a:bodyPr wrap="square" anchor="t" lIns="0" rIns="0" tIns="0" bIns="0">
-            <a:spAutoFit/>
-          </a:bodyPr>
-          <a:lstStyle/>
-          <a:p>
-            <a:pPr algn="l"/>
-            <a:r>
-              <a:rPr sz="1400" b="1">
-                <a:solidFill>
-                  <a:srgbClr val="3A5C9E"/>
-                </a:solidFill>
-                <a:latin typeface="Georgia"/>
-              </a:rPr>
-              <a:t>Q1</a:t>
-            </a:r>
-          </a:p>
-        </p:txBody>
-      </p:sp>
-      <p:sp>
-        <p:nvSpPr>
-          <p:cNvPr id="8" name="TextBox 7"/>
-          <p:cNvSpPr txBox="1"/>
-          <p:nvPr/>
-        </p:nvSpPr>
-        <p:spPr>
-          <a:xfrm>
-            <a:off x="1554480" y="1499616"/>
-            <a:ext cx="9875520" cy="585216"/>
-          </a:xfrm>
-          <a:prstGeom prst="rect">
-            <a:avLst/>
-          </a:prstGeom>
-          <a:noFill/>
-        </p:spPr>
-        <p:txBody>
-          <a:bodyPr wrap="square" anchor="t" lIns="0" rIns="0" tIns="0" bIns="0">
-            <a:spAutoFit/>
-          </a:bodyPr>
-          <a:lstStyle/>
-          <a:p>
-            <a:pPr algn="l"/>
-            <a:r>
-              <a:rPr sz="1050" b="1">
-                <a:solidFill>
-                  <a:srgbClr val="1B2A41"/>
-                </a:solidFill>
-              </a:rPr>
-              <a:t>A loan has PD 3%, LGD 40% and EAD ₹5,00,000. What is the expected loss, and who pays it?</a:t>
-            </a:r>
-          </a:p>
-          <a:p>
-            <a:pPr algn="l">
-              <a:spcBef>
-                <a:spcPts val="200"/>
-              </a:spcBef>
-            </a:pPr>
-            <a:r>
-              <a:rPr sz="900" b="1">
-                <a:solidFill>
-                  <a:srgbClr val="C9A227"/>
-                </a:solidFill>
-              </a:rPr>
-              <a:t>TIP  </a:t>
-            </a:r>
-            <a:r>
-              <a:rPr sz="900" b="0">
-                <a:solidFill>
-                  <a:srgbClr val="5D6B7E"/>
-                </a:solidFill>
-              </a:rPr>
-              <a:t>₹6,000. The borrower pays it, priced into the interest rate, whether or not this loan goes bad.</a:t>
-            </a:r>
-          </a:p>
-        </p:txBody>
-      </p:sp>
-      <p:sp>
-        <p:nvSpPr>
-          <p:cNvPr id="9" name="Rectangle 8"/>
-          <p:cNvSpPr/>
-          <p:nvPr/>
-        </p:nvSpPr>
-        <p:spPr>
-          <a:xfrm>
-            <a:off x="548640" y="2176272"/>
-            <a:ext cx="11091672" cy="676656"/>
+            <a:off x="4315968" y="2340864"/>
+            <a:ext cx="3611880" cy="2212848"/>
           </a:xfrm>
           <a:prstGeom prst="rect">
             <a:avLst/>
@@ -11351,20 +12755,172 @@
       </p:sp>
       <p:sp>
         <p:nvSpPr>
-          <p:cNvPr id="10" name="Rectangle 9"/>
+          <p:cNvPr id="14" name="TextBox 13"/>
+          <p:cNvSpPr txBox="1"/>
+          <p:nvPr/>
+        </p:nvSpPr>
+        <p:spPr>
+          <a:xfrm>
+            <a:off x="4572000" y="2542032"/>
+            <a:ext cx="3108960" cy="274320"/>
+          </a:xfrm>
+          <a:prstGeom prst="rect">
+            <a:avLst/>
+          </a:prstGeom>
+          <a:noFill/>
+        </p:spPr>
+        <p:txBody>
+          <a:bodyPr wrap="square" anchor="t" lIns="0" rIns="0" tIns="0" bIns="0">
+            <a:spAutoFit/>
+          </a:bodyPr>
+          <a:lstStyle/>
+          <a:p>
+            <a:pPr algn="l"/>
+            <a:r>
+              <a:rPr sz="1000" b="1">
+                <a:solidFill>
+                  <a:srgbClr val="3A5C9E"/>
+                </a:solidFill>
+              </a:rPr>
+              <a:t>PARAMETRIC</a:t>
+            </a:r>
+          </a:p>
+        </p:txBody>
+      </p:sp>
+      <p:sp>
+        <p:nvSpPr>
+          <p:cNvPr id="15" name="TextBox 14"/>
+          <p:cNvSpPr txBox="1"/>
+          <p:nvPr/>
+        </p:nvSpPr>
+        <p:spPr>
+          <a:xfrm>
+            <a:off x="4572000" y="2871216"/>
+            <a:ext cx="3108960" cy="566928"/>
+          </a:xfrm>
+          <a:prstGeom prst="rect">
+            <a:avLst/>
+          </a:prstGeom>
+          <a:noFill/>
+        </p:spPr>
+        <p:txBody>
+          <a:bodyPr wrap="square" anchor="t" lIns="0" rIns="0" tIns="0" bIns="0">
+            <a:spAutoFit/>
+          </a:bodyPr>
+          <a:lstStyle/>
+          <a:p>
+            <a:pPr algn="l"/>
+            <a:r>
+              <a:rPr sz="1100" b="1">
+                <a:solidFill>
+                  <a:srgbClr val="0F2145"/>
+                </a:solidFill>
+              </a:rPr>
+              <a:t>Assume a normal curve and use one volatility number.</a:t>
+            </a:r>
+          </a:p>
+        </p:txBody>
+      </p:sp>
+      <p:sp>
+        <p:nvSpPr>
+          <p:cNvPr id="16" name="TextBox 15"/>
+          <p:cNvSpPr txBox="1"/>
+          <p:nvPr/>
+        </p:nvSpPr>
+        <p:spPr>
+          <a:xfrm>
+            <a:off x="4572000" y="3529584"/>
+            <a:ext cx="3108960" cy="457200"/>
+          </a:xfrm>
+          <a:prstGeom prst="rect">
+            <a:avLst/>
+          </a:prstGeom>
+          <a:noFill/>
+        </p:spPr>
+        <p:txBody>
+          <a:bodyPr wrap="square" anchor="t" lIns="0" rIns="0" tIns="0" bIns="0">
+            <a:spAutoFit/>
+          </a:bodyPr>
+          <a:lstStyle/>
+          <a:p>
+            <a:pPr algn="l"/>
+            <a:r>
+              <a:rPr sz="1000" b="1">
+                <a:solidFill>
+                  <a:srgbClr val="C9A227"/>
+                </a:solidFill>
+              </a:rPr>
+              <a:t>+  </a:t>
+            </a:r>
+            <a:r>
+              <a:rPr sz="1000" b="0">
+                <a:solidFill>
+                  <a:srgbClr val="1B2A41"/>
+                </a:solidFill>
+              </a:rPr>
+              <a:t>Fast, and you can do it in a spreadsheet.</a:t>
+            </a:r>
+          </a:p>
+        </p:txBody>
+      </p:sp>
+      <p:sp>
+        <p:nvSpPr>
+          <p:cNvPr id="17" name="TextBox 16"/>
+          <p:cNvSpPr txBox="1"/>
+          <p:nvPr/>
+        </p:nvSpPr>
+        <p:spPr>
+          <a:xfrm>
+            <a:off x="4572000" y="4023360"/>
+            <a:ext cx="3108960" cy="457200"/>
+          </a:xfrm>
+          <a:prstGeom prst="rect">
+            <a:avLst/>
+          </a:prstGeom>
+          <a:noFill/>
+        </p:spPr>
+        <p:txBody>
+          <a:bodyPr wrap="square" anchor="t" lIns="0" rIns="0" tIns="0" bIns="0">
+            <a:spAutoFit/>
+          </a:bodyPr>
+          <a:lstStyle/>
+          <a:p>
+            <a:pPr algn="l"/>
+            <a:r>
+              <a:rPr sz="1000" b="1">
+                <a:solidFill>
+                  <a:srgbClr val="C9A227"/>
+                </a:solidFill>
+              </a:rPr>
+              <a:t>−  </a:t>
+            </a:r>
+            <a:r>
+              <a:rPr sz="1000" b="0">
+                <a:solidFill>
+                  <a:srgbClr val="5D6B7E"/>
+                </a:solidFill>
+              </a:rPr>
+              <a:t>Real markets have fatter tails than normal.</a:t>
+            </a:r>
+          </a:p>
+        </p:txBody>
+      </p:sp>
+      <p:sp>
+        <p:nvSpPr>
+          <p:cNvPr id="18" name="Rectangle 17"/>
           <p:cNvSpPr/>
           <p:nvPr/>
         </p:nvSpPr>
         <p:spPr>
           <a:xfrm>
-            <a:off x="548640" y="2176272"/>
-            <a:ext cx="64008" cy="676656"/>
+            <a:off x="8083296" y="2340864"/>
+            <a:ext cx="3611880" cy="2212848"/>
           </a:xfrm>
           <a:prstGeom prst="rect">
             <a:avLst/>
           </a:prstGeom>
           <a:solidFill>
-            <a:srgbClr val="3A5C9E"/>
+            <a:srgbClr val="0F2145"/>
           </a:solidFill>
           <a:ln>
             <a:noFill/>
@@ -11395,69 +12951,581 @@
       </p:sp>
       <p:sp>
         <p:nvSpPr>
-          <p:cNvPr id="11" name="TextBox 10"/>
-          <p:cNvSpPr txBox="1"/>
-          <p:nvPr/>
-        </p:nvSpPr>
-        <p:spPr>
-          <a:xfrm>
-            <a:off x="822960" y="2240279"/>
-            <a:ext cx="640080" cy="365760"/>
-          </a:xfrm>
-          <a:prstGeom prst="rect">
-            <a:avLst/>
-          </a:prstGeom>
-          <a:noFill/>
-        </p:spPr>
-        <p:txBody>
-          <a:bodyPr wrap="square" anchor="t" lIns="0" rIns="0" tIns="0" bIns="0">
-            <a:spAutoFit/>
-          </a:bodyPr>
-          <a:lstStyle/>
-          <a:p>
-            <a:pPr algn="l"/>
-            <a:r>
-              <a:rPr sz="1400" b="1">
-                <a:solidFill>
-                  <a:srgbClr val="3A5C9E"/>
+          <p:cNvPr id="19" name="TextBox 18"/>
+          <p:cNvSpPr txBox="1"/>
+          <p:nvPr/>
+        </p:nvSpPr>
+        <p:spPr>
+          <a:xfrm>
+            <a:off x="8339327" y="2542032"/>
+            <a:ext cx="3108960" cy="274320"/>
+          </a:xfrm>
+          <a:prstGeom prst="rect">
+            <a:avLst/>
+          </a:prstGeom>
+          <a:noFill/>
+        </p:spPr>
+        <p:txBody>
+          <a:bodyPr wrap="square" anchor="t" lIns="0" rIns="0" tIns="0" bIns="0">
+            <a:spAutoFit/>
+          </a:bodyPr>
+          <a:lstStyle/>
+          <a:p>
+            <a:pPr algn="l"/>
+            <a:r>
+              <a:rPr sz="1000" b="1">
+                <a:solidFill>
+                  <a:srgbClr val="C9A227"/>
+                </a:solidFill>
+              </a:rPr>
+              <a:t>MONTE CARLO</a:t>
+            </a:r>
+          </a:p>
+        </p:txBody>
+      </p:sp>
+      <p:sp>
+        <p:nvSpPr>
+          <p:cNvPr id="20" name="TextBox 19"/>
+          <p:cNvSpPr txBox="1"/>
+          <p:nvPr/>
+        </p:nvSpPr>
+        <p:spPr>
+          <a:xfrm>
+            <a:off x="8339327" y="2871216"/>
+            <a:ext cx="3108960" cy="566928"/>
+          </a:xfrm>
+          <a:prstGeom prst="rect">
+            <a:avLst/>
+          </a:prstGeom>
+          <a:noFill/>
+        </p:spPr>
+        <p:txBody>
+          <a:bodyPr wrap="square" anchor="t" lIns="0" rIns="0" tIns="0" bIns="0">
+            <a:spAutoFit/>
+          </a:bodyPr>
+          <a:lstStyle/>
+          <a:p>
+            <a:pPr algn="l"/>
+            <a:r>
+              <a:rPr sz="1100" b="1">
+                <a:solidFill>
+                  <a:srgbClr val="FFFFFF"/>
+                </a:solidFill>
+              </a:rPr>
+              <a:t>Invent 10,000 tomorrows from volatility and correlation.</a:t>
+            </a:r>
+          </a:p>
+        </p:txBody>
+      </p:sp>
+      <p:sp>
+        <p:nvSpPr>
+          <p:cNvPr id="21" name="TextBox 20"/>
+          <p:cNvSpPr txBox="1"/>
+          <p:nvPr/>
+        </p:nvSpPr>
+        <p:spPr>
+          <a:xfrm>
+            <a:off x="8339327" y="3529584"/>
+            <a:ext cx="3108960" cy="457200"/>
+          </a:xfrm>
+          <a:prstGeom prst="rect">
+            <a:avLst/>
+          </a:prstGeom>
+          <a:noFill/>
+        </p:spPr>
+        <p:txBody>
+          <a:bodyPr wrap="square" anchor="t" lIns="0" rIns="0" tIns="0" bIns="0">
+            <a:spAutoFit/>
+          </a:bodyPr>
+          <a:lstStyle/>
+          <a:p>
+            <a:pPr algn="l"/>
+            <a:r>
+              <a:rPr sz="1000" b="1">
+                <a:solidFill>
+                  <a:srgbClr val="C9A227"/>
+                </a:solidFill>
+              </a:rPr>
+              <a:t>+  </a:t>
+            </a:r>
+            <a:r>
+              <a:rPr sz="1000" b="0">
+                <a:solidFill>
+                  <a:srgbClr val="C9D6EE"/>
+                </a:solidFill>
+              </a:rPr>
+              <a:t>Handles many assets and odd payoffs.</a:t>
+            </a:r>
+          </a:p>
+        </p:txBody>
+      </p:sp>
+      <p:sp>
+        <p:nvSpPr>
+          <p:cNvPr id="22" name="TextBox 21"/>
+          <p:cNvSpPr txBox="1"/>
+          <p:nvPr/>
+        </p:nvSpPr>
+        <p:spPr>
+          <a:xfrm>
+            <a:off x="8339327" y="4023360"/>
+            <a:ext cx="3108960" cy="457200"/>
+          </a:xfrm>
+          <a:prstGeom prst="rect">
+            <a:avLst/>
+          </a:prstGeom>
+          <a:noFill/>
+        </p:spPr>
+        <p:txBody>
+          <a:bodyPr wrap="square" anchor="t" lIns="0" rIns="0" tIns="0" bIns="0">
+            <a:spAutoFit/>
+          </a:bodyPr>
+          <a:lstStyle/>
+          <a:p>
+            <a:pPr algn="l"/>
+            <a:r>
+              <a:rPr sz="1000" b="1">
+                <a:solidFill>
+                  <a:srgbClr val="C9A227"/>
+                </a:solidFill>
+              </a:rPr>
+              <a:t>−  </a:t>
+            </a:r>
+            <a:r>
+              <a:rPr sz="1000" b="0">
+                <a:solidFill>
+                  <a:srgbClr val="C9D6EE"/>
+                </a:solidFill>
+              </a:rPr>
+              <a:t>Only as good as the assumptions you fed it.</a:t>
+            </a:r>
+          </a:p>
+        </p:txBody>
+      </p:sp>
+      <p:sp>
+        <p:nvSpPr>
+          <p:cNvPr id="23" name="TextBox 22"/>
+          <p:cNvSpPr txBox="1"/>
+          <p:nvPr/>
+        </p:nvSpPr>
+        <p:spPr>
+          <a:xfrm>
+            <a:off x="548640" y="4718304"/>
+            <a:ext cx="5486400" cy="1005840"/>
+          </a:xfrm>
+          <a:prstGeom prst="rect">
+            <a:avLst/>
+          </a:prstGeom>
+          <a:noFill/>
+        </p:spPr>
+        <p:txBody>
+          <a:bodyPr wrap="square" anchor="t" lIns="0" rIns="0" tIns="0" bIns="0">
+            <a:spAutoFit/>
+          </a:bodyPr>
+          <a:lstStyle/>
+          <a:p>
+            <a:pPr algn="l"/>
+            <a:r>
+              <a:rPr sz="1500" b="1">
+                <a:solidFill>
+                  <a:srgbClr val="0F2145"/>
                 </a:solidFill>
                 <a:latin typeface="Georgia"/>
               </a:rPr>
-              <a:t>Q2</a:t>
-            </a:r>
-          </a:p>
-        </p:txBody>
-      </p:sp>
-      <p:sp>
-        <p:nvSpPr>
-          <p:cNvPr id="12" name="TextBox 11"/>
-          <p:cNvSpPr txBox="1"/>
-          <p:nvPr/>
-        </p:nvSpPr>
-        <p:spPr>
-          <a:xfrm>
-            <a:off x="1554480" y="2231136"/>
-            <a:ext cx="9875520" cy="585216"/>
-          </a:xfrm>
-          <a:prstGeom prst="rect">
-            <a:avLst/>
-          </a:prstGeom>
-          <a:noFill/>
-        </p:spPr>
-        <p:txBody>
-          <a:bodyPr wrap="square" anchor="t" lIns="0" rIns="0" tIns="0" bIns="0">
-            <a:spAutoFit/>
-          </a:bodyPr>
-          <a:lstStyle/>
-          <a:p>
-            <a:pPr algn="l"/>
-            <a:r>
-              <a:rPr sz="1050" b="1">
+              <a:t>CVaR, the question VaR ducks</a:t>
+            </a:r>
+          </a:p>
+          <a:p>
+            <a:pPr algn="l">
+              <a:spcBef>
+                <a:spcPts val="600"/>
+              </a:spcBef>
+            </a:pPr>
+            <a:r>
+              <a:rPr sz="1100" b="0">
                 <a:solidFill>
                   <a:srgbClr val="1B2A41"/>
                 </a:solidFill>
               </a:rPr>
-              <a:t>Explain the difference between expected loss and unexpected loss, and what each is funded by.</a:t>
+              <a:t>VaR tells you the edge of the bad 1%. CVaR tells you the average loss once you are inside it. VaR says ₹6.6 lakh; CVaR might say ₹9.4 lakh.</a:t>
+            </a:r>
+          </a:p>
+        </p:txBody>
+      </p:sp>
+      <p:sp>
+        <p:nvSpPr>
+          <p:cNvPr id="24" name="TextBox 23"/>
+          <p:cNvSpPr txBox="1"/>
+          <p:nvPr/>
+        </p:nvSpPr>
+        <p:spPr>
+          <a:xfrm>
+            <a:off x="6309360" y="4718304"/>
+            <a:ext cx="5330952" cy="1005840"/>
+          </a:xfrm>
+          <a:prstGeom prst="rect">
+            <a:avLst/>
+          </a:prstGeom>
+          <a:noFill/>
+        </p:spPr>
+        <p:txBody>
+          <a:bodyPr wrap="square" anchor="t" lIns="0" rIns="0" tIns="0" bIns="0">
+            <a:spAutoFit/>
+          </a:bodyPr>
+          <a:lstStyle/>
+          <a:p>
+            <a:pPr algn="l"/>
+            <a:r>
+              <a:rPr sz="1500" b="1">
+                <a:solidFill>
+                  <a:srgbClr val="0F2145"/>
+                </a:solidFill>
+                <a:latin typeface="Georgia"/>
+              </a:rPr>
+              <a:t>Basel III asks for both levels</a:t>
+            </a:r>
+          </a:p>
+          <a:p>
+            <a:pPr algn="l">
+              <a:spcBef>
+                <a:spcPts val="600"/>
+              </a:spcBef>
+            </a:pPr>
+            <a:r>
+              <a:rPr sz="1100" b="0">
+                <a:solidFill>
+                  <a:srgbClr val="1B2A41"/>
+                </a:solidFill>
+              </a:rPr>
+              <a:t>95% and 99% are the thresholds you report. Run all three methods on the same portfolio and you get three different answers. That gap is the lesson.</a:t>
+            </a:r>
+          </a:p>
+        </p:txBody>
+      </p:sp>
+      <p:sp>
+        <p:nvSpPr>
+          <p:cNvPr id="25" name="TextBox 24"/>
+          <p:cNvSpPr txBox="1"/>
+          <p:nvPr/>
+        </p:nvSpPr>
+        <p:spPr>
+          <a:xfrm>
+            <a:off x="548640" y="6473952"/>
+            <a:ext cx="7315200" cy="228600"/>
+          </a:xfrm>
+          <a:prstGeom prst="rect">
+            <a:avLst/>
+          </a:prstGeom>
+          <a:noFill/>
+        </p:spPr>
+        <p:txBody>
+          <a:bodyPr wrap="square" anchor="t" lIns="0" rIns="0" tIns="0" bIns="0">
+            <a:spAutoFit/>
+          </a:bodyPr>
+          <a:lstStyle/>
+          <a:p>
+            <a:pPr algn="l"/>
+            <a:r>
+              <a:rPr sz="800" b="0">
+                <a:solidFill>
+                  <a:srgbClr val="5D6B7E"/>
+                </a:solidFill>
+              </a:rPr>
+              <a:t>ISBMS · PGDM 2025–27 · AGENTIC AI &amp; ADVANCED ANALYTICS IN FINANCE</a:t>
+            </a:r>
+          </a:p>
+        </p:txBody>
+      </p:sp>
+      <p:sp>
+        <p:nvSpPr>
+          <p:cNvPr id="26" name="TextBox 25"/>
+          <p:cNvSpPr txBox="1"/>
+          <p:nvPr/>
+        </p:nvSpPr>
+        <p:spPr>
+          <a:xfrm>
+            <a:off x="9262872" y="6473952"/>
+            <a:ext cx="2377440" cy="228600"/>
+          </a:xfrm>
+          <a:prstGeom prst="rect">
+            <a:avLst/>
+          </a:prstGeom>
+          <a:noFill/>
+        </p:spPr>
+        <p:txBody>
+          <a:bodyPr wrap="square" anchor="t" lIns="0" rIns="0" tIns="0" bIns="0">
+            <a:spAutoFit/>
+          </a:bodyPr>
+          <a:lstStyle/>
+          <a:p>
+            <a:pPr algn="r"/>
+            <a:r>
+              <a:rPr sz="800" b="0">
+                <a:solidFill>
+                  <a:srgbClr val="5D6B7E"/>
+                </a:solidFill>
+              </a:rPr>
+              <a:t>MODULE 5  ·  08</a:t>
+            </a:r>
+          </a:p>
+        </p:txBody>
+      </p:sp>
+    </p:spTree>
+  </p:cSld>
+  <p:clrMapOvr>
+    <a:masterClrMapping/>
+  </p:clrMapOvr>
+</p:sld>
+</file>
+
+<file path=ppt/slides/slide9.xml><?xml version="1.0" encoding="utf-8"?>
+<p:sld xmlns:a="http://schemas.openxmlformats.org/drawingml/2006/main" xmlns:p="http://schemas.openxmlformats.org/presentationml/2006/main" xmlns:r="http://schemas.openxmlformats.org/officeDocument/2006/relationships">
+  <p:cSld>
+    <p:bg>
+      <p:bgPr>
+        <a:solidFill>
+          <a:srgbClr val="F7F8FA"/>
+        </a:solidFill>
+        <a:effectLst/>
+      </p:bgPr>
+    </p:bg>
+    <p:spTree>
+      <p:nvGrpSpPr>
+        <p:cNvPr id="1" name=""/>
+        <p:cNvGrpSpPr/>
+        <p:nvPr/>
+      </p:nvGrpSpPr>
+      <p:grpSpPr/>
+      <p:sp>
+        <p:nvSpPr>
+          <p:cNvPr id="2" name="Rectangle 1"/>
+          <p:cNvSpPr/>
+          <p:nvPr/>
+        </p:nvSpPr>
+        <p:spPr>
+          <a:xfrm>
+            <a:off x="548640" y="402336"/>
+            <a:ext cx="118872" cy="118872"/>
+          </a:xfrm>
+          <a:prstGeom prst="rect">
+            <a:avLst/>
+          </a:prstGeom>
+          <a:solidFill>
+            <a:srgbClr val="C9A227"/>
+          </a:solidFill>
+          <a:ln>
+            <a:noFill/>
+          </a:ln>
+          <a:effectLst/>
+        </p:spPr>
+        <p:style>
+          <a:lnRef idx="1">
+            <a:schemeClr val="accent1"/>
+          </a:lnRef>
+          <a:fillRef idx="3">
+            <a:schemeClr val="accent1"/>
+          </a:fillRef>
+          <a:effectRef idx="2">
+            <a:schemeClr val="accent1"/>
+          </a:effectRef>
+          <a:fontRef idx="minor">
+            <a:schemeClr val="lt1"/>
+          </a:fontRef>
+        </p:style>
+        <p:txBody>
+          <a:bodyPr rtlCol="0" anchor="ctr"/>
+          <a:lstStyle/>
+          <a:p>
+            <a:pPr algn="ctr"/>
+          </a:p>
+        </p:txBody>
+      </p:sp>
+      <p:sp>
+        <p:nvSpPr>
+          <p:cNvPr id="3" name="TextBox 2"/>
+          <p:cNvSpPr txBox="1"/>
+          <p:nvPr/>
+        </p:nvSpPr>
+        <p:spPr>
+          <a:xfrm>
+            <a:off x="786384" y="310896"/>
+            <a:ext cx="10817352" cy="274320"/>
+          </a:xfrm>
+          <a:prstGeom prst="rect">
+            <a:avLst/>
+          </a:prstGeom>
+          <a:noFill/>
+        </p:spPr>
+        <p:txBody>
+          <a:bodyPr wrap="square" anchor="t" lIns="0" rIns="0" tIns="0" bIns="0">
+            <a:spAutoFit/>
+          </a:bodyPr>
+          <a:lstStyle/>
+          <a:p>
+            <a:pPr algn="l"/>
+            <a:r>
+              <a:rPr sz="1100" b="1">
+                <a:solidFill>
+                  <a:srgbClr val="C9A227"/>
+                </a:solidFill>
+              </a:rPr>
+              <a:t>HOUR 3 · THE LAB</a:t>
+            </a:r>
+          </a:p>
+        </p:txBody>
+      </p:sp>
+      <p:sp>
+        <p:nvSpPr>
+          <p:cNvPr id="4" name="TextBox 3"/>
+          <p:cNvSpPr txBox="1"/>
+          <p:nvPr/>
+        </p:nvSpPr>
+        <p:spPr>
+          <a:xfrm>
+            <a:off x="548640" y="621792"/>
+            <a:ext cx="11091672" cy="731520"/>
+          </a:xfrm>
+          <a:prstGeom prst="rect">
+            <a:avLst/>
+          </a:prstGeom>
+          <a:noFill/>
+        </p:spPr>
+        <p:txBody>
+          <a:bodyPr wrap="square" anchor="t" lIns="0" rIns="0" tIns="0" bIns="0">
+            <a:spAutoFit/>
+          </a:bodyPr>
+          <a:lstStyle/>
+          <a:p>
+            <a:pPr algn="l"/>
+            <a:r>
+              <a:rPr sz="2900" b="1">
+                <a:solidFill>
+                  <a:srgbClr val="0F2145"/>
+                </a:solidFill>
+                <a:latin typeface="Georgia"/>
+              </a:rPr>
+              <a:t>Build it, compare it, then test it</a:t>
+            </a:r>
+          </a:p>
+        </p:txBody>
+      </p:sp>
+      <p:sp>
+        <p:nvSpPr>
+          <p:cNvPr id="5" name="Rectangle 4"/>
+          <p:cNvSpPr/>
+          <p:nvPr/>
+        </p:nvSpPr>
+        <p:spPr>
+          <a:xfrm>
+            <a:off x="548640" y="1444752"/>
+            <a:ext cx="11091672" cy="621792"/>
+          </a:xfrm>
+          <a:prstGeom prst="rect">
+            <a:avLst/>
+          </a:prstGeom>
+          <a:solidFill>
+            <a:srgbClr val="0B1936"/>
+          </a:solidFill>
+          <a:ln>
+            <a:noFill/>
+          </a:ln>
+          <a:effectLst/>
+        </p:spPr>
+        <p:style>
+          <a:lnRef idx="1">
+            <a:schemeClr val="accent1"/>
+          </a:lnRef>
+          <a:fillRef idx="3">
+            <a:schemeClr val="accent1"/>
+          </a:fillRef>
+          <a:effectRef idx="2">
+            <a:schemeClr val="accent1"/>
+          </a:effectRef>
+          <a:fontRef idx="minor">
+            <a:schemeClr val="lt1"/>
+          </a:fontRef>
+        </p:style>
+        <p:txBody>
+          <a:bodyPr rtlCol="0" anchor="ctr"/>
+          <a:lstStyle/>
+          <a:p>
+            <a:pPr algn="ctr"/>
+          </a:p>
+        </p:txBody>
+      </p:sp>
+      <p:sp>
+        <p:nvSpPr>
+          <p:cNvPr id="6" name="Rectangle 5"/>
+          <p:cNvSpPr/>
+          <p:nvPr/>
+        </p:nvSpPr>
+        <p:spPr>
+          <a:xfrm>
+            <a:off x="548640" y="1444752"/>
+            <a:ext cx="64008" cy="621792"/>
+          </a:xfrm>
+          <a:prstGeom prst="rect">
+            <a:avLst/>
+          </a:prstGeom>
+          <a:solidFill>
+            <a:srgbClr val="C9A227"/>
+          </a:solidFill>
+          <a:ln>
+            <a:noFill/>
+          </a:ln>
+          <a:effectLst/>
+        </p:spPr>
+        <p:style>
+          <a:lnRef idx="1">
+            <a:schemeClr val="accent1"/>
+          </a:lnRef>
+          <a:fillRef idx="3">
+            <a:schemeClr val="accent1"/>
+          </a:fillRef>
+          <a:effectRef idx="2">
+            <a:schemeClr val="accent1"/>
+          </a:effectRef>
+          <a:fontRef idx="minor">
+            <a:schemeClr val="lt1"/>
+          </a:fontRef>
+        </p:style>
+        <p:txBody>
+          <a:bodyPr rtlCol="0" anchor="ctr"/>
+          <a:lstStyle/>
+          <a:p>
+            <a:pPr algn="ctr"/>
+          </a:p>
+        </p:txBody>
+      </p:sp>
+      <p:sp>
+        <p:nvSpPr>
+          <p:cNvPr id="7" name="TextBox 6"/>
+          <p:cNvSpPr txBox="1"/>
+          <p:nvPr/>
+        </p:nvSpPr>
+        <p:spPr>
+          <a:xfrm>
+            <a:off x="868680" y="1444752"/>
+            <a:ext cx="10515600" cy="621792"/>
+          </a:xfrm>
+          <a:prstGeom prst="rect">
+            <a:avLst/>
+          </a:prstGeom>
+          <a:noFill/>
+        </p:spPr>
+        <p:txBody>
+          <a:bodyPr wrap="square" anchor="ctr" lIns="0" rIns="0" tIns="0" bIns="0">
+            <a:spAutoFit/>
+          </a:bodyPr>
+          <a:lstStyle/>
+          <a:p>
+            <a:pPr algn="l"/>
+            <a:r>
+              <a:rPr sz="850" b="1">
+                <a:solidFill>
+                  <a:srgbClr val="C9A227"/>
+                </a:solidFill>
+              </a:rPr>
+              <a:t>THE SENTENCE WE TYPE</a:t>
             </a:r>
           </a:p>
           <a:p>
@@ -11467,34 +13535,27 @@
               </a:spcBef>
             </a:pPr>
             <a:r>
-              <a:rPr sz="900" b="1">
-                <a:solidFill>
-                  <a:srgbClr val="C9A227"/>
-                </a:solidFill>
-              </a:rPr>
-              <a:t>TIP  </a:t>
-            </a:r>
-            <a:r>
-              <a:rPr sz="900" b="0">
-                <a:solidFill>
-                  <a:srgbClr val="5D6B7E"/>
-                </a:solidFill>
-              </a:rPr>
-              <a:t>Expected loss is budgeted and priced in. Unexpected loss is the bad year, and capital is held against it.</a:t>
-            </a:r>
-          </a:p>
-        </p:txBody>
-      </p:sp>
-      <p:sp>
-        <p:nvSpPr>
-          <p:cNvPr id="13" name="Rectangle 12"/>
+              <a:rPr sz="1300" b="1">
+                <a:solidFill>
+                  <a:srgbClr val="FFFFFF"/>
+                </a:solidFill>
+                <a:latin typeface="Georgia"/>
+              </a:rPr>
+              <a:t>“Build a Monte Carlo VaR engine for five NSE stocks, run 10,000 paths, and give me 95% and 99% VaR and CVaR.”</a:t>
+            </a:r>
+          </a:p>
+        </p:txBody>
+      </p:sp>
+      <p:sp>
+        <p:nvSpPr>
+          <p:cNvPr id="8" name="Rectangle 7"/>
           <p:cNvSpPr/>
           <p:nvPr/>
         </p:nvSpPr>
         <p:spPr>
           <a:xfrm>
-            <a:off x="548640" y="2907791"/>
-            <a:ext cx="11091672" cy="676656"/>
+            <a:off x="548640" y="2212848"/>
+            <a:ext cx="3611880" cy="3054096"/>
           </a:xfrm>
           <a:prstGeom prst="rect">
             <a:avLst/>
@@ -11531,150 +13592,251 @@
       </p:sp>
       <p:sp>
         <p:nvSpPr>
-          <p:cNvPr id="14" name="Rectangle 13"/>
+          <p:cNvPr id="9" name="TextBox 8"/>
+          <p:cNvSpPr txBox="1"/>
+          <p:nvPr/>
+        </p:nvSpPr>
+        <p:spPr>
+          <a:xfrm>
+            <a:off x="804672" y="2414016"/>
+            <a:ext cx="3099816" cy="274320"/>
+          </a:xfrm>
+          <a:prstGeom prst="rect">
+            <a:avLst/>
+          </a:prstGeom>
+          <a:noFill/>
+        </p:spPr>
+        <p:txBody>
+          <a:bodyPr wrap="square" anchor="t" lIns="0" rIns="0" tIns="0" bIns="0">
+            <a:spAutoFit/>
+          </a:bodyPr>
+          <a:lstStyle/>
+          <a:p>
+            <a:pPr algn="l"/>
+            <a:r>
+              <a:rPr sz="950" b="1">
+                <a:solidFill>
+                  <a:srgbClr val="3A5C9E"/>
+                </a:solidFill>
+              </a:rPr>
+              <a:t>PART A  ·  35 MIN</a:t>
+            </a:r>
+          </a:p>
+        </p:txBody>
+      </p:sp>
+      <p:sp>
+        <p:nvSpPr>
+          <p:cNvPr id="10" name="TextBox 9"/>
+          <p:cNvSpPr txBox="1"/>
+          <p:nvPr/>
+        </p:nvSpPr>
+        <p:spPr>
+          <a:xfrm>
+            <a:off x="804672" y="2724912"/>
+            <a:ext cx="3099816" cy="402336"/>
+          </a:xfrm>
+          <a:prstGeom prst="rect">
+            <a:avLst/>
+          </a:prstGeom>
+          <a:noFill/>
+        </p:spPr>
+        <p:txBody>
+          <a:bodyPr wrap="square" anchor="t" lIns="0" rIns="0" tIns="0" bIns="0">
+            <a:spAutoFit/>
+          </a:bodyPr>
+          <a:lstStyle/>
+          <a:p>
+            <a:pPr algn="l"/>
+            <a:r>
+              <a:rPr sz="1700" b="1">
+                <a:solidFill>
+                  <a:srgbClr val="0F2145"/>
+                </a:solidFill>
+                <a:latin typeface="Georgia"/>
+              </a:rPr>
+              <a:t>Build it</a:t>
+            </a:r>
+          </a:p>
+        </p:txBody>
+      </p:sp>
+      <p:sp>
+        <p:nvSpPr>
+          <p:cNvPr id="11" name="TextBox 10"/>
+          <p:cNvSpPr txBox="1"/>
+          <p:nvPr/>
+        </p:nvSpPr>
+        <p:spPr>
+          <a:xfrm>
+            <a:off x="804672" y="3255264"/>
+            <a:ext cx="3099816" cy="493776"/>
+          </a:xfrm>
+          <a:prstGeom prst="rect">
+            <a:avLst/>
+          </a:prstGeom>
+          <a:noFill/>
+        </p:spPr>
+        <p:txBody>
+          <a:bodyPr wrap="square" anchor="t" lIns="0" rIns="0" tIns="0" bIns="0">
+            <a:spAutoFit/>
+          </a:bodyPr>
+          <a:lstStyle/>
+          <a:p>
+            <a:pPr algn="l"/>
+            <a:r>
+              <a:rPr sz="1000" b="1">
+                <a:solidFill>
+                  <a:srgbClr val="C9A227"/>
+                </a:solidFill>
+              </a:rPr>
+              <a:t>▪  </a:t>
+            </a:r>
+            <a:r>
+              <a:rPr sz="1000" b="0">
+                <a:solidFill>
+                  <a:srgbClr val="1B2A41"/>
+                </a:solidFill>
+              </a:rPr>
+              <a:t>Five NSE stocks, two years of daily returns</a:t>
+            </a:r>
+          </a:p>
+        </p:txBody>
+      </p:sp>
+      <p:sp>
+        <p:nvSpPr>
+          <p:cNvPr id="12" name="TextBox 11"/>
+          <p:cNvSpPr txBox="1"/>
+          <p:nvPr/>
+        </p:nvSpPr>
+        <p:spPr>
+          <a:xfrm>
+            <a:off x="804672" y="3767328"/>
+            <a:ext cx="3099816" cy="493776"/>
+          </a:xfrm>
+          <a:prstGeom prst="rect">
+            <a:avLst/>
+          </a:prstGeom>
+          <a:noFill/>
+        </p:spPr>
+        <p:txBody>
+          <a:bodyPr wrap="square" anchor="t" lIns="0" rIns="0" tIns="0" bIns="0">
+            <a:spAutoFit/>
+          </a:bodyPr>
+          <a:lstStyle/>
+          <a:p>
+            <a:pPr algn="l"/>
+            <a:r>
+              <a:rPr sz="1000" b="1">
+                <a:solidFill>
+                  <a:srgbClr val="C9A227"/>
+                </a:solidFill>
+              </a:rPr>
+              <a:t>▪  </a:t>
+            </a:r>
+            <a:r>
+              <a:rPr sz="1000" b="0">
+                <a:solidFill>
+                  <a:srgbClr val="1B2A41"/>
+                </a:solidFill>
+              </a:rPr>
+              <a:t>Each stock's volatility, and how the five move together</a:t>
+            </a:r>
+          </a:p>
+        </p:txBody>
+      </p:sp>
+      <p:sp>
+        <p:nvSpPr>
+          <p:cNvPr id="13" name="TextBox 12"/>
+          <p:cNvSpPr txBox="1"/>
+          <p:nvPr/>
+        </p:nvSpPr>
+        <p:spPr>
+          <a:xfrm>
+            <a:off x="804672" y="4279392"/>
+            <a:ext cx="3099816" cy="493776"/>
+          </a:xfrm>
+          <a:prstGeom prst="rect">
+            <a:avLst/>
+          </a:prstGeom>
+          <a:noFill/>
+        </p:spPr>
+        <p:txBody>
+          <a:bodyPr wrap="square" anchor="t" lIns="0" rIns="0" tIns="0" bIns="0">
+            <a:spAutoFit/>
+          </a:bodyPr>
+          <a:lstStyle/>
+          <a:p>
+            <a:pPr algn="l"/>
+            <a:r>
+              <a:rPr sz="1000" b="1">
+                <a:solidFill>
+                  <a:srgbClr val="C9A227"/>
+                </a:solidFill>
+              </a:rPr>
+              <a:t>▪  </a:t>
+            </a:r>
+            <a:r>
+              <a:rPr sz="1000" b="0">
+                <a:solidFill>
+                  <a:srgbClr val="1B2A41"/>
+                </a:solidFill>
+              </a:rPr>
+              <a:t>Ten thousand simulated tomorrows</a:t>
+            </a:r>
+          </a:p>
+        </p:txBody>
+      </p:sp>
+      <p:sp>
+        <p:nvSpPr>
+          <p:cNvPr id="14" name="TextBox 13"/>
+          <p:cNvSpPr txBox="1"/>
+          <p:nvPr/>
+        </p:nvSpPr>
+        <p:spPr>
+          <a:xfrm>
+            <a:off x="804672" y="4791456"/>
+            <a:ext cx="3099816" cy="493776"/>
+          </a:xfrm>
+          <a:prstGeom prst="rect">
+            <a:avLst/>
+          </a:prstGeom>
+          <a:noFill/>
+        </p:spPr>
+        <p:txBody>
+          <a:bodyPr wrap="square" anchor="t" lIns="0" rIns="0" tIns="0" bIns="0">
+            <a:spAutoFit/>
+          </a:bodyPr>
+          <a:lstStyle/>
+          <a:p>
+            <a:pPr algn="l"/>
+            <a:r>
+              <a:rPr sz="1000" b="1">
+                <a:solidFill>
+                  <a:srgbClr val="C9A227"/>
+                </a:solidFill>
+              </a:rPr>
+              <a:t>▪  </a:t>
+            </a:r>
+            <a:r>
+              <a:rPr sz="1000" b="0">
+                <a:solidFill>
+                  <a:srgbClr val="1B2A41"/>
+                </a:solidFill>
+              </a:rPr>
+              <a:t>Sort them: the 100th worst is your 99% VaR, and the tail past it is CVaR</a:t>
+            </a:r>
+          </a:p>
+        </p:txBody>
+      </p:sp>
+      <p:sp>
+        <p:nvSpPr>
+          <p:cNvPr id="15" name="Rectangle 14"/>
           <p:cNvSpPr/>
           <p:nvPr/>
         </p:nvSpPr>
         <p:spPr>
           <a:xfrm>
-            <a:off x="548640" y="2907791"/>
-            <a:ext cx="64008" cy="676656"/>
-          </a:xfrm>
-          <a:prstGeom prst="rect">
-            <a:avLst/>
-          </a:prstGeom>
-          <a:solidFill>
-            <a:srgbClr val="3A5C9E"/>
-          </a:solidFill>
-          <a:ln>
-            <a:noFill/>
-          </a:ln>
-          <a:effectLst/>
-        </p:spPr>
-        <p:style>
-          <a:lnRef idx="1">
-            <a:schemeClr val="accent1"/>
-          </a:lnRef>
-          <a:fillRef idx="3">
-            <a:schemeClr val="accent1"/>
-          </a:fillRef>
-          <a:effectRef idx="2">
-            <a:schemeClr val="accent1"/>
-          </a:effectRef>
-          <a:fontRef idx="minor">
-            <a:schemeClr val="lt1"/>
-          </a:fontRef>
-        </p:style>
-        <p:txBody>
-          <a:bodyPr rtlCol="0" anchor="ctr"/>
-          <a:lstStyle/>
-          <a:p>
-            <a:pPr algn="ctr"/>
-          </a:p>
-        </p:txBody>
-      </p:sp>
-      <p:sp>
-        <p:nvSpPr>
-          <p:cNvPr id="15" name="TextBox 14"/>
-          <p:cNvSpPr txBox="1"/>
-          <p:nvPr/>
-        </p:nvSpPr>
-        <p:spPr>
-          <a:xfrm>
-            <a:off x="822960" y="2971799"/>
-            <a:ext cx="640080" cy="365760"/>
-          </a:xfrm>
-          <a:prstGeom prst="rect">
-            <a:avLst/>
-          </a:prstGeom>
-          <a:noFill/>
-        </p:spPr>
-        <p:txBody>
-          <a:bodyPr wrap="square" anchor="t" lIns="0" rIns="0" tIns="0" bIns="0">
-            <a:spAutoFit/>
-          </a:bodyPr>
-          <a:lstStyle/>
-          <a:p>
-            <a:pPr algn="l"/>
-            <a:r>
-              <a:rPr sz="1400" b="1">
-                <a:solidFill>
-                  <a:srgbClr val="3A5C9E"/>
-                </a:solidFill>
-                <a:latin typeface="Georgia"/>
-              </a:rPr>
-              <a:t>Q3</a:t>
-            </a:r>
-          </a:p>
-        </p:txBody>
-      </p:sp>
-      <p:sp>
-        <p:nvSpPr>
-          <p:cNvPr id="16" name="TextBox 15"/>
-          <p:cNvSpPr txBox="1"/>
-          <p:nvPr/>
-        </p:nvSpPr>
-        <p:spPr>
-          <a:xfrm>
-            <a:off x="1554480" y="2962656"/>
-            <a:ext cx="9875520" cy="585216"/>
-          </a:xfrm>
-          <a:prstGeom prst="rect">
-            <a:avLst/>
-          </a:prstGeom>
-          <a:noFill/>
-        </p:spPr>
-        <p:txBody>
-          <a:bodyPr wrap="square" anchor="t" lIns="0" rIns="0" tIns="0" bIns="0">
-            <a:spAutoFit/>
-          </a:bodyPr>
-          <a:lstStyle/>
-          <a:p>
-            <a:pPr algn="l"/>
-            <a:r>
-              <a:rPr sz="1050" b="1">
-                <a:solidFill>
-                  <a:srgbClr val="1B2A41"/>
-                </a:solidFill>
-              </a:rPr>
-              <a:t>A PD model scores AUC 0.78. Say what that means without using the word AUC.</a:t>
-            </a:r>
-          </a:p>
-          <a:p>
-            <a:pPr algn="l">
-              <a:spcBef>
-                <a:spcPts val="200"/>
-              </a:spcBef>
-            </a:pPr>
-            <a:r>
-              <a:rPr sz="900" b="1">
-                <a:solidFill>
-                  <a:srgbClr val="C9A227"/>
-                </a:solidFill>
-              </a:rPr>
-              <a:t>TIP  </a:t>
-            </a:r>
-            <a:r>
-              <a:rPr sz="900" b="0">
-                <a:solidFill>
-                  <a:srgbClr val="5D6B7E"/>
-                </a:solidFill>
-              </a:rPr>
-              <a:t>Take a defaulter and a non-defaulter at random; 78 times in 100 the model scores the defaulter as riskier.</a:t>
-            </a:r>
-          </a:p>
-        </p:txBody>
-      </p:sp>
-      <p:sp>
-        <p:nvSpPr>
-          <p:cNvPr id="17" name="Rectangle 16"/>
-          <p:cNvSpPr/>
-          <p:nvPr/>
-        </p:nvSpPr>
-        <p:spPr>
-          <a:xfrm>
-            <a:off x="548640" y="3639311"/>
-            <a:ext cx="11091672" cy="676656"/>
+            <a:off x="4315968" y="2212848"/>
+            <a:ext cx="3611880" cy="3054096"/>
           </a:xfrm>
           <a:prstGeom prst="rect">
             <a:avLst/>
@@ -11711,45 +13873,112 @@
       </p:sp>
       <p:sp>
         <p:nvSpPr>
-          <p:cNvPr id="18" name="Rectangle 17"/>
-          <p:cNvSpPr/>
-          <p:nvPr/>
-        </p:nvSpPr>
-        <p:spPr>
-          <a:xfrm>
-            <a:off x="548640" y="3639311"/>
-            <a:ext cx="64008" cy="676656"/>
-          </a:xfrm>
-          <a:prstGeom prst="rect">
-            <a:avLst/>
-          </a:prstGeom>
-          <a:solidFill>
-            <a:srgbClr val="3A5C9E"/>
-          </a:solidFill>
-          <a:ln>
-            <a:noFill/>
-          </a:ln>
-          <a:effectLst/>
-        </p:spPr>
-        <p:style>
-          <a:lnRef idx="1">
-            <a:schemeClr val="accent1"/>
-          </a:lnRef>
-          <a:fillRef idx="3">
-            <a:schemeClr val="accent1"/>
-          </a:fillRef>
-          <a:effectRef idx="2">
-            <a:schemeClr val="accent1"/>
-          </a:effectRef>
-          <a:fontRef idx="minor">
-            <a:schemeClr val="lt1"/>
-          </a:fontRef>
-        </p:style>
-        <p:txBody>
-          <a:bodyPr rtlCol="0" anchor="ctr"/>
-          <a:lstStyle/>
-          <a:p>
-            <a:pPr algn="ctr"/>
+          <p:cNvPr id="16" name="TextBox 15"/>
+          <p:cNvSpPr txBox="1"/>
+          <p:nvPr/>
+        </p:nvSpPr>
+        <p:spPr>
+          <a:xfrm>
+            <a:off x="4572000" y="2414016"/>
+            <a:ext cx="3099816" cy="274320"/>
+          </a:xfrm>
+          <a:prstGeom prst="rect">
+            <a:avLst/>
+          </a:prstGeom>
+          <a:noFill/>
+        </p:spPr>
+        <p:txBody>
+          <a:bodyPr wrap="square" anchor="t" lIns="0" rIns="0" tIns="0" bIns="0">
+            <a:spAutoFit/>
+          </a:bodyPr>
+          <a:lstStyle/>
+          <a:p>
+            <a:pPr algn="l"/>
+            <a:r>
+              <a:rPr sz="950" b="1">
+                <a:solidFill>
+                  <a:srgbClr val="3A5C9E"/>
+                </a:solidFill>
+              </a:rPr>
+              <a:t>PART B  ·  10 MIN</a:t>
+            </a:r>
+          </a:p>
+        </p:txBody>
+      </p:sp>
+      <p:sp>
+        <p:nvSpPr>
+          <p:cNvPr id="17" name="TextBox 16"/>
+          <p:cNvSpPr txBox="1"/>
+          <p:nvPr/>
+        </p:nvSpPr>
+        <p:spPr>
+          <a:xfrm>
+            <a:off x="4572000" y="2724912"/>
+            <a:ext cx="3099816" cy="402336"/>
+          </a:xfrm>
+          <a:prstGeom prst="rect">
+            <a:avLst/>
+          </a:prstGeom>
+          <a:noFill/>
+        </p:spPr>
+        <p:txBody>
+          <a:bodyPr wrap="square" anchor="t" lIns="0" rIns="0" tIns="0" bIns="0">
+            <a:spAutoFit/>
+          </a:bodyPr>
+          <a:lstStyle/>
+          <a:p>
+            <a:pPr algn="l"/>
+            <a:r>
+              <a:rPr sz="1700" b="1">
+                <a:solidFill>
+                  <a:srgbClr val="0F2145"/>
+                </a:solidFill>
+                <a:latin typeface="Georgia"/>
+              </a:rPr>
+              <a:t>Compare it</a:t>
+            </a:r>
+          </a:p>
+        </p:txBody>
+      </p:sp>
+      <p:sp>
+        <p:nvSpPr>
+          <p:cNvPr id="18" name="TextBox 17"/>
+          <p:cNvSpPr txBox="1"/>
+          <p:nvPr/>
+        </p:nvSpPr>
+        <p:spPr>
+          <a:xfrm>
+            <a:off x="4572000" y="3255264"/>
+            <a:ext cx="3099816" cy="493776"/>
+          </a:xfrm>
+          <a:prstGeom prst="rect">
+            <a:avLst/>
+          </a:prstGeom>
+          <a:noFill/>
+        </p:spPr>
+        <p:txBody>
+          <a:bodyPr wrap="square" anchor="t" lIns="0" rIns="0" tIns="0" bIns="0">
+            <a:spAutoFit/>
+          </a:bodyPr>
+          <a:lstStyle/>
+          <a:p>
+            <a:pPr algn="l"/>
+            <a:r>
+              <a:rPr sz="1000" b="1">
+                <a:solidFill>
+                  <a:srgbClr val="C9A227"/>
+                </a:solidFill>
+              </a:rPr>
+              <a:t>▪  </a:t>
+            </a:r>
+            <a:r>
+              <a:rPr sz="1000" b="0">
+                <a:solidFill>
+                  <a:srgbClr val="1B2A41"/>
+                </a:solidFill>
+              </a:rPr>
+              <a:t>Run the same portfolio through historical and parametric</a:t>
+            </a:r>
           </a:p>
         </p:txBody>
       </p:sp>
@@ -11761,29 +13990,36 @@
         </p:nvSpPr>
         <p:spPr>
           <a:xfrm>
-            <a:off x="822960" y="3703320"/>
-            <a:ext cx="640080" cy="365760"/>
-          </a:xfrm>
-          <a:prstGeom prst="rect">
-            <a:avLst/>
-          </a:prstGeom>
-          <a:noFill/>
-        </p:spPr>
-        <p:txBody>
-          <a:bodyPr wrap="square" anchor="t" lIns="0" rIns="0" tIns="0" bIns="0">
-            <a:spAutoFit/>
-          </a:bodyPr>
-          <a:lstStyle/>
-          <a:p>
-            <a:pPr algn="l"/>
-            <a:r>
-              <a:rPr sz="1400" b="1">
-                <a:solidFill>
-                  <a:srgbClr val="3A5C9E"/>
-                </a:solidFill>
-                <a:latin typeface="Georgia"/>
-              </a:rPr>
-              <a:t>Q4</a:t>
+            <a:off x="4572000" y="3767328"/>
+            <a:ext cx="3099816" cy="493776"/>
+          </a:xfrm>
+          <a:prstGeom prst="rect">
+            <a:avLst/>
+          </a:prstGeom>
+          <a:noFill/>
+        </p:spPr>
+        <p:txBody>
+          <a:bodyPr wrap="square" anchor="t" lIns="0" rIns="0" tIns="0" bIns="0">
+            <a:spAutoFit/>
+          </a:bodyPr>
+          <a:lstStyle/>
+          <a:p>
+            <a:pPr algn="l"/>
+            <a:r>
+              <a:rPr sz="1000" b="1">
+                <a:solidFill>
+                  <a:srgbClr val="C9A227"/>
+                </a:solidFill>
+              </a:rPr>
+              <a:t>▪  </a:t>
+            </a:r>
+            <a:r>
+              <a:rPr sz="1000" b="0">
+                <a:solidFill>
+                  <a:srgbClr val="1B2A41"/>
+                </a:solidFill>
+              </a:rPr>
+              <a:t>Three methods, three different answers</a:t>
             </a:r>
           </a:p>
         </p:txBody>
@@ -11796,96 +14032,79 @@
         </p:nvSpPr>
         <p:spPr>
           <a:xfrm>
-            <a:off x="1554480" y="3694175"/>
-            <a:ext cx="9875520" cy="585216"/>
-          </a:xfrm>
-          <a:prstGeom prst="rect">
-            <a:avLst/>
-          </a:prstGeom>
-          <a:noFill/>
-        </p:spPr>
-        <p:txBody>
-          <a:bodyPr wrap="square" anchor="t" lIns="0" rIns="0" tIns="0" bIns="0">
-            <a:spAutoFit/>
-          </a:bodyPr>
-          <a:lstStyle/>
-          <a:p>
-            <a:pPr algn="l"/>
-            <a:r>
-              <a:rPr sz="1050" b="1">
+            <a:off x="4572000" y="4279392"/>
+            <a:ext cx="3099816" cy="493776"/>
+          </a:xfrm>
+          <a:prstGeom prst="rect">
+            <a:avLst/>
+          </a:prstGeom>
+          <a:noFill/>
+        </p:spPr>
+        <p:txBody>
+          <a:bodyPr wrap="square" anchor="t" lIns="0" rIns="0" tIns="0" bIns="0">
+            <a:spAutoFit/>
+          </a:bodyPr>
+          <a:lstStyle/>
+          <a:p>
+            <a:pPr algn="l"/>
+            <a:r>
+              <a:rPr sz="1000" b="1">
+                <a:solidFill>
+                  <a:srgbClr val="C9A227"/>
+                </a:solidFill>
+              </a:rPr>
+              <a:t>▪  </a:t>
+            </a:r>
+            <a:r>
+              <a:rPr sz="1000" b="0">
                 <a:solidFill>
                   <a:srgbClr val="1B2A41"/>
                 </a:solidFill>
               </a:rPr>
-              <a:t>Your XGBoost model beats the logistic regression. Give one reason you might still ship the regression.</a:t>
-            </a:r>
-          </a:p>
-          <a:p>
-            <a:pPr algn="l">
-              <a:spcBef>
-                <a:spcPts val="200"/>
-              </a:spcBef>
-            </a:pPr>
-            <a:r>
-              <a:rPr sz="900" b="1">
+              <a:t>Which one do you report, and why that one?</a:t>
+            </a:r>
+          </a:p>
+        </p:txBody>
+      </p:sp>
+      <p:sp>
+        <p:nvSpPr>
+          <p:cNvPr id="21" name="TextBox 20"/>
+          <p:cNvSpPr txBox="1"/>
+          <p:nvPr/>
+        </p:nvSpPr>
+        <p:spPr>
+          <a:xfrm>
+            <a:off x="4572000" y="4791456"/>
+            <a:ext cx="3099816" cy="493776"/>
+          </a:xfrm>
+          <a:prstGeom prst="rect">
+            <a:avLst/>
+          </a:prstGeom>
+          <a:noFill/>
+        </p:spPr>
+        <p:txBody>
+          <a:bodyPr wrap="square" anchor="t" lIns="0" rIns="0" tIns="0" bIns="0">
+            <a:spAutoFit/>
+          </a:bodyPr>
+          <a:lstStyle/>
+          <a:p>
+            <a:pPr algn="l"/>
+            <a:r>
+              <a:rPr sz="1000" b="1">
                 <a:solidFill>
                   <a:srgbClr val="C9A227"/>
                 </a:solidFill>
               </a:rPr>
-              <a:t>TIP  </a:t>
-            </a:r>
-            <a:r>
-              <a:rPr sz="900" b="0">
-                <a:solidFill>
-                  <a:srgbClr val="5D6B7E"/>
-                </a:solidFill>
-              </a:rPr>
-              <a:t>You can print it, explain a single decline, and defend it to a regulator. Accuracy is not the only test.</a:t>
-            </a:r>
-          </a:p>
-        </p:txBody>
-      </p:sp>
-      <p:sp>
-        <p:nvSpPr>
-          <p:cNvPr id="21" name="Rectangle 20"/>
-          <p:cNvSpPr/>
-          <p:nvPr/>
-        </p:nvSpPr>
-        <p:spPr>
-          <a:xfrm>
-            <a:off x="548640" y="4370831"/>
-            <a:ext cx="11091672" cy="676656"/>
-          </a:xfrm>
-          <a:prstGeom prst="rect">
-            <a:avLst/>
-          </a:prstGeom>
-          <a:solidFill>
-            <a:srgbClr val="FFFFFF"/>
-          </a:solidFill>
-          <a:ln>
-            <a:noFill/>
-          </a:ln>
-          <a:effectLst/>
-        </p:spPr>
-        <p:style>
-          <a:lnRef idx="1">
-            <a:schemeClr val="accent1"/>
-          </a:lnRef>
-          <a:fillRef idx="3">
-            <a:schemeClr val="accent1"/>
-          </a:fillRef>
-          <a:effectRef idx="2">
-            <a:schemeClr val="accent1"/>
-          </a:effectRef>
-          <a:fontRef idx="minor">
-            <a:schemeClr val="lt1"/>
-          </a:fontRef>
-        </p:style>
-        <p:txBody>
-          <a:bodyPr rtlCol="0" anchor="ctr"/>
-          <a:lstStyle/>
-          <a:p>
-            <a:pPr algn="ctr"/>
+              <a:t>▪  </a:t>
+            </a:r>
+            <a:r>
+              <a:rPr sz="1000" b="0">
+                <a:solidFill>
+                  <a:srgbClr val="1B2A41"/>
+                </a:solidFill>
+              </a:rPr>
+              <a:t>The gap between them is your uncertainty, made visible</a:t>
+            </a:r>
           </a:p>
         </p:txBody>
       </p:sp>
@@ -11897,324 +14116,8 @@
         </p:nvSpPr>
         <p:spPr>
           <a:xfrm>
-            <a:off x="548640" y="4370831"/>
-            <a:ext cx="64008" cy="676656"/>
-          </a:xfrm>
-          <a:prstGeom prst="rect">
-            <a:avLst/>
-          </a:prstGeom>
-          <a:solidFill>
-            <a:srgbClr val="3A5C9E"/>
-          </a:solidFill>
-          <a:ln>
-            <a:noFill/>
-          </a:ln>
-          <a:effectLst/>
-        </p:spPr>
-        <p:style>
-          <a:lnRef idx="1">
-            <a:schemeClr val="accent1"/>
-          </a:lnRef>
-          <a:fillRef idx="3">
-            <a:schemeClr val="accent1"/>
-          </a:fillRef>
-          <a:effectRef idx="2">
-            <a:schemeClr val="accent1"/>
-          </a:effectRef>
-          <a:fontRef idx="minor">
-            <a:schemeClr val="lt1"/>
-          </a:fontRef>
-        </p:style>
-        <p:txBody>
-          <a:bodyPr rtlCol="0" anchor="ctr"/>
-          <a:lstStyle/>
-          <a:p>
-            <a:pPr algn="ctr"/>
-          </a:p>
-        </p:txBody>
-      </p:sp>
-      <p:sp>
-        <p:nvSpPr>
-          <p:cNvPr id="23" name="TextBox 22"/>
-          <p:cNvSpPr txBox="1"/>
-          <p:nvPr/>
-        </p:nvSpPr>
-        <p:spPr>
-          <a:xfrm>
-            <a:off x="822960" y="4434840"/>
-            <a:ext cx="640080" cy="365760"/>
-          </a:xfrm>
-          <a:prstGeom prst="rect">
-            <a:avLst/>
-          </a:prstGeom>
-          <a:noFill/>
-        </p:spPr>
-        <p:txBody>
-          <a:bodyPr wrap="square" anchor="t" lIns="0" rIns="0" tIns="0" bIns="0">
-            <a:spAutoFit/>
-          </a:bodyPr>
-          <a:lstStyle/>
-          <a:p>
-            <a:pPr algn="l"/>
-            <a:r>
-              <a:rPr sz="1400" b="1">
-                <a:solidFill>
-                  <a:srgbClr val="3A5C9E"/>
-                </a:solidFill>
-                <a:latin typeface="Georgia"/>
-              </a:rPr>
-              <a:t>Q5</a:t>
-            </a:r>
-          </a:p>
-        </p:txBody>
-      </p:sp>
-      <p:sp>
-        <p:nvSpPr>
-          <p:cNvPr id="24" name="TextBox 23"/>
-          <p:cNvSpPr txBox="1"/>
-          <p:nvPr/>
-        </p:nvSpPr>
-        <p:spPr>
-          <a:xfrm>
-            <a:off x="1554480" y="4425695"/>
-            <a:ext cx="9875520" cy="585216"/>
-          </a:xfrm>
-          <a:prstGeom prst="rect">
-            <a:avLst/>
-          </a:prstGeom>
-          <a:noFill/>
-        </p:spPr>
-        <p:txBody>
-          <a:bodyPr wrap="square" anchor="t" lIns="0" rIns="0" tIns="0" bIns="0">
-            <a:spAutoFit/>
-          </a:bodyPr>
-          <a:lstStyle/>
-          <a:p>
-            <a:pPr algn="l"/>
-            <a:r>
-              <a:rPr sz="1050" b="1">
-                <a:solidFill>
-                  <a:srgbClr val="1B2A41"/>
-                </a:solidFill>
-              </a:rPr>
-              <a:t>Historical, parametric and Monte Carlo give three different VaRs on one portfolio. Why, and which do you report?</a:t>
-            </a:r>
-          </a:p>
-          <a:p>
-            <a:pPr algn="l">
-              <a:spcBef>
-                <a:spcPts val="200"/>
-              </a:spcBef>
-            </a:pPr>
-            <a:r>
-              <a:rPr sz="900" b="1">
-                <a:solidFill>
-                  <a:srgbClr val="C9A227"/>
-                </a:solidFill>
-              </a:rPr>
-              <a:t>TIP  </a:t>
-            </a:r>
-            <a:r>
-              <a:rPr sz="900" b="0">
-                <a:solidFill>
-                  <a:srgbClr val="5D6B7E"/>
-                </a:solidFill>
-              </a:rPr>
-              <a:t>Each assumes something different about returns. Report the method your policy names, and disclose the other two.</a:t>
-            </a:r>
-          </a:p>
-        </p:txBody>
-      </p:sp>
-      <p:sp>
-        <p:nvSpPr>
-          <p:cNvPr id="25" name="Rectangle 24"/>
-          <p:cNvSpPr/>
-          <p:nvPr/>
-        </p:nvSpPr>
-        <p:spPr>
-          <a:xfrm>
-            <a:off x="548640" y="5102351"/>
-            <a:ext cx="11091672" cy="676656"/>
-          </a:xfrm>
-          <a:prstGeom prst="rect">
-            <a:avLst/>
-          </a:prstGeom>
-          <a:solidFill>
-            <a:srgbClr val="FFFFFF"/>
-          </a:solidFill>
-          <a:ln>
-            <a:noFill/>
-          </a:ln>
-          <a:effectLst/>
-        </p:spPr>
-        <p:style>
-          <a:lnRef idx="1">
-            <a:schemeClr val="accent1"/>
-          </a:lnRef>
-          <a:fillRef idx="3">
-            <a:schemeClr val="accent1"/>
-          </a:fillRef>
-          <a:effectRef idx="2">
-            <a:schemeClr val="accent1"/>
-          </a:effectRef>
-          <a:fontRef idx="minor">
-            <a:schemeClr val="lt1"/>
-          </a:fontRef>
-        </p:style>
-        <p:txBody>
-          <a:bodyPr rtlCol="0" anchor="ctr"/>
-          <a:lstStyle/>
-          <a:p>
-            <a:pPr algn="ctr"/>
-          </a:p>
-        </p:txBody>
-      </p:sp>
-      <p:sp>
-        <p:nvSpPr>
-          <p:cNvPr id="26" name="Rectangle 25"/>
-          <p:cNvSpPr/>
-          <p:nvPr/>
-        </p:nvSpPr>
-        <p:spPr>
-          <a:xfrm>
-            <a:off x="548640" y="5102351"/>
-            <a:ext cx="64008" cy="676656"/>
-          </a:xfrm>
-          <a:prstGeom prst="rect">
-            <a:avLst/>
-          </a:prstGeom>
-          <a:solidFill>
-            <a:srgbClr val="3A5C9E"/>
-          </a:solidFill>
-          <a:ln>
-            <a:noFill/>
-          </a:ln>
-          <a:effectLst/>
-        </p:spPr>
-        <p:style>
-          <a:lnRef idx="1">
-            <a:schemeClr val="accent1"/>
-          </a:lnRef>
-          <a:fillRef idx="3">
-            <a:schemeClr val="accent1"/>
-          </a:fillRef>
-          <a:effectRef idx="2">
-            <a:schemeClr val="accent1"/>
-          </a:effectRef>
-          <a:fontRef idx="minor">
-            <a:schemeClr val="lt1"/>
-          </a:fontRef>
-        </p:style>
-        <p:txBody>
-          <a:bodyPr rtlCol="0" anchor="ctr"/>
-          <a:lstStyle/>
-          <a:p>
-            <a:pPr algn="ctr"/>
-          </a:p>
-        </p:txBody>
-      </p:sp>
-      <p:sp>
-        <p:nvSpPr>
-          <p:cNvPr id="27" name="TextBox 26"/>
-          <p:cNvSpPr txBox="1"/>
-          <p:nvPr/>
-        </p:nvSpPr>
-        <p:spPr>
-          <a:xfrm>
-            <a:off x="822960" y="5166359"/>
-            <a:ext cx="640080" cy="365760"/>
-          </a:xfrm>
-          <a:prstGeom prst="rect">
-            <a:avLst/>
-          </a:prstGeom>
-          <a:noFill/>
-        </p:spPr>
-        <p:txBody>
-          <a:bodyPr wrap="square" anchor="t" lIns="0" rIns="0" tIns="0" bIns="0">
-            <a:spAutoFit/>
-          </a:bodyPr>
-          <a:lstStyle/>
-          <a:p>
-            <a:pPr algn="l"/>
-            <a:r>
-              <a:rPr sz="1400" b="1">
-                <a:solidFill>
-                  <a:srgbClr val="3A5C9E"/>
-                </a:solidFill>
-                <a:latin typeface="Georgia"/>
-              </a:rPr>
-              <a:t>Q6</a:t>
-            </a:r>
-          </a:p>
-        </p:txBody>
-      </p:sp>
-      <p:sp>
-        <p:nvSpPr>
-          <p:cNvPr id="28" name="TextBox 27"/>
-          <p:cNvSpPr txBox="1"/>
-          <p:nvPr/>
-        </p:nvSpPr>
-        <p:spPr>
-          <a:xfrm>
-            <a:off x="1554480" y="5157215"/>
-            <a:ext cx="9875520" cy="585216"/>
-          </a:xfrm>
-          <a:prstGeom prst="rect">
-            <a:avLst/>
-          </a:prstGeom>
-          <a:noFill/>
-        </p:spPr>
-        <p:txBody>
-          <a:bodyPr wrap="square" anchor="t" lIns="0" rIns="0" tIns="0" bIns="0">
-            <a:spAutoFit/>
-          </a:bodyPr>
-          <a:lstStyle/>
-          <a:p>
-            <a:pPr algn="l"/>
-            <a:r>
-              <a:rPr sz="1050" b="1">
-                <a:solidFill>
-                  <a:srgbClr val="1B2A41"/>
-                </a:solidFill>
-              </a:rPr>
-              <a:t>Your 99% one-day VaR is ₹6.6 lakh. In 250 trading days you breach it nine times. What does that tell you?</a:t>
-            </a:r>
-          </a:p>
-          <a:p>
-            <a:pPr algn="l">
-              <a:spcBef>
-                <a:spcPts val="200"/>
-              </a:spcBef>
-            </a:pPr>
-            <a:r>
-              <a:rPr sz="900" b="1">
-                <a:solidFill>
-                  <a:srgbClr val="C9A227"/>
-                </a:solidFill>
-              </a:rPr>
-              <a:t>TIP  </a:t>
-            </a:r>
-            <a:r>
-              <a:rPr sz="900" b="0">
-                <a:solidFill>
-                  <a:srgbClr val="5D6B7E"/>
-                </a:solidFill>
-              </a:rPr>
-              <a:t>You expected about 2 or 3. Nine says the model understates risk, and it must be rebuilt, not explained away.</a:t>
-            </a:r>
-          </a:p>
-        </p:txBody>
-      </p:sp>
-      <p:sp>
-        <p:nvSpPr>
-          <p:cNvPr id="29" name="Rectangle 28"/>
-          <p:cNvSpPr/>
-          <p:nvPr/>
-        </p:nvSpPr>
-        <p:spPr>
-          <a:xfrm>
-            <a:off x="548640" y="5870448"/>
-            <a:ext cx="11091672" cy="512064"/>
+            <a:off x="8083296" y="2212848"/>
+            <a:ext cx="3557016" cy="3054096"/>
           </a:xfrm>
           <a:prstGeom prst="rect">
             <a:avLst/>
@@ -12251,14 +14154,295 @@
       </p:sp>
       <p:sp>
         <p:nvSpPr>
+          <p:cNvPr id="23" name="TextBox 22"/>
+          <p:cNvSpPr txBox="1"/>
+          <p:nvPr/>
+        </p:nvSpPr>
+        <p:spPr>
+          <a:xfrm>
+            <a:off x="8339327" y="2414016"/>
+            <a:ext cx="3044952" cy="274320"/>
+          </a:xfrm>
+          <a:prstGeom prst="rect">
+            <a:avLst/>
+          </a:prstGeom>
+          <a:noFill/>
+        </p:spPr>
+        <p:txBody>
+          <a:bodyPr wrap="square" anchor="t" lIns="0" rIns="0" tIns="0" bIns="0">
+            <a:spAutoFit/>
+          </a:bodyPr>
+          <a:lstStyle/>
+          <a:p>
+            <a:pPr algn="l"/>
+            <a:r>
+              <a:rPr sz="950" b="1">
+                <a:solidFill>
+                  <a:srgbClr val="C9A227"/>
+                </a:solidFill>
+              </a:rPr>
+              <a:t>PART C  ·  15 MIN</a:t>
+            </a:r>
+          </a:p>
+        </p:txBody>
+      </p:sp>
+      <p:sp>
+        <p:nvSpPr>
+          <p:cNvPr id="24" name="TextBox 23"/>
+          <p:cNvSpPr txBox="1"/>
+          <p:nvPr/>
+        </p:nvSpPr>
+        <p:spPr>
+          <a:xfrm>
+            <a:off x="8339327" y="2724912"/>
+            <a:ext cx="3044952" cy="402336"/>
+          </a:xfrm>
+          <a:prstGeom prst="rect">
+            <a:avLst/>
+          </a:prstGeom>
+          <a:noFill/>
+        </p:spPr>
+        <p:txBody>
+          <a:bodyPr wrap="square" anchor="t" lIns="0" rIns="0" tIns="0" bIns="0">
+            <a:spAutoFit/>
+          </a:bodyPr>
+          <a:lstStyle/>
+          <a:p>
+            <a:pPr algn="l"/>
+            <a:r>
+              <a:rPr sz="1700" b="1">
+                <a:solidFill>
+                  <a:srgbClr val="FFFFFF"/>
+                </a:solidFill>
+                <a:latin typeface="Georgia"/>
+              </a:rPr>
+              <a:t>Test it</a:t>
+            </a:r>
+          </a:p>
+        </p:txBody>
+      </p:sp>
+      <p:sp>
+        <p:nvSpPr>
+          <p:cNvPr id="25" name="TextBox 24"/>
+          <p:cNvSpPr txBox="1"/>
+          <p:nvPr/>
+        </p:nvSpPr>
+        <p:spPr>
+          <a:xfrm>
+            <a:off x="8339327" y="3255264"/>
+            <a:ext cx="3044952" cy="493776"/>
+          </a:xfrm>
+          <a:prstGeom prst="rect">
+            <a:avLst/>
+          </a:prstGeom>
+          <a:noFill/>
+        </p:spPr>
+        <p:txBody>
+          <a:bodyPr wrap="square" anchor="t" lIns="0" rIns="0" tIns="0" bIns="0">
+            <a:spAutoFit/>
+          </a:bodyPr>
+          <a:lstStyle/>
+          <a:p>
+            <a:pPr algn="l"/>
+            <a:r>
+              <a:rPr sz="1000" b="1">
+                <a:solidFill>
+                  <a:srgbClr val="C9A227"/>
+                </a:solidFill>
+              </a:rPr>
+              <a:t>▪  </a:t>
+            </a:r>
+            <a:r>
+              <a:rPr sz="1000" b="0">
+                <a:solidFill>
+                  <a:srgbClr val="C9D6EE"/>
+                </a:solidFill>
+              </a:rPr>
+              <a:t>Count the breaches over 250 real trading days</a:t>
+            </a:r>
+          </a:p>
+        </p:txBody>
+      </p:sp>
+      <p:sp>
+        <p:nvSpPr>
+          <p:cNvPr id="26" name="TextBox 25"/>
+          <p:cNvSpPr txBox="1"/>
+          <p:nvPr/>
+        </p:nvSpPr>
+        <p:spPr>
+          <a:xfrm>
+            <a:off x="8339327" y="3767328"/>
+            <a:ext cx="3044952" cy="493776"/>
+          </a:xfrm>
+          <a:prstGeom prst="rect">
+            <a:avLst/>
+          </a:prstGeom>
+          <a:noFill/>
+        </p:spPr>
+        <p:txBody>
+          <a:bodyPr wrap="square" anchor="t" lIns="0" rIns="0" tIns="0" bIns="0">
+            <a:spAutoFit/>
+          </a:bodyPr>
+          <a:lstStyle/>
+          <a:p>
+            <a:pPr algn="l"/>
+            <a:r>
+              <a:rPr sz="1000" b="1">
+                <a:solidFill>
+                  <a:srgbClr val="C9A227"/>
+                </a:solidFill>
+              </a:rPr>
+              <a:t>▪  </a:t>
+            </a:r>
+            <a:r>
+              <a:rPr sz="1000" b="0">
+                <a:solidFill>
+                  <a:srgbClr val="C9D6EE"/>
+                </a:solidFill>
+              </a:rPr>
+              <a:t>At 99% you expect two or three, not nine</a:t>
+            </a:r>
+          </a:p>
+        </p:txBody>
+      </p:sp>
+      <p:sp>
+        <p:nvSpPr>
+          <p:cNvPr id="27" name="TextBox 26"/>
+          <p:cNvSpPr txBox="1"/>
+          <p:nvPr/>
+        </p:nvSpPr>
+        <p:spPr>
+          <a:xfrm>
+            <a:off x="8339327" y="4279392"/>
+            <a:ext cx="3044952" cy="493776"/>
+          </a:xfrm>
+          <a:prstGeom prst="rect">
+            <a:avLst/>
+          </a:prstGeom>
+          <a:noFill/>
+        </p:spPr>
+        <p:txBody>
+          <a:bodyPr wrap="square" anchor="t" lIns="0" rIns="0" tIns="0" bIns="0">
+            <a:spAutoFit/>
+          </a:bodyPr>
+          <a:lstStyle/>
+          <a:p>
+            <a:pPr algn="l"/>
+            <a:r>
+              <a:rPr sz="1000" b="1">
+                <a:solidFill>
+                  <a:srgbClr val="C9A227"/>
+                </a:solidFill>
+              </a:rPr>
+              <a:t>▪  </a:t>
+            </a:r>
+            <a:r>
+              <a:rPr sz="1000" b="0">
+                <a:solidFill>
+                  <a:srgbClr val="C9D6EE"/>
+                </a:solidFill>
+              </a:rPr>
+              <a:t>Basel zones: 0-4 green, 5-9 yellow, 10 or more red</a:t>
+            </a:r>
+          </a:p>
+        </p:txBody>
+      </p:sp>
+      <p:sp>
+        <p:nvSpPr>
+          <p:cNvPr id="28" name="TextBox 27"/>
+          <p:cNvSpPr txBox="1"/>
+          <p:nvPr/>
+        </p:nvSpPr>
+        <p:spPr>
+          <a:xfrm>
+            <a:off x="8339327" y="4791456"/>
+            <a:ext cx="3044952" cy="493776"/>
+          </a:xfrm>
+          <a:prstGeom prst="rect">
+            <a:avLst/>
+          </a:prstGeom>
+          <a:noFill/>
+        </p:spPr>
+        <p:txBody>
+          <a:bodyPr wrap="square" anchor="t" lIns="0" rIns="0" tIns="0" bIns="0">
+            <a:spAutoFit/>
+          </a:bodyPr>
+          <a:lstStyle/>
+          <a:p>
+            <a:pPr algn="l"/>
+            <a:r>
+              <a:rPr sz="1000" b="1">
+                <a:solidFill>
+                  <a:srgbClr val="C9A227"/>
+                </a:solidFill>
+              </a:rPr>
+              <a:t>▪  </a:t>
+            </a:r>
+            <a:r>
+              <a:rPr sz="1000" b="0">
+                <a:solidFill>
+                  <a:srgbClr val="C9D6EE"/>
+                </a:solidFill>
+              </a:rPr>
+              <a:t>A red zone means rebuild it, not explain it away</a:t>
+            </a:r>
+          </a:p>
+        </p:txBody>
+      </p:sp>
+      <p:sp>
+        <p:nvSpPr>
+          <p:cNvPr id="29" name="Rectangle 28"/>
+          <p:cNvSpPr/>
+          <p:nvPr/>
+        </p:nvSpPr>
+        <p:spPr>
+          <a:xfrm>
+            <a:off x="548640" y="5760720"/>
+            <a:ext cx="11091672" cy="603504"/>
+          </a:xfrm>
+          <a:prstGeom prst="rect">
+            <a:avLst/>
+          </a:prstGeom>
+          <a:solidFill>
+            <a:srgbClr val="0F2145"/>
+          </a:solidFill>
+          <a:ln>
+            <a:noFill/>
+          </a:ln>
+          <a:effectLst/>
+        </p:spPr>
+        <p:style>
+          <a:lnRef idx="1">
+            <a:schemeClr val="accent1"/>
+          </a:lnRef>
+          <a:fillRef idx="3">
+            <a:schemeClr val="accent1"/>
+          </a:fillRef>
+          <a:effectRef idx="2">
+            <a:schemeClr val="accent1"/>
+          </a:effectRef>
+          <a:fontRef idx="minor">
+            <a:schemeClr val="lt1"/>
+          </a:fontRef>
+        </p:style>
+        <p:txBody>
+          <a:bodyPr rtlCol="0" anchor="ctr"/>
+          <a:lstStyle/>
+          <a:p>
+            <a:pPr algn="ctr"/>
+          </a:p>
+        </p:txBody>
+      </p:sp>
+      <p:sp>
+        <p:nvSpPr>
           <p:cNvPr id="30" name="Rectangle 29"/>
           <p:cNvSpPr/>
           <p:nvPr/>
         </p:nvSpPr>
         <p:spPr>
           <a:xfrm>
-            <a:off x="548640" y="5870448"/>
-            <a:ext cx="64008" cy="512064"/>
+            <a:off x="548640" y="5760720"/>
+            <a:ext cx="64008" cy="603504"/>
           </a:xfrm>
           <a:prstGeom prst="rect">
             <a:avLst/>
@@ -12301,8 +14485,8 @@
         </p:nvSpPr>
         <p:spPr>
           <a:xfrm>
-            <a:off x="822960" y="5870448"/>
-            <a:ext cx="10515600" cy="512064"/>
+            <a:off x="822960" y="5760720"/>
+            <a:ext cx="10543032" cy="603504"/>
           </a:xfrm>
           <a:prstGeom prst="rect">
             <a:avLst/>
@@ -12317,20 +14501,20 @@
           <a:p>
             <a:pPr algn="l"/>
             <a:r>
-              <a:rPr sz="1100" b="1">
+              <a:rPr sz="1200" b="1">
                 <a:solidFill>
                   <a:srgbClr val="C9A227"/>
                 </a:solidFill>
               </a:rPr>
-              <a:t>Before Session 6:  </a:t>
-            </a:r>
-            <a:r>
-              <a:rPr sz="1100" b="0">
+              <a:t>Why Part C matters most:  </a:t>
+            </a:r>
+            <a:r>
+              <a:rPr sz="1200" b="0">
                 <a:solidFill>
                   <a:srgbClr val="FFFFFF"/>
                 </a:solidFill>
               </a:rPr>
-              <a:t>pick five listed stocks, and write down the one thing that would make all five fall together.</a:t>
+              <a:t>building a VaR takes 35 minutes. Finding out it breached nine times when it should have breached three takes 15.</a:t>
             </a:r>
           </a:p>
         </p:txBody>
@@ -12344,7 +14528,7 @@
         <p:spPr>
           <a:xfrm>
             <a:off x="548640" y="6473952"/>
-            <a:ext cx="8229600" cy="228600"/>
+            <a:ext cx="7315200" cy="228600"/>
           </a:xfrm>
           <a:prstGeom prst="rect">
             <a:avLst/>
@@ -12364,7 +14548,7 @@
                   <a:srgbClr val="5D6B7E"/>
                 </a:solidFill>
               </a:rPr>
-              <a:t>The tip is the shape of the answer, not the whole answer. Two or three sentences each in the exam.</a:t>
+              <a:t>ISBMS · PGDM 2025–27 · AGENTIC AI &amp; ADVANCED ANALYTICS IN FINANCE</a:t>
             </a:r>
           </a:p>
         </p:txBody>
@@ -12398,7 +14582,7 @@
                   <a:srgbClr val="5D6B7E"/>
                 </a:solidFill>
               </a:rPr>
-              <a:t>MODULE 5  ·  08</a:t>
+              <a:t>MODULE 5  ·  09</a:t>
             </a:r>
           </a:p>
         </p:txBody>

--- a/slides/Module-05-Risk-Modelling.pptx
+++ b/slides/Module-05-Risk-Modelling.pptx
@@ -11,8 +11,8 @@
     <p:sldId id="256" r:id="rId2"/>
     <p:sldId id="257" r:id="rId3"/>
     <p:sldId id="284" r:id="rId4"/>
+    <p:sldId id="258" r:id="rId6"/>
     <p:sldId id="290" r:id="rId5"/>
-    <p:sldId id="258" r:id="rId6"/>
     <p:sldId id="259" r:id="rId7"/>
     <p:sldId id="260" r:id="rId8"/>
     <p:sldId id="261" r:id="rId9"/>
@@ -5340,7 +5340,7 @@
                   <a:srgbClr val="5D6B7E"/>
                 </a:solidFill>
               </a:rPr>
-              <a:t>MODULE 5  ·  08</a:t>
+              <a:t>MODULE 5  ·  10</a:t>
             </a:r>
           </a:p>
         </p:txBody>
@@ -6673,7 +6673,7 @@
                   <a:srgbClr val="5D6B7E"/>
                 </a:solidFill>
               </a:rPr>
-              <a:t>MODULE 5  ·  09</a:t>
+              <a:t>MODULE 5  ·  11</a:t>
             </a:r>
           </a:p>
         </p:txBody>
@@ -8146,7 +8146,7 @@
                   <a:srgbClr val="5D6B7E"/>
                 </a:solidFill>
               </a:rPr>
-              <a:t>MODULE 5  ·  10</a:t>
+              <a:t>MODULE 5  ·  12</a:t>
             </a:r>
           </a:p>
         </p:txBody>
@@ -12456,7 +12456,7 @@
                   <a:srgbClr val="1B2A4A"/>
                 </a:solidFill>
               </a:rPr>
-              <a:t>Now break down that ₹89,500 Crore capital into Basel III tiers:</a:t>
+              <a:t>Now break down that ₹89,500 Crore MINIMUM into Basel III tiers — the buffer sits on top of it:</a:t>
             </a:r>
             <a:endParaRPr lang="en-US" sz="1600" dirty="0"/>
           </a:p>
@@ -12992,7 +12992,7 @@
                   <a:srgbClr val="64748B"/>
                 </a:solidFill>
               </a:rPr>
-              <a:t>Conservation buffer</a:t>
+              <a:t>Conservation buffer — extra, on top of the 8%</a:t>
             </a:r>
             <a:endParaRPr lang="en-US" sz="1200" dirty="0"/>
           </a:p>
@@ -14407,7 +14407,7 @@
                   <a:srgbClr val="5D6B7E"/>
                 </a:solidFill>
               </a:rPr>
-              <a:t>MODULE 5  ·  03</a:t>
+              <a:t>MODULE 5  ·  04</a:t>
             </a:r>
           </a:p>
         </p:txBody>
@@ -15491,7 +15491,7 @@
                   <a:srgbClr val="5D6B7E"/>
                 </a:solidFill>
               </a:rPr>
-              <a:t>MODULE 5  ·  04</a:t>
+              <a:t>MODULE 5  ·  06</a:t>
             </a:r>
           </a:p>
         </p:txBody>
@@ -16726,7 +16726,7 @@
                   <a:srgbClr val="5D6B7E"/>
                 </a:solidFill>
               </a:rPr>
-              <a:t>MODULE 5  ·  05</a:t>
+              <a:t>MODULE 5  ·  07</a:t>
             </a:r>
           </a:p>
         </p:txBody>
@@ -17824,7 +17824,7 @@
                   <a:srgbClr val="5D6B7E"/>
                 </a:solidFill>
               </a:rPr>
-              <a:t>MODULE 5  ·  06</a:t>
+              <a:t>MODULE 5  ·  08</a:t>
             </a:r>
           </a:p>
         </p:txBody>
